--- a/docs/market_gap_finder_presentation.pptx
+++ b/docs/market_gap_finder_presentation.pptx
@@ -19,7 +19,6 @@
     <p:sldId id="267" r:id="rId18"/>
     <p:sldId id="268" r:id="rId19"/>
     <p:sldId id="269" r:id="rId20"/>
-    <p:sldId id="270" r:id="rId21"/>
   </p:sldIdLst>
   <p:sldSz cx="12191695" cy="6858000" type="screen4x3"/>
   <p:notesSz cx="6858000" cy="9144000"/>
@@ -3407,7 +3406,7 @@
                 </a:solidFill>
                 <a:latin typeface="Meiryo"/>
               </a:rPr>
-              <a:t>2026-04-02</a:t>
+              <a:t>2026-04-08</a:t>
             </a:r>
           </a:p>
         </p:txBody>
@@ -3518,14 +3517,14 @@
                 </a:solidFill>
                 <a:latin typeface="Meiryo"/>
               </a:rPr>
-              <a:t>5b: モデルの精度 ― 5-Fold クロスバリデーション</a:t>
+              <a:t>7: 何が予測に効いているか（SHAP）</a:t>
             </a:r>
           </a:p>
         </p:txBody>
       </p:sp>
       <p:pic>
         <p:nvPicPr>
-          <p:cNvPr id="4" name="Picture 3" descr="tokyo_scatter_actual_vs_pred.png"/>
+          <p:cNvPr id="4" name="Picture 3" descr="shap_importance_top10.png"/>
           <p:cNvPicPr>
             <a:picLocks noChangeAspect="1"/>
           </p:cNvPicPr>
@@ -3539,8 +3538,8 @@
         </p:blipFill>
         <p:spPr>
           <a:xfrm>
-            <a:off x="502920" y="868680"/>
-            <a:ext cx="5029200" cy="4114800"/>
+            <a:off x="594360" y="914400"/>
+            <a:ext cx="6492240" cy="5212080"/>
           </a:xfrm>
           <a:prstGeom prst="rect">
             <a:avLst/>
@@ -3555,170 +3554,8 @@
         </p:nvSpPr>
         <p:spPr>
           <a:xfrm>
-            <a:off x="5760720" y="868680"/>
-            <a:ext cx="5852160" cy="2011680"/>
-          </a:xfrm>
-          <a:prstGeom prst="roundRect">
-            <a:avLst>
-              <a:gd name="adj" fmla="val 8000"/>
-            </a:avLst>
-          </a:prstGeom>
-          <a:solidFill>
-            <a:srgbClr val="E8EEFD"/>
-          </a:solidFill>
-          <a:ln w="12700">
-            <a:solidFill>
-              <a:srgbClr val="D7DEEA"/>
-            </a:solidFill>
-          </a:ln>
-        </p:spPr>
-        <p:style>
-          <a:lnRef idx="1">
-            <a:schemeClr val="accent1"/>
-          </a:lnRef>
-          <a:fillRef idx="3">
-            <a:schemeClr val="accent1"/>
-          </a:fillRef>
-          <a:effectRef idx="2">
-            <a:schemeClr val="accent1"/>
-          </a:effectRef>
-          <a:fontRef idx="minor">
-            <a:schemeClr val="lt1"/>
-          </a:fontRef>
-        </p:style>
-        <p:txBody>
-          <a:bodyPr rtlCol="0" anchor="ctr"/>
-          <a:lstStyle/>
-          <a:p>
-            <a:pPr algn="ctr"/>
-          </a:p>
-        </p:txBody>
-      </p:sp>
-      <p:sp>
-        <p:nvSpPr>
-          <p:cNvPr id="6" name="TextBox 5"/>
-          <p:cNvSpPr txBox="1"/>
-          <p:nvPr/>
-        </p:nvSpPr>
-        <p:spPr>
-          <a:xfrm>
-            <a:off x="5989320" y="1005840"/>
-            <a:ext cx="5303520" cy="256032"/>
-          </a:xfrm>
-          <a:prstGeom prst="rect">
-            <a:avLst/>
-          </a:prstGeom>
-          <a:noFill/>
-        </p:spPr>
-        <p:txBody>
-          <a:bodyPr wrap="square" anchor="t">
-            <a:spAutoFit/>
-          </a:bodyPr>
-          <a:lstStyle/>
-          <a:p>
-            <a:pPr algn="l">
-              <a:spcBef>
-                <a:spcPts val="0"/>
-              </a:spcBef>
-              <a:spcAft>
-                <a:spcPts val="0"/>
-              </a:spcAft>
-            </a:pPr>
-            <a:r>
-              <a:rPr sz="1600" b="1">
-                <a:solidFill>
-                  <a:srgbClr val="2D5BE3"/>
-                </a:solidFill>
-                <a:latin typeface="Meiryo"/>
-              </a:rPr>
-              <a:t>なぜこの検証方法？</a:t>
-            </a:r>
-          </a:p>
-        </p:txBody>
-      </p:sp>
-      <p:sp>
-        <p:nvSpPr>
-          <p:cNvPr id="7" name="TextBox 6"/>
-          <p:cNvSpPr txBox="1"/>
-          <p:nvPr/>
-        </p:nvSpPr>
-        <p:spPr>
-          <a:xfrm>
-            <a:off x="5989320" y="1325880"/>
-            <a:ext cx="5394960" cy="1371600"/>
-          </a:xfrm>
-          <a:prstGeom prst="rect">
-            <a:avLst/>
-          </a:prstGeom>
-          <a:noFill/>
-        </p:spPr>
-        <p:txBody>
-          <a:bodyPr wrap="square" anchor="t">
-            <a:spAutoFit/>
-          </a:bodyPr>
-          <a:lstStyle/>
-          <a:p>
-            <a:pPr>
-              <a:spcAft>
-                <a:spcPts val="500"/>
-              </a:spcAft>
-            </a:pPr>
-            <a:r>
-              <a:rPr sz="1300">
-                <a:solidFill>
-                  <a:srgbClr val="2D5BE3"/>
-                </a:solidFill>
-                <a:latin typeface="Meiryo"/>
-              </a:rPr>
-              <a:t>• </a:t>
-            </a:r>
-            <a:r>
-              <a:rPr sz="1300">
-                <a:solidFill>
-                  <a:srgbClr val="222833"/>
-                </a:solidFill>
-                <a:latin typeface="Meiryo"/>
-              </a:rPr>
-              <a:t>本来はモデル構築後に新しい時点のデータで精度を測るのが理想だが、時系列データが取れない</a:t>
-            </a:r>
-          </a:p>
-          <a:p>
-            <a:pPr>
-              <a:spcAft>
-                <a:spcPts val="500"/>
-              </a:spcAft>
-            </a:pPr>
-            <a:r>
-              <a:rPr sz="1300">
-                <a:solidFill>
-                  <a:srgbClr val="2D5BE3"/>
-                </a:solidFill>
-                <a:latin typeface="Meiryo"/>
-              </a:rPr>
-              <a:t>• </a:t>
-            </a:r>
-            <a:r>
-              <a:rPr sz="1300">
-                <a:solidFill>
-                  <a:srgbClr val="222833"/>
-                </a:solidFill>
-                <a:latin typeface="Meiryo"/>
-              </a:rPr>
-              <a:t>学習データで評価するとリーケージ（情報漏れ）になるため、空間的に分割して未知のエリアに対する予測力を測る</a:t>
-            </a:r>
-          </a:p>
-        </p:txBody>
-      </p:sp>
-      <p:sp>
-        <p:nvSpPr>
-          <p:cNvPr id="8" name="Rounded Rectangle 7"/>
-          <p:cNvSpPr/>
-          <p:nvPr/>
-        </p:nvSpPr>
-        <p:spPr>
-          <a:xfrm>
-            <a:off x="5760720" y="3063240"/>
-            <a:ext cx="5852160" cy="1645920"/>
+            <a:off x="7315200" y="914400"/>
+            <a:ext cx="4297680" cy="5212080"/>
           </a:xfrm>
           <a:prstGeom prst="roundRect">
             <a:avLst>
@@ -3758,14 +3595,14 @@
       </p:sp>
       <p:sp>
         <p:nvSpPr>
-          <p:cNvPr id="9" name="TextBox 8"/>
+          <p:cNvPr id="6" name="TextBox 5"/>
           <p:cNvSpPr txBox="1"/>
           <p:nvPr/>
         </p:nvSpPr>
         <p:spPr>
           <a:xfrm>
-            <a:off x="5989320" y="3200400"/>
-            <a:ext cx="5303520" cy="256032"/>
+            <a:off x="7543800" y="1170432"/>
+            <a:ext cx="2011680" cy="256032"/>
           </a:xfrm>
           <a:prstGeom prst="rect">
             <a:avLst/>
@@ -3789,25 +3626,25 @@
             <a:r>
               <a:rPr sz="1600" b="1">
                 <a:solidFill>
-                  <a:srgbClr val="0F9D58"/>
-                </a:solidFill>
-                <a:latin typeface="Meiryo"/>
-              </a:rPr>
-              <a:t>具体的な方法</a:t>
-            </a:r>
-          </a:p>
-        </p:txBody>
-      </p:sp>
-      <p:sp>
-        <p:nvSpPr>
-          <p:cNvPr id="10" name="TextBox 9"/>
+                  <a:srgbClr val="DB4437"/>
+                </a:solidFill>
+                <a:latin typeface="Meiryo"/>
+              </a:rPr>
+              <a:t>解釈</a:t>
+            </a:r>
+          </a:p>
+        </p:txBody>
+      </p:sp>
+      <p:sp>
+        <p:nvSpPr>
+          <p:cNvPr id="7" name="TextBox 6"/>
           <p:cNvSpPr txBox="1"/>
           <p:nvPr/>
         </p:nvSpPr>
         <p:spPr>
           <a:xfrm>
-            <a:off x="5989320" y="3520440"/>
-            <a:ext cx="5394960" cy="1005840"/>
+            <a:off x="7543800" y="1600200"/>
+            <a:ext cx="3749039" cy="1828800"/>
           </a:xfrm>
           <a:prstGeom prst="rect">
             <a:avLst/>
@@ -3826,22 +3663,22 @@
               </a:spcAft>
             </a:pPr>
             <a:r>
-              <a:rPr sz="1300">
-                <a:solidFill>
-                  <a:srgbClr val="0F9D58"/>
+              <a:rPr sz="1500">
+                <a:solidFill>
+                  <a:srgbClr val="DB4437"/>
                 </a:solidFill>
                 <a:latin typeface="Meiryo"/>
               </a:rPr>
               <a:t>• </a:t>
             </a:r>
             <a:r>
-              <a:rPr sz="1300">
+              <a:rPr sz="1500">
                 <a:solidFill>
                   <a:srgbClr val="222833"/>
                 </a:solidFill>
                 <a:latin typeface="Meiryo"/>
               </a:rPr>
-              <a:t>東京の4,520行を店舗数の偏りが出ないよう5グループに層化分割</a:t>
+              <a:t>ジャンル種別（SHAP=0.196）と他ジャンル店舗数（0.109）が上位</a:t>
             </a:r>
           </a:p>
           <a:p>
@@ -3851,22 +3688,22 @@
               </a:spcAft>
             </a:pPr>
             <a:r>
-              <a:rPr sz="1300">
-                <a:solidFill>
-                  <a:srgbClr val="0F9D58"/>
+              <a:rPr sz="1500">
+                <a:solidFill>
+                  <a:srgbClr val="DB4437"/>
                 </a:solidFill>
                 <a:latin typeface="Meiryo"/>
               </a:rPr>
               <a:t>• </a:t>
             </a:r>
             <a:r>
-              <a:rPr sz="1300">
+              <a:rPr sz="1500">
                 <a:solidFill>
                   <a:srgbClr val="222833"/>
                 </a:solidFill>
                 <a:latin typeface="Meiryo"/>
               </a:rPr>
-              <a:t>StratifiedKFoldで店舗数ビンが均等になるよう分割</a:t>
+              <a:t>人口系特徴量は含めているが重要度は低い（下位に位置）</a:t>
             </a:r>
           </a:p>
           <a:p>
@@ -3876,184 +3713,22 @@
               </a:spcAft>
             </a:pPr>
             <a:r>
-              <a:rPr sz="1300">
-                <a:solidFill>
-                  <a:srgbClr val="0F9D58"/>
+              <a:rPr sz="1500">
+                <a:solidFill>
+                  <a:srgbClr val="DB4437"/>
                 </a:solidFill>
                 <a:latin typeface="Meiryo"/>
               </a:rPr>
               <a:t>• </a:t>
             </a:r>
             <a:r>
-              <a:rPr sz="1300">
+              <a:rPr sz="1500">
                 <a:solidFill>
                   <a:srgbClr val="222833"/>
                 </a:solidFill>
                 <a:latin typeface="Meiryo"/>
               </a:rPr>
-              <a:t>4グループで学習→残り1グループで予測、を5回繰り返す</a:t>
-            </a:r>
-          </a:p>
-        </p:txBody>
-      </p:sp>
-      <p:sp>
-        <p:nvSpPr>
-          <p:cNvPr id="11" name="Rounded Rectangle 10"/>
-          <p:cNvSpPr/>
-          <p:nvPr/>
-        </p:nvSpPr>
-        <p:spPr>
-          <a:xfrm>
-            <a:off x="5760720" y="4892040"/>
-            <a:ext cx="5852160" cy="1371600"/>
-          </a:xfrm>
-          <a:prstGeom prst="roundRect">
-            <a:avLst>
-              <a:gd name="adj" fmla="val 8000"/>
-            </a:avLst>
-          </a:prstGeom>
-          <a:solidFill>
-            <a:srgbClr val="E8EEFD"/>
-          </a:solidFill>
-          <a:ln w="12700">
-            <a:solidFill>
-              <a:srgbClr val="D7DEEA"/>
-            </a:solidFill>
-          </a:ln>
-        </p:spPr>
-        <p:style>
-          <a:lnRef idx="1">
-            <a:schemeClr val="accent1"/>
-          </a:lnRef>
-          <a:fillRef idx="3">
-            <a:schemeClr val="accent1"/>
-          </a:fillRef>
-          <a:effectRef idx="2">
-            <a:schemeClr val="accent1"/>
-          </a:effectRef>
-          <a:fontRef idx="minor">
-            <a:schemeClr val="lt1"/>
-          </a:fontRef>
-        </p:style>
-        <p:txBody>
-          <a:bodyPr rtlCol="0" anchor="ctr"/>
-          <a:lstStyle/>
-          <a:p>
-            <a:pPr algn="ctr"/>
-          </a:p>
-        </p:txBody>
-      </p:sp>
-      <p:sp>
-        <p:nvSpPr>
-          <p:cNvPr id="12" name="TextBox 11"/>
-          <p:cNvSpPr txBox="1"/>
-          <p:nvPr/>
-        </p:nvSpPr>
-        <p:spPr>
-          <a:xfrm>
-            <a:off x="5989320" y="5029200"/>
-            <a:ext cx="5303520" cy="256032"/>
-          </a:xfrm>
-          <a:prstGeom prst="rect">
-            <a:avLst/>
-          </a:prstGeom>
-          <a:noFill/>
-        </p:spPr>
-        <p:txBody>
-          <a:bodyPr wrap="square" anchor="t">
-            <a:spAutoFit/>
-          </a:bodyPr>
-          <a:lstStyle/>
-          <a:p>
-            <a:pPr algn="l">
-              <a:spcBef>
-                <a:spcPts val="0"/>
-              </a:spcBef>
-              <a:spcAft>
-                <a:spcPts val="0"/>
-              </a:spcAft>
-            </a:pPr>
-            <a:r>
-              <a:rPr sz="1600" b="1">
-                <a:solidFill>
-                  <a:srgbClr val="2D5BE3"/>
-                </a:solidFill>
-                <a:latin typeface="Meiryo"/>
-              </a:rPr>
-              <a:t>結果</a:t>
-            </a:r>
-          </a:p>
-        </p:txBody>
-      </p:sp>
-      <p:sp>
-        <p:nvSpPr>
-          <p:cNvPr id="13" name="TextBox 12"/>
-          <p:cNvSpPr txBox="1"/>
-          <p:nvPr/>
-        </p:nvSpPr>
-        <p:spPr>
-          <a:xfrm>
-            <a:off x="5989320" y="5349240"/>
-            <a:ext cx="5394960" cy="731520"/>
-          </a:xfrm>
-          <a:prstGeom prst="rect">
-            <a:avLst/>
-          </a:prstGeom>
-          <a:noFill/>
-        </p:spPr>
-        <p:txBody>
-          <a:bodyPr wrap="square" anchor="t">
-            <a:spAutoFit/>
-          </a:bodyPr>
-          <a:lstStyle/>
-          <a:p>
-            <a:pPr>
-              <a:spcAft>
-                <a:spcPts val="500"/>
-              </a:spcAft>
-            </a:pPr>
-            <a:r>
-              <a:rPr sz="1300">
-                <a:solidFill>
-                  <a:srgbClr val="2D5BE3"/>
-                </a:solidFill>
-                <a:latin typeface="Meiryo"/>
-              </a:rPr>
-              <a:t>• </a:t>
-            </a:r>
-            <a:r>
-              <a:rPr sz="1300">
-                <a:solidFill>
-                  <a:srgbClr val="222833"/>
-                </a:solidFill>
-                <a:latin typeface="Meiryo"/>
-              </a:rPr>
-              <a:t>R²=0.787（平均）＝飲食店数のばらつきの約79%を説明できる</a:t>
-            </a:r>
-          </a:p>
-          <a:p>
-            <a:pPr>
-              <a:spcAft>
-                <a:spcPts val="500"/>
-              </a:spcAft>
-            </a:pPr>
-            <a:r>
-              <a:rPr sz="1300">
-                <a:solidFill>
-                  <a:srgbClr val="2D5BE3"/>
-                </a:solidFill>
-                <a:latin typeface="Meiryo"/>
-              </a:rPr>
-              <a:t>• </a:t>
-            </a:r>
-            <a:r>
-              <a:rPr sz="1300">
-                <a:solidFill>
-                  <a:srgbClr val="222833"/>
-                </a:solidFill>
-                <a:latin typeface="Meiryo"/>
-              </a:rPr>
-              <a:t>RMSE=0.329（対数スケール上の平均誤差）</a:t>
+              <a:t>→ 「人口が多い」より「商業集積がある」方が飲食店数を決める</a:t>
             </a:r>
           </a:p>
         </p:txBody>
@@ -4164,45 +3839,208 @@
                 </a:solidFill>
                 <a:latin typeface="Meiryo"/>
               </a:rPr>
-              <a:t>5c: 何が予測に効いているか（SHAP）</a:t>
-            </a:r>
-          </a:p>
-        </p:txBody>
-      </p:sp>
-      <p:pic>
-        <p:nvPicPr>
-          <p:cNvPr id="4" name="Picture 3" descr="shap_importance_top10.png"/>
-          <p:cNvPicPr>
-            <a:picLocks noChangeAspect="1"/>
-          </p:cNvPicPr>
+              <a:t>8: 課題点とうまくいった点</a:t>
+            </a:r>
+          </a:p>
+        </p:txBody>
+      </p:sp>
+      <p:sp>
+        <p:nvSpPr>
+          <p:cNvPr id="4" name="Rounded Rectangle 3"/>
+          <p:cNvSpPr/>
           <p:nvPr/>
-        </p:nvPicPr>
-        <p:blipFill>
-          <a:blip r:embed="rId2"/>
-          <a:stretch>
-            <a:fillRect/>
-          </a:stretch>
-        </p:blipFill>
-        <p:spPr>
-          <a:xfrm>
-            <a:off x="594360" y="914400"/>
-            <a:ext cx="6492240" cy="5212080"/>
+        </p:nvSpPr>
+        <p:spPr>
+          <a:xfrm>
+            <a:off x="640080" y="914400"/>
+            <a:ext cx="5349240" cy="5303520"/>
+          </a:xfrm>
+          <a:prstGeom prst="roundRect">
+            <a:avLst>
+              <a:gd name="adj" fmla="val 8000"/>
+            </a:avLst>
+          </a:prstGeom>
+          <a:solidFill>
+            <a:srgbClr val="E8EEFD"/>
+          </a:solidFill>
+          <a:ln w="12700">
+            <a:solidFill>
+              <a:srgbClr val="D7DEEA"/>
+            </a:solidFill>
+          </a:ln>
+        </p:spPr>
+        <p:style>
+          <a:lnRef idx="1">
+            <a:schemeClr val="accent1"/>
+          </a:lnRef>
+          <a:fillRef idx="3">
+            <a:schemeClr val="accent1"/>
+          </a:fillRef>
+          <a:effectRef idx="2">
+            <a:schemeClr val="accent1"/>
+          </a:effectRef>
+          <a:fontRef idx="minor">
+            <a:schemeClr val="lt1"/>
+          </a:fontRef>
+        </p:style>
+        <p:txBody>
+          <a:bodyPr rtlCol="0" anchor="ctr"/>
+          <a:lstStyle/>
+          <a:p>
+            <a:pPr algn="ctr"/>
+          </a:p>
+        </p:txBody>
+      </p:sp>
+      <p:sp>
+        <p:nvSpPr>
+          <p:cNvPr id="5" name="TextBox 4"/>
+          <p:cNvSpPr txBox="1"/>
+          <p:nvPr/>
+        </p:nvSpPr>
+        <p:spPr>
+          <a:xfrm>
+            <a:off x="896112" y="1143000"/>
+            <a:ext cx="2560320" cy="256032"/>
           </a:xfrm>
           <a:prstGeom prst="rect">
             <a:avLst/>
           </a:prstGeom>
-        </p:spPr>
-      </p:pic>
-      <p:sp>
-        <p:nvSpPr>
-          <p:cNvPr id="5" name="Rounded Rectangle 4"/>
+          <a:noFill/>
+        </p:spPr>
+        <p:txBody>
+          <a:bodyPr wrap="square" anchor="t">
+            <a:spAutoFit/>
+          </a:bodyPr>
+          <a:lstStyle/>
+          <a:p>
+            <a:pPr algn="l">
+              <a:spcBef>
+                <a:spcPts val="0"/>
+              </a:spcBef>
+              <a:spcAft>
+                <a:spcPts val="0"/>
+              </a:spcAft>
+            </a:pPr>
+            <a:r>
+              <a:rPr sz="1600" b="1">
+                <a:solidFill>
+                  <a:srgbClr val="0F9D58"/>
+                </a:solidFill>
+                <a:latin typeface="Meiryo"/>
+              </a:rPr>
+              <a:t>うまくいった点</a:t>
+            </a:r>
+          </a:p>
+        </p:txBody>
+      </p:sp>
+      <p:sp>
+        <p:nvSpPr>
+          <p:cNvPr id="6" name="TextBox 5"/>
+          <p:cNvSpPr txBox="1"/>
+          <p:nvPr/>
+        </p:nvSpPr>
+        <p:spPr>
+          <a:xfrm>
+            <a:off x="896112" y="1554480"/>
+            <a:ext cx="4754880" cy="4297680"/>
+          </a:xfrm>
+          <a:prstGeom prst="rect">
+            <a:avLst/>
+          </a:prstGeom>
+          <a:noFill/>
+        </p:spPr>
+        <p:txBody>
+          <a:bodyPr wrap="square" anchor="t">
+            <a:spAutoFit/>
+          </a:bodyPr>
+          <a:lstStyle/>
+          <a:p>
+            <a:pPr>
+              <a:spcAft>
+                <a:spcPts val="500"/>
+              </a:spcAft>
+            </a:pPr>
+            <a:r>
+              <a:rPr sz="1600">
+                <a:solidFill>
+                  <a:srgbClr val="0F9D58"/>
+                </a:solidFill>
+                <a:latin typeface="Meiryo"/>
+              </a:rPr>
+              <a:t>• </a:t>
+            </a:r>
+            <a:r>
+              <a:rPr sz="1600">
+                <a:solidFill>
+                  <a:srgbClr val="222833"/>
+                </a:solidFill>
+                <a:latin typeface="Meiryo"/>
+              </a:rPr>
+              <a:t>RMSE = 5.0店: 実店舗数スケールで平均約5店の誤差</a:t>
+            </a:r>
+          </a:p>
+          <a:p>
+            <a:pPr>
+              <a:spcAft>
+                <a:spcPts val="500"/>
+              </a:spcAft>
+            </a:pPr>
+            <a:r>
+              <a:rPr sz="1600">
+                <a:solidFill>
+                  <a:srgbClr val="0F9D58"/>
+                </a:solidFill>
+                <a:latin typeface="Meiryo"/>
+              </a:rPr>
+              <a:t>• </a:t>
+            </a:r>
+            <a:r>
+              <a:rPr sz="1600">
+                <a:solidFill>
+                  <a:srgbClr val="222833"/>
+                </a:solidFill>
+                <a:latin typeface="Meiryo"/>
+              </a:rPr>
+              <a:t>28特徴量（人口含む）でOptuna 100 trialチューニング</a:t>
+            </a:r>
+          </a:p>
+          <a:p>
+            <a:pPr>
+              <a:spcAft>
+                <a:spcPts val="500"/>
+              </a:spcAft>
+            </a:pPr>
+            <a:r>
+              <a:rPr sz="1600">
+                <a:solidFill>
+                  <a:srgbClr val="0F9D58"/>
+                </a:solidFill>
+                <a:latin typeface="Meiryo"/>
+              </a:rPr>
+              <a:t>• </a:t>
+            </a:r>
+            <a:r>
+              <a:rPr sz="1600">
+                <a:solidFill>
+                  <a:srgbClr val="222833"/>
+                </a:solidFill>
+                <a:latin typeface="Meiryo"/>
+              </a:rPr>
+              <a:t>ML予測のみでシンプルかつ高精度なスコアリング</a:t>
+            </a:r>
+          </a:p>
+        </p:txBody>
+      </p:sp>
+      <p:sp>
+        <p:nvSpPr>
+          <p:cNvPr id="7" name="Rounded Rectangle 6"/>
           <p:cNvSpPr/>
           <p:nvPr/>
         </p:nvSpPr>
         <p:spPr>
           <a:xfrm>
-            <a:off x="7315200" y="914400"/>
-            <a:ext cx="4297680" cy="5212080"/>
+            <a:off x="6172200" y="914400"/>
+            <a:ext cx="5349240" cy="5303520"/>
           </a:xfrm>
           <a:prstGeom prst="roundRect">
             <a:avLst>
@@ -4242,14 +4080,14 @@
       </p:sp>
       <p:sp>
         <p:nvSpPr>
-          <p:cNvPr id="6" name="TextBox 5"/>
+          <p:cNvPr id="8" name="TextBox 7"/>
           <p:cNvSpPr txBox="1"/>
           <p:nvPr/>
         </p:nvSpPr>
         <p:spPr>
           <a:xfrm>
-            <a:off x="7543800" y="1170432"/>
-            <a:ext cx="2011680" cy="256032"/>
+            <a:off x="6428232" y="1143000"/>
+            <a:ext cx="2560320" cy="256032"/>
           </a:xfrm>
           <a:prstGeom prst="rect">
             <a:avLst/>
@@ -4277,21 +4115,21 @@
                 </a:solidFill>
                 <a:latin typeface="Meiryo"/>
               </a:rPr>
-              <a:t>解釈</a:t>
-            </a:r>
-          </a:p>
-        </p:txBody>
-      </p:sp>
-      <p:sp>
-        <p:nvSpPr>
-          <p:cNvPr id="7" name="TextBox 6"/>
+              <a:t>課題点</a:t>
+            </a:r>
+          </a:p>
+        </p:txBody>
+      </p:sp>
+      <p:sp>
+        <p:nvSpPr>
+          <p:cNvPr id="9" name="TextBox 8"/>
           <p:cNvSpPr txBox="1"/>
           <p:nvPr/>
         </p:nvSpPr>
         <p:spPr>
           <a:xfrm>
-            <a:off x="7543800" y="1600200"/>
-            <a:ext cx="3749039" cy="1828800"/>
+            <a:off x="6428232" y="1554480"/>
+            <a:ext cx="4709160" cy="4297680"/>
           </a:xfrm>
           <a:prstGeom prst="rect">
             <a:avLst/>
@@ -4310,7 +4148,7 @@
               </a:spcAft>
             </a:pPr>
             <a:r>
-              <a:rPr sz="1500">
+              <a:rPr sz="1600">
                 <a:solidFill>
                   <a:srgbClr val="DB4437"/>
                 </a:solidFill>
@@ -4319,13 +4157,13 @@
               <a:t>• </a:t>
             </a:r>
             <a:r>
-              <a:rPr sz="1500">
+              <a:rPr sz="1600">
                 <a:solidFill>
                   <a:srgbClr val="222833"/>
                 </a:solidFill>
                 <a:latin typeface="Meiryo"/>
               </a:rPr>
-              <a:t>ジャンル種別（SHAP=0.196）と他ジャンル店舗数（0.109）が上位</a:t>
+              <a:t>約半数のエリアが店舗数1軒（データの偏り）</a:t>
             </a:r>
           </a:p>
           <a:p>
@@ -4335,7 +4173,7 @@
               </a:spcAft>
             </a:pPr>
             <a:r>
-              <a:rPr sz="1500">
+              <a:rPr sz="1600">
                 <a:solidFill>
                   <a:srgbClr val="DB4437"/>
                 </a:solidFill>
@@ -4344,38 +4182,13 @@
               <a:t>• </a:t>
             </a:r>
             <a:r>
-              <a:rPr sz="1500">
+              <a:rPr sz="1600">
                 <a:solidFill>
                   <a:srgbClr val="222833"/>
                 </a:solidFill>
                 <a:latin typeface="Meiryo"/>
               </a:rPr>
-              <a:t>人口系特徴量は含めているが重要度は低い（下位に位置）</a:t>
-            </a:r>
-          </a:p>
-          <a:p>
-            <a:pPr>
-              <a:spcAft>
-                <a:spcPts val="500"/>
-              </a:spcAft>
-            </a:pPr>
-            <a:r>
-              <a:rPr sz="1500">
-                <a:solidFill>
-                  <a:srgbClr val="DB4437"/>
-                </a:solidFill>
-                <a:latin typeface="Meiryo"/>
-              </a:rPr>
-              <a:t>• </a:t>
-            </a:r>
-            <a:r>
-              <a:rPr sz="1500">
-                <a:solidFill>
-                  <a:srgbClr val="222833"/>
-                </a:solidFill>
-                <a:latin typeface="Meiryo"/>
-              </a:rPr>
-              <a:t>→ 「人口が多い」より「商業集積がある」方が飲食店数を決める</a:t>
+              <a:t>バックテスト未実施</a:t>
             </a:r>
           </a:p>
         </p:txBody>
@@ -4486,7 +4299,7 @@
                 </a:solidFill>
                 <a:latin typeface="Meiryo"/>
               </a:rPr>
-              <a:t>6: 課題点とうまくいった点</a:t>
+              <a:t>9: ビジネスインパクト</a:t>
             </a:r>
           </a:p>
         </p:txBody>
@@ -4499,8 +4312,8 @@
         </p:nvSpPr>
         <p:spPr>
           <a:xfrm>
-            <a:off x="640080" y="914400"/>
-            <a:ext cx="5349240" cy="5303520"/>
+            <a:off x="594360" y="868680"/>
+            <a:ext cx="10972800" cy="868680"/>
           </a:xfrm>
           <a:prstGeom prst="roundRect">
             <a:avLst>
@@ -4546,8 +4359,8 @@
         </p:nvSpPr>
         <p:spPr>
           <a:xfrm>
-            <a:off x="896112" y="1143000"/>
-            <a:ext cx="2560320" cy="256032"/>
+            <a:off x="868680" y="1124712"/>
+            <a:ext cx="10332720" cy="292608"/>
           </a:xfrm>
           <a:prstGeom prst="rect">
             <a:avLst/>
@@ -4569,27 +4382,116 @@
               </a:spcAft>
             </a:pPr>
             <a:r>
-              <a:rPr sz="1600" b="1">
-                <a:solidFill>
-                  <a:srgbClr val="0F9D58"/>
-                </a:solidFill>
-                <a:latin typeface="Meiryo"/>
-              </a:rPr>
-              <a:t>うまくいった点</a:t>
-            </a:r>
-          </a:p>
-        </p:txBody>
-      </p:sp>
-      <p:sp>
-        <p:nvSpPr>
-          <p:cNvPr id="6" name="TextBox 5"/>
+              <a:rPr sz="1900" b="1">
+                <a:solidFill>
+                  <a:srgbClr val="222833"/>
+                </a:solidFill>
+                <a:latin typeface="Meiryo"/>
+              </a:rPr>
+              <a:t>「どの街に、どのジャンルの店が足りないか」を自動で見つけて、根拠付きで推薦する</a:t>
+            </a:r>
+          </a:p>
+        </p:txBody>
+      </p:sp>
+      <p:sp>
+        <p:nvSpPr>
+          <p:cNvPr id="6" name="Rounded Rectangle 5"/>
+          <p:cNvSpPr/>
+          <p:nvPr/>
+        </p:nvSpPr>
+        <p:spPr>
+          <a:xfrm>
+            <a:off x="594360" y="1965960"/>
+            <a:ext cx="5349240" cy="4114800"/>
+          </a:xfrm>
+          <a:prstGeom prst="roundRect">
+            <a:avLst>
+              <a:gd name="adj" fmla="val 8000"/>
+            </a:avLst>
+          </a:prstGeom>
+          <a:solidFill>
+            <a:srgbClr val="E8EEFD"/>
+          </a:solidFill>
+          <a:ln w="12700">
+            <a:solidFill>
+              <a:srgbClr val="D7DEEA"/>
+            </a:solidFill>
+          </a:ln>
+        </p:spPr>
+        <p:style>
+          <a:lnRef idx="1">
+            <a:schemeClr val="accent1"/>
+          </a:lnRef>
+          <a:fillRef idx="3">
+            <a:schemeClr val="accent1"/>
+          </a:fillRef>
+          <a:effectRef idx="2">
+            <a:schemeClr val="accent1"/>
+          </a:effectRef>
+          <a:fontRef idx="minor">
+            <a:schemeClr val="lt1"/>
+          </a:fontRef>
+        </p:style>
+        <p:txBody>
+          <a:bodyPr rtlCol="0" anchor="ctr"/>
+          <a:lstStyle/>
+          <a:p>
+            <a:pPr algn="ctr"/>
+          </a:p>
+        </p:txBody>
+      </p:sp>
+      <p:sp>
+        <p:nvSpPr>
+          <p:cNvPr id="7" name="TextBox 6"/>
           <p:cNvSpPr txBox="1"/>
           <p:nvPr/>
         </p:nvSpPr>
         <p:spPr>
           <a:xfrm>
-            <a:off x="896112" y="1554480"/>
-            <a:ext cx="4754880" cy="4297680"/>
+            <a:off x="841248" y="2176272"/>
+            <a:ext cx="3200400" cy="256032"/>
+          </a:xfrm>
+          <a:prstGeom prst="rect">
+            <a:avLst/>
+          </a:prstGeom>
+          <a:noFill/>
+        </p:spPr>
+        <p:txBody>
+          <a:bodyPr wrap="square" anchor="t">
+            <a:spAutoFit/>
+          </a:bodyPr>
+          <a:lstStyle/>
+          <a:p>
+            <a:pPr algn="l">
+              <a:spcBef>
+                <a:spcPts val="0"/>
+              </a:spcBef>
+              <a:spcAft>
+                <a:spcPts val="0"/>
+              </a:spcAft>
+            </a:pPr>
+            <a:r>
+              <a:rPr sz="1600" b="1">
+                <a:solidFill>
+                  <a:srgbClr val="2D5BE3"/>
+                </a:solidFill>
+                <a:latin typeface="Meiryo"/>
+              </a:rPr>
+              <a:t>新規エリア進出の判断</a:t>
+            </a:r>
+          </a:p>
+        </p:txBody>
+      </p:sp>
+      <p:sp>
+        <p:nvSpPr>
+          <p:cNvPr id="8" name="TextBox 7"/>
+          <p:cNvSpPr txBox="1"/>
+          <p:nvPr/>
+        </p:nvSpPr>
+        <p:spPr>
+          <a:xfrm>
+            <a:off x="841248" y="2542032"/>
+            <a:ext cx="4754880" cy="3200400"/>
           </a:xfrm>
           <a:prstGeom prst="rect">
             <a:avLst/>
@@ -4608,22 +4510,22 @@
               </a:spcAft>
             </a:pPr>
             <a:r>
-              <a:rPr sz="1600">
-                <a:solidFill>
-                  <a:srgbClr val="0F9D58"/>
+              <a:rPr sz="1500">
+                <a:solidFill>
+                  <a:srgbClr val="2D5BE3"/>
                 </a:solidFill>
                 <a:latin typeface="Meiryo"/>
               </a:rPr>
               <a:t>• </a:t>
             </a:r>
             <a:r>
-              <a:rPr sz="1600">
+              <a:rPr sz="1500">
                 <a:solidFill>
                   <a:srgbClr val="222833"/>
                 </a:solidFill>
                 <a:latin typeface="Meiryo"/>
               </a:rPr>
-              <a:t>R²=0.787: 飲食店数の約79%を説明</a:t>
+              <a:t>東京都内の未出店エリアを、既存データだけで事前評価</a:t>
             </a:r>
           </a:p>
           <a:p>
@@ -4633,61 +4535,36 @@
               </a:spcAft>
             </a:pPr>
             <a:r>
-              <a:rPr sz="1600">
-                <a:solidFill>
-                  <a:srgbClr val="0F9D58"/>
+              <a:rPr sz="1500">
+                <a:solidFill>
+                  <a:srgbClr val="2D5BE3"/>
                 </a:solidFill>
                 <a:latin typeface="Meiryo"/>
               </a:rPr>
               <a:t>• </a:t>
             </a:r>
             <a:r>
-              <a:rPr sz="1600">
+              <a:rPr sz="1500">
                 <a:solidFill>
                   <a:srgbClr val="222833"/>
                 </a:solidFill>
                 <a:latin typeface="Meiryo"/>
               </a:rPr>
-              <a:t>28特徴量（人口含む）でOptuna 100 trialチューニング</a:t>
-            </a:r>
-          </a:p>
-          <a:p>
-            <a:pPr>
-              <a:spcAft>
-                <a:spcPts val="500"/>
-              </a:spcAft>
-            </a:pPr>
-            <a:r>
-              <a:rPr sz="1600">
-                <a:solidFill>
-                  <a:srgbClr val="0F9D58"/>
-                </a:solidFill>
-                <a:latin typeface="Meiryo"/>
-              </a:rPr>
-              <a:t>• </a:t>
-            </a:r>
-            <a:r>
-              <a:rPr sz="1600">
-                <a:solidFill>
-                  <a:srgbClr val="222833"/>
-                </a:solidFill>
-                <a:latin typeface="Meiryo"/>
-              </a:rPr>
-              <a:t>v5（ML Gapのみ）でシンプルかつ高精度なスコアリング</a:t>
-            </a:r>
-          </a:p>
-        </p:txBody>
-      </p:sp>
-      <p:sp>
-        <p:nvSpPr>
-          <p:cNvPr id="7" name="Rounded Rectangle 6"/>
+              <a:t>東京1,233メッシュ × 8ジャンル = 約9,800パターンの候補を一括で洗い出し</a:t>
+            </a:r>
+          </a:p>
+        </p:txBody>
+      </p:sp>
+      <p:sp>
+        <p:nvSpPr>
+          <p:cNvPr id="9" name="Rounded Rectangle 8"/>
           <p:cNvSpPr/>
           <p:nvPr/>
         </p:nvSpPr>
         <p:spPr>
           <a:xfrm>
-            <a:off x="6172200" y="914400"/>
-            <a:ext cx="5349240" cy="5303520"/>
+            <a:off x="6172200" y="1965960"/>
+            <a:ext cx="5349240" cy="4114800"/>
           </a:xfrm>
           <a:prstGeom prst="roundRect">
             <a:avLst>
@@ -4727,14 +4604,14 @@
       </p:sp>
       <p:sp>
         <p:nvSpPr>
-          <p:cNvPr id="8" name="TextBox 7"/>
+          <p:cNvPr id="10" name="TextBox 9"/>
           <p:cNvSpPr txBox="1"/>
           <p:nvPr/>
         </p:nvSpPr>
         <p:spPr>
           <a:xfrm>
-            <a:off x="6428232" y="1143000"/>
-            <a:ext cx="2560320" cy="256032"/>
+            <a:off x="6419088" y="2176272"/>
+            <a:ext cx="3200400" cy="256032"/>
           </a:xfrm>
           <a:prstGeom prst="rect">
             <a:avLst/>
@@ -4758,25 +4635,25 @@
             <a:r>
               <a:rPr sz="1600" b="1">
                 <a:solidFill>
-                  <a:srgbClr val="DB4437"/>
-                </a:solidFill>
-                <a:latin typeface="Meiryo"/>
-              </a:rPr>
-              <a:t>課題点</a:t>
-            </a:r>
-          </a:p>
-        </p:txBody>
-      </p:sp>
-      <p:sp>
-        <p:nvSpPr>
-          <p:cNvPr id="9" name="TextBox 8"/>
+                  <a:srgbClr val="0F9D58"/>
+                </a:solidFill>
+                <a:latin typeface="Meiryo"/>
+              </a:rPr>
+              <a:t>ジャンル戦略の意思決定</a:t>
+            </a:r>
+          </a:p>
+        </p:txBody>
+      </p:sp>
+      <p:sp>
+        <p:nvSpPr>
+          <p:cNvPr id="11" name="TextBox 10"/>
           <p:cNvSpPr txBox="1"/>
           <p:nvPr/>
         </p:nvSpPr>
         <p:spPr>
           <a:xfrm>
-            <a:off x="6428232" y="1554480"/>
-            <a:ext cx="4709160" cy="4297680"/>
+            <a:off x="6419088" y="2542032"/>
+            <a:ext cx="4754880" cy="3200400"/>
           </a:xfrm>
           <a:prstGeom prst="rect">
             <a:avLst/>
@@ -4795,22 +4672,22 @@
               </a:spcAft>
             </a:pPr>
             <a:r>
-              <a:rPr sz="1600">
-                <a:solidFill>
-                  <a:srgbClr val="DB4437"/>
+              <a:rPr sz="1500">
+                <a:solidFill>
+                  <a:srgbClr val="0F9D58"/>
                 </a:solidFill>
                 <a:latin typeface="Meiryo"/>
               </a:rPr>
               <a:t>• </a:t>
             </a:r>
             <a:r>
-              <a:rPr sz="1600">
+              <a:rPr sz="1500">
                 <a:solidFill>
                   <a:srgbClr val="222833"/>
                 </a:solidFill>
                 <a:latin typeface="Meiryo"/>
               </a:rPr>
-              <a:t>約半数のエリアが店舗数1軒（データの偏り）</a:t>
+              <a:t>「このエリアには焼肉よりカフェの方がチャンスがある」をデータで裏付け</a:t>
             </a:r>
           </a:p>
           <a:p>
@@ -4820,22 +4697,47 @@
               </a:spcAft>
             </a:pPr>
             <a:r>
-              <a:rPr sz="1600">
-                <a:solidFill>
-                  <a:srgbClr val="DB4437"/>
+              <a:rPr sz="1500">
+                <a:solidFill>
+                  <a:srgbClr val="0F9D58"/>
                 </a:solidFill>
                 <a:latin typeface="Meiryo"/>
               </a:rPr>
               <a:t>• </a:t>
             </a:r>
             <a:r>
-              <a:rPr sz="1600">
+              <a:rPr sz="1500">
                 <a:solidFill>
                   <a:srgbClr val="222833"/>
                 </a:solidFill>
                 <a:latin typeface="Meiryo"/>
               </a:rPr>
-              <a:t>バックテスト未実施</a:t>
+              <a:t>ジャンルごとの市場ギャップを比較し、参入優先度を決定</a:t>
+            </a:r>
+          </a:p>
+          <a:p>
+            <a:pPr>
+              <a:spcAft>
+                <a:spcPts val="500"/>
+              </a:spcAft>
+            </a:pPr>
+            <a:r>
+              <a:rPr sz="1500">
+                <a:solidFill>
+                  <a:srgbClr val="0F9D58"/>
+                </a:solidFill>
+                <a:latin typeface="Meiryo"/>
+              </a:rPr>
+              <a:t>• </a:t>
+            </a:r>
+            <a:r>
+              <a:rPr sz="1500">
+                <a:solidFill>
+                  <a:srgbClr val="222833"/>
+                </a:solidFill>
+                <a:latin typeface="Meiryo"/>
+              </a:rPr>
+              <a:t>250mメッシュ粒度で「この通りの向こう側」レベルの精度</a:t>
             </a:r>
           </a:p>
         </p:txBody>
@@ -4946,7 +4848,7 @@
                 </a:solidFill>
                 <a:latin typeface="Meiryo"/>
               </a:rPr>
-              <a:t>7: ビジネスインパクト</a:t>
+              <a:t>10: Vibe Codingの所感</a:t>
             </a:r>
           </a:p>
         </p:txBody>
@@ -4960,7 +4862,7 @@
         <p:spPr>
           <a:xfrm>
             <a:off x="594360" y="868680"/>
-            <a:ext cx="10972800" cy="868680"/>
+            <a:ext cx="10972800" cy="1051560"/>
           </a:xfrm>
           <a:prstGeom prst="roundRect">
             <a:avLst>
@@ -5006,8 +4908,8 @@
         </p:nvSpPr>
         <p:spPr>
           <a:xfrm>
-            <a:off x="868680" y="1124712"/>
-            <a:ext cx="10332720" cy="292608"/>
+            <a:off x="841248" y="1078992"/>
+            <a:ext cx="10424160" cy="658368"/>
           </a:xfrm>
           <a:prstGeom prst="rect">
             <a:avLst/>
@@ -5029,13 +4931,13 @@
               </a:spcAft>
             </a:pPr>
             <a:r>
-              <a:rPr sz="1900" b="1">
+              <a:rPr sz="1700" b="1">
                 <a:solidFill>
                   <a:srgbClr val="222833"/>
                 </a:solidFill>
                 <a:latin typeface="Meiryo"/>
               </a:rPr>
-              <a:t>「どの街に、どのジャンルの店が足りないか」を自動で見つけて、根拠付きで推薦する</a:t>
+              <a:t>自分の知識だけではここまでのモデルは作れなかった。AIが知識を補完してくれたからこそ、作りたいシステムを形にできた。ただしAIの提案を鵜呑みにしない判断力が不可欠。</a:t>
             </a:r>
           </a:p>
         </p:txBody>
@@ -5048,8 +4950,8 @@
         </p:nvSpPr>
         <p:spPr>
           <a:xfrm>
-            <a:off x="594360" y="1965960"/>
-            <a:ext cx="5349240" cy="4114800"/>
+            <a:off x="594360" y="2240280"/>
+            <a:ext cx="5394960" cy="3474720"/>
           </a:xfrm>
           <a:prstGeom prst="roundRect">
             <a:avLst>
@@ -5095,8 +4997,8 @@
         </p:nvSpPr>
         <p:spPr>
           <a:xfrm>
-            <a:off x="841248" y="2176272"/>
-            <a:ext cx="3200400" cy="256032"/>
+            <a:off x="868680" y="2450592"/>
+            <a:ext cx="2286000" cy="256032"/>
           </a:xfrm>
           <a:prstGeom prst="rect">
             <a:avLst/>
@@ -5120,11 +5022,11 @@
             <a:r>
               <a:rPr sz="1600" b="1">
                 <a:solidFill>
-                  <a:srgbClr val="2D5BE3"/>
-                </a:solidFill>
-                <a:latin typeface="Meiryo"/>
-              </a:rPr>
-              <a:t>新規エリア進出の判断</a:t>
+                  <a:srgbClr val="0F9D58"/>
+                </a:solidFill>
+                <a:latin typeface="Meiryo"/>
+              </a:rPr>
+              <a:t>AIに助けられた点</a:t>
             </a:r>
           </a:p>
         </p:txBody>
@@ -5137,8 +5039,8 @@
         </p:nvSpPr>
         <p:spPr>
           <a:xfrm>
-            <a:off x="841248" y="2542032"/>
-            <a:ext cx="4754880" cy="3200400"/>
+            <a:off x="868680" y="2816352"/>
+            <a:ext cx="4754880" cy="2468880"/>
           </a:xfrm>
           <a:prstGeom prst="rect">
             <a:avLst/>
@@ -5157,22 +5059,22 @@
               </a:spcAft>
             </a:pPr>
             <a:r>
-              <a:rPr sz="1500">
-                <a:solidFill>
-                  <a:srgbClr val="2D5BE3"/>
+              <a:rPr sz="1600">
+                <a:solidFill>
+                  <a:srgbClr val="0F9D58"/>
                 </a:solidFill>
                 <a:latin typeface="Meiryo"/>
               </a:rPr>
               <a:t>• </a:t>
             </a:r>
             <a:r>
-              <a:rPr sz="1500">
+              <a:rPr sz="1600">
                 <a:solidFill>
                   <a:srgbClr val="222833"/>
                 </a:solidFill>
                 <a:latin typeface="Meiryo"/>
               </a:rPr>
-              <a:t>東京都内の未出店エリアを、既存データだけで事前評価</a:t>
+              <a:t>6種API + 28特徴量ML + 5エリア対応ダッシュボードを一人で構築</a:t>
             </a:r>
           </a:p>
           <a:p>
@@ -5182,22 +5084,47 @@
               </a:spcAft>
             </a:pPr>
             <a:r>
-              <a:rPr sz="1500">
-                <a:solidFill>
-                  <a:srgbClr val="2D5BE3"/>
+              <a:rPr sz="1600">
+                <a:solidFill>
+                  <a:srgbClr val="0F9D58"/>
                 </a:solidFill>
                 <a:latin typeface="Meiryo"/>
               </a:rPr>
               <a:t>• </a:t>
             </a:r>
             <a:r>
-              <a:rPr sz="1500">
+              <a:rPr sz="1600">
                 <a:solidFill>
                   <a:srgbClr val="222833"/>
                 </a:solidFill>
                 <a:latin typeface="Meiryo"/>
               </a:rPr>
-              <a:t>東京1,233メッシュ × 9ジャンル = 約11,000パターンの候補を一括で洗い出し</a:t>
+              <a:t>知らなかった手法をAIが提案→知識の補完</a:t>
+            </a:r>
+          </a:p>
+          <a:p>
+            <a:pPr>
+              <a:spcAft>
+                <a:spcPts val="500"/>
+              </a:spcAft>
+            </a:pPr>
+            <a:r>
+              <a:rPr sz="1600">
+                <a:solidFill>
+                  <a:srgbClr val="0F9D58"/>
+                </a:solidFill>
+                <a:latin typeface="Meiryo"/>
+              </a:rPr>
+              <a:t>• </a:t>
+            </a:r>
+            <a:r>
+              <a:rPr sz="1600">
+                <a:solidFill>
+                  <a:srgbClr val="222833"/>
+                </a:solidFill>
+                <a:latin typeface="Meiryo"/>
+              </a:rPr>
+              <a:t>設計→実装→テストのサイクルが速く回せた</a:t>
             </a:r>
           </a:p>
         </p:txBody>
@@ -5210,8 +5137,8 @@
         </p:nvSpPr>
         <p:spPr>
           <a:xfrm>
-            <a:off x="6172200" y="1965960"/>
-            <a:ext cx="5349240" cy="4114800"/>
+            <a:off x="6172200" y="2240280"/>
+            <a:ext cx="5394960" cy="3474720"/>
           </a:xfrm>
           <a:prstGeom prst="roundRect">
             <a:avLst>
@@ -5257,8 +5184,8 @@
         </p:nvSpPr>
         <p:spPr>
           <a:xfrm>
-            <a:off x="6419088" y="2176272"/>
-            <a:ext cx="3200400" cy="256032"/>
+            <a:off x="6446520" y="2450592"/>
+            <a:ext cx="2743200" cy="256032"/>
           </a:xfrm>
           <a:prstGeom prst="rect">
             <a:avLst/>
@@ -5282,11 +5209,11 @@
             <a:r>
               <a:rPr sz="1600" b="1">
                 <a:solidFill>
-                  <a:srgbClr val="0F9D58"/>
-                </a:solidFill>
-                <a:latin typeface="Meiryo"/>
-              </a:rPr>
-              <a:t>ジャンル戦略の意思決定</a:t>
+                  <a:srgbClr val="DB4437"/>
+                </a:solidFill>
+                <a:latin typeface="Meiryo"/>
+              </a:rPr>
+              <a:t>人間が判断すべきだった点</a:t>
             </a:r>
           </a:p>
         </p:txBody>
@@ -5299,8 +5226,8 @@
         </p:nvSpPr>
         <p:spPr>
           <a:xfrm>
-            <a:off x="6419088" y="2542032"/>
-            <a:ext cx="4754880" cy="3200400"/>
+            <a:off x="6446520" y="2816352"/>
+            <a:ext cx="4709160" cy="2468880"/>
           </a:xfrm>
           <a:prstGeom prst="rect">
             <a:avLst/>
@@ -5319,22 +5246,22 @@
               </a:spcAft>
             </a:pPr>
             <a:r>
-              <a:rPr sz="1500">
-                <a:solidFill>
-                  <a:srgbClr val="0F9D58"/>
+              <a:rPr sz="1600">
+                <a:solidFill>
+                  <a:srgbClr val="DB4437"/>
                 </a:solidFill>
                 <a:latin typeface="Meiryo"/>
               </a:rPr>
               <a:t>• </a:t>
             </a:r>
             <a:r>
-              <a:rPr sz="1500">
+              <a:rPr sz="1600">
                 <a:solidFill>
                   <a:srgbClr val="222833"/>
                 </a:solidFill>
                 <a:latin typeface="Meiryo"/>
               </a:rPr>
-              <a:t>「このエリアには焼肉よりカフェの方がチャンスがある」をデータで裏付け</a:t>
+              <a:t>AIが勝手に仕様変更を進めることがある</a:t>
             </a:r>
           </a:p>
           <a:p>
@@ -5344,22 +5271,22 @@
               </a:spcAft>
             </a:pPr>
             <a:r>
-              <a:rPr sz="1500">
-                <a:solidFill>
-                  <a:srgbClr val="0F9D58"/>
+              <a:rPr sz="1600">
+                <a:solidFill>
+                  <a:srgbClr val="DB4437"/>
                 </a:solidFill>
                 <a:latin typeface="Meiryo"/>
               </a:rPr>
               <a:t>• </a:t>
             </a:r>
             <a:r>
-              <a:rPr sz="1500">
+              <a:rPr sz="1600">
                 <a:solidFill>
                   <a:srgbClr val="222833"/>
                 </a:solidFill>
                 <a:latin typeface="Meiryo"/>
               </a:rPr>
-              <a:t>ジャンルごとの市場ギャップを比較し、参入優先度を決定</a:t>
+              <a:t>R²やCIの解釈はドメイン知識が必要</a:t>
             </a:r>
           </a:p>
           <a:p>
@@ -5369,22 +5296,22 @@
               </a:spcAft>
             </a:pPr>
             <a:r>
-              <a:rPr sz="1500">
-                <a:solidFill>
-                  <a:srgbClr val="0F9D58"/>
+              <a:rPr sz="1600">
+                <a:solidFill>
+                  <a:srgbClr val="DB4437"/>
                 </a:solidFill>
                 <a:latin typeface="Meiryo"/>
               </a:rPr>
               <a:t>• </a:t>
             </a:r>
             <a:r>
-              <a:rPr sz="1500">
+              <a:rPr sz="1600">
                 <a:solidFill>
                   <a:srgbClr val="222833"/>
                 </a:solidFill>
                 <a:latin typeface="Meiryo"/>
               </a:rPr>
-              <a:t>250mメッシュ粒度で「この通りの向こう側」レベルの精度</a:t>
+              <a:t>長い会話で過去の決定を忘れる</a:t>
             </a:r>
           </a:p>
         </p:txBody>
@@ -5495,581 +5422,7 @@
                 </a:solidFill>
                 <a:latin typeface="Meiryo"/>
               </a:rPr>
-              <a:t>8: Vibe Codingの所感</a:t>
-            </a:r>
-          </a:p>
-        </p:txBody>
-      </p:sp>
-      <p:sp>
-        <p:nvSpPr>
-          <p:cNvPr id="4" name="Rounded Rectangle 3"/>
-          <p:cNvSpPr/>
-          <p:nvPr/>
-        </p:nvSpPr>
-        <p:spPr>
-          <a:xfrm>
-            <a:off x="594360" y="868680"/>
-            <a:ext cx="10972800" cy="1051560"/>
-          </a:xfrm>
-          <a:prstGeom prst="roundRect">
-            <a:avLst>
-              <a:gd name="adj" fmla="val 8000"/>
-            </a:avLst>
-          </a:prstGeom>
-          <a:solidFill>
-            <a:srgbClr val="E8EEFD"/>
-          </a:solidFill>
-          <a:ln w="12700">
-            <a:solidFill>
-              <a:srgbClr val="D7DEEA"/>
-            </a:solidFill>
-          </a:ln>
-        </p:spPr>
-        <p:style>
-          <a:lnRef idx="1">
-            <a:schemeClr val="accent1"/>
-          </a:lnRef>
-          <a:fillRef idx="3">
-            <a:schemeClr val="accent1"/>
-          </a:fillRef>
-          <a:effectRef idx="2">
-            <a:schemeClr val="accent1"/>
-          </a:effectRef>
-          <a:fontRef idx="minor">
-            <a:schemeClr val="lt1"/>
-          </a:fontRef>
-        </p:style>
-        <p:txBody>
-          <a:bodyPr rtlCol="0" anchor="ctr"/>
-          <a:lstStyle/>
-          <a:p>
-            <a:pPr algn="ctr"/>
-          </a:p>
-        </p:txBody>
-      </p:sp>
-      <p:sp>
-        <p:nvSpPr>
-          <p:cNvPr id="5" name="TextBox 4"/>
-          <p:cNvSpPr txBox="1"/>
-          <p:nvPr/>
-        </p:nvSpPr>
-        <p:spPr>
-          <a:xfrm>
-            <a:off x="841248" y="1078992"/>
-            <a:ext cx="10424160" cy="658368"/>
-          </a:xfrm>
-          <a:prstGeom prst="rect">
-            <a:avLst/>
-          </a:prstGeom>
-          <a:noFill/>
-        </p:spPr>
-        <p:txBody>
-          <a:bodyPr wrap="square" anchor="t">
-            <a:spAutoFit/>
-          </a:bodyPr>
-          <a:lstStyle/>
-          <a:p>
-            <a:pPr algn="l">
-              <a:spcBef>
-                <a:spcPts val="0"/>
-              </a:spcBef>
-              <a:spcAft>
-                <a:spcPts val="0"/>
-              </a:spcAft>
-            </a:pPr>
-            <a:r>
-              <a:rPr sz="1700" b="1">
-                <a:solidFill>
-                  <a:srgbClr val="222833"/>
-                </a:solidFill>
-                <a:latin typeface="Meiryo"/>
-              </a:rPr>
-              <a:t>自分の知識だけではここまでのモデルは作れなかった。AIが知識を補完してくれたからこそ、作りたいシステムを形にできた。ただしAIの提案を鵜呑みにしない判断力が不可欠。</a:t>
-            </a:r>
-          </a:p>
-        </p:txBody>
-      </p:sp>
-      <p:sp>
-        <p:nvSpPr>
-          <p:cNvPr id="6" name="Rounded Rectangle 5"/>
-          <p:cNvSpPr/>
-          <p:nvPr/>
-        </p:nvSpPr>
-        <p:spPr>
-          <a:xfrm>
-            <a:off x="594360" y="2240280"/>
-            <a:ext cx="5394960" cy="3474720"/>
-          </a:xfrm>
-          <a:prstGeom prst="roundRect">
-            <a:avLst>
-              <a:gd name="adj" fmla="val 8000"/>
-            </a:avLst>
-          </a:prstGeom>
-          <a:solidFill>
-            <a:srgbClr val="E8EEFD"/>
-          </a:solidFill>
-          <a:ln w="12700">
-            <a:solidFill>
-              <a:srgbClr val="D7DEEA"/>
-            </a:solidFill>
-          </a:ln>
-        </p:spPr>
-        <p:style>
-          <a:lnRef idx="1">
-            <a:schemeClr val="accent1"/>
-          </a:lnRef>
-          <a:fillRef idx="3">
-            <a:schemeClr val="accent1"/>
-          </a:fillRef>
-          <a:effectRef idx="2">
-            <a:schemeClr val="accent1"/>
-          </a:effectRef>
-          <a:fontRef idx="minor">
-            <a:schemeClr val="lt1"/>
-          </a:fontRef>
-        </p:style>
-        <p:txBody>
-          <a:bodyPr rtlCol="0" anchor="ctr"/>
-          <a:lstStyle/>
-          <a:p>
-            <a:pPr algn="ctr"/>
-          </a:p>
-        </p:txBody>
-      </p:sp>
-      <p:sp>
-        <p:nvSpPr>
-          <p:cNvPr id="7" name="TextBox 6"/>
-          <p:cNvSpPr txBox="1"/>
-          <p:nvPr/>
-        </p:nvSpPr>
-        <p:spPr>
-          <a:xfrm>
-            <a:off x="868680" y="2450592"/>
-            <a:ext cx="2286000" cy="256032"/>
-          </a:xfrm>
-          <a:prstGeom prst="rect">
-            <a:avLst/>
-          </a:prstGeom>
-          <a:noFill/>
-        </p:spPr>
-        <p:txBody>
-          <a:bodyPr wrap="square" anchor="t">
-            <a:spAutoFit/>
-          </a:bodyPr>
-          <a:lstStyle/>
-          <a:p>
-            <a:pPr algn="l">
-              <a:spcBef>
-                <a:spcPts val="0"/>
-              </a:spcBef>
-              <a:spcAft>
-                <a:spcPts val="0"/>
-              </a:spcAft>
-            </a:pPr>
-            <a:r>
-              <a:rPr sz="1600" b="1">
-                <a:solidFill>
-                  <a:srgbClr val="0F9D58"/>
-                </a:solidFill>
-                <a:latin typeface="Meiryo"/>
-              </a:rPr>
-              <a:t>AIに助けられた点</a:t>
-            </a:r>
-          </a:p>
-        </p:txBody>
-      </p:sp>
-      <p:sp>
-        <p:nvSpPr>
-          <p:cNvPr id="8" name="TextBox 7"/>
-          <p:cNvSpPr txBox="1"/>
-          <p:nvPr/>
-        </p:nvSpPr>
-        <p:spPr>
-          <a:xfrm>
-            <a:off x="868680" y="2816352"/>
-            <a:ext cx="4754880" cy="2468880"/>
-          </a:xfrm>
-          <a:prstGeom prst="rect">
-            <a:avLst/>
-          </a:prstGeom>
-          <a:noFill/>
-        </p:spPr>
-        <p:txBody>
-          <a:bodyPr wrap="square" anchor="t">
-            <a:spAutoFit/>
-          </a:bodyPr>
-          <a:lstStyle/>
-          <a:p>
-            <a:pPr>
-              <a:spcAft>
-                <a:spcPts val="500"/>
-              </a:spcAft>
-            </a:pPr>
-            <a:r>
-              <a:rPr sz="1600">
-                <a:solidFill>
-                  <a:srgbClr val="0F9D58"/>
-                </a:solidFill>
-                <a:latin typeface="Meiryo"/>
-              </a:rPr>
-              <a:t>• </a:t>
-            </a:r>
-            <a:r>
-              <a:rPr sz="1600">
-                <a:solidFill>
-                  <a:srgbClr val="222833"/>
-                </a:solidFill>
-                <a:latin typeface="Meiryo"/>
-              </a:rPr>
-              <a:t>6種API+28特徴量ML+ダッシュボードを一人で構築</a:t>
-            </a:r>
-          </a:p>
-          <a:p>
-            <a:pPr>
-              <a:spcAft>
-                <a:spcPts val="500"/>
-              </a:spcAft>
-            </a:pPr>
-            <a:r>
-              <a:rPr sz="1600">
-                <a:solidFill>
-                  <a:srgbClr val="0F9D58"/>
-                </a:solidFill>
-                <a:latin typeface="Meiryo"/>
-              </a:rPr>
-              <a:t>• </a:t>
-            </a:r>
-            <a:r>
-              <a:rPr sz="1600">
-                <a:solidFill>
-                  <a:srgbClr val="222833"/>
-                </a:solidFill>
-                <a:latin typeface="Meiryo"/>
-              </a:rPr>
-              <a:t>知らなかった手法をAIが提案→知識の補完</a:t>
-            </a:r>
-          </a:p>
-          <a:p>
-            <a:pPr>
-              <a:spcAft>
-                <a:spcPts val="500"/>
-              </a:spcAft>
-            </a:pPr>
-            <a:r>
-              <a:rPr sz="1600">
-                <a:solidFill>
-                  <a:srgbClr val="0F9D58"/>
-                </a:solidFill>
-                <a:latin typeface="Meiryo"/>
-              </a:rPr>
-              <a:t>• </a:t>
-            </a:r>
-            <a:r>
-              <a:rPr sz="1600">
-                <a:solidFill>
-                  <a:srgbClr val="222833"/>
-                </a:solidFill>
-                <a:latin typeface="Meiryo"/>
-              </a:rPr>
-              <a:t>設計→実装→テストのサイクルが速く回せた</a:t>
-            </a:r>
-          </a:p>
-        </p:txBody>
-      </p:sp>
-      <p:sp>
-        <p:nvSpPr>
-          <p:cNvPr id="9" name="Rounded Rectangle 8"/>
-          <p:cNvSpPr/>
-          <p:nvPr/>
-        </p:nvSpPr>
-        <p:spPr>
-          <a:xfrm>
-            <a:off x="6172200" y="2240280"/>
-            <a:ext cx="5394960" cy="3474720"/>
-          </a:xfrm>
-          <a:prstGeom prst="roundRect">
-            <a:avLst>
-              <a:gd name="adj" fmla="val 8000"/>
-            </a:avLst>
-          </a:prstGeom>
-          <a:solidFill>
-            <a:srgbClr val="F0F2F5"/>
-          </a:solidFill>
-          <a:ln w="12700">
-            <a:solidFill>
-              <a:srgbClr val="D7DEEA"/>
-            </a:solidFill>
-          </a:ln>
-        </p:spPr>
-        <p:style>
-          <a:lnRef idx="1">
-            <a:schemeClr val="accent1"/>
-          </a:lnRef>
-          <a:fillRef idx="3">
-            <a:schemeClr val="accent1"/>
-          </a:fillRef>
-          <a:effectRef idx="2">
-            <a:schemeClr val="accent1"/>
-          </a:effectRef>
-          <a:fontRef idx="minor">
-            <a:schemeClr val="lt1"/>
-          </a:fontRef>
-        </p:style>
-        <p:txBody>
-          <a:bodyPr rtlCol="0" anchor="ctr"/>
-          <a:lstStyle/>
-          <a:p>
-            <a:pPr algn="ctr"/>
-          </a:p>
-        </p:txBody>
-      </p:sp>
-      <p:sp>
-        <p:nvSpPr>
-          <p:cNvPr id="10" name="TextBox 9"/>
-          <p:cNvSpPr txBox="1"/>
-          <p:nvPr/>
-        </p:nvSpPr>
-        <p:spPr>
-          <a:xfrm>
-            <a:off x="6446520" y="2450592"/>
-            <a:ext cx="2743200" cy="256032"/>
-          </a:xfrm>
-          <a:prstGeom prst="rect">
-            <a:avLst/>
-          </a:prstGeom>
-          <a:noFill/>
-        </p:spPr>
-        <p:txBody>
-          <a:bodyPr wrap="square" anchor="t">
-            <a:spAutoFit/>
-          </a:bodyPr>
-          <a:lstStyle/>
-          <a:p>
-            <a:pPr algn="l">
-              <a:spcBef>
-                <a:spcPts val="0"/>
-              </a:spcBef>
-              <a:spcAft>
-                <a:spcPts val="0"/>
-              </a:spcAft>
-            </a:pPr>
-            <a:r>
-              <a:rPr sz="1600" b="1">
-                <a:solidFill>
-                  <a:srgbClr val="DB4437"/>
-                </a:solidFill>
-                <a:latin typeface="Meiryo"/>
-              </a:rPr>
-              <a:t>人間が判断すべきだった点</a:t>
-            </a:r>
-          </a:p>
-        </p:txBody>
-      </p:sp>
-      <p:sp>
-        <p:nvSpPr>
-          <p:cNvPr id="11" name="TextBox 10"/>
-          <p:cNvSpPr txBox="1"/>
-          <p:nvPr/>
-        </p:nvSpPr>
-        <p:spPr>
-          <a:xfrm>
-            <a:off x="6446520" y="2816352"/>
-            <a:ext cx="4709160" cy="2468880"/>
-          </a:xfrm>
-          <a:prstGeom prst="rect">
-            <a:avLst/>
-          </a:prstGeom>
-          <a:noFill/>
-        </p:spPr>
-        <p:txBody>
-          <a:bodyPr wrap="square" anchor="t">
-            <a:spAutoFit/>
-          </a:bodyPr>
-          <a:lstStyle/>
-          <a:p>
-            <a:pPr>
-              <a:spcAft>
-                <a:spcPts val="500"/>
-              </a:spcAft>
-            </a:pPr>
-            <a:r>
-              <a:rPr sz="1600">
-                <a:solidFill>
-                  <a:srgbClr val="DB4437"/>
-                </a:solidFill>
-                <a:latin typeface="Meiryo"/>
-              </a:rPr>
-              <a:t>• </a:t>
-            </a:r>
-            <a:r>
-              <a:rPr sz="1600">
-                <a:solidFill>
-                  <a:srgbClr val="222833"/>
-                </a:solidFill>
-                <a:latin typeface="Meiryo"/>
-              </a:rPr>
-              <a:t>AIが勝手に仕様変更を進めることがある</a:t>
-            </a:r>
-          </a:p>
-          <a:p>
-            <a:pPr>
-              <a:spcAft>
-                <a:spcPts val="500"/>
-              </a:spcAft>
-            </a:pPr>
-            <a:r>
-              <a:rPr sz="1600">
-                <a:solidFill>
-                  <a:srgbClr val="DB4437"/>
-                </a:solidFill>
-                <a:latin typeface="Meiryo"/>
-              </a:rPr>
-              <a:t>• </a:t>
-            </a:r>
-            <a:r>
-              <a:rPr sz="1600">
-                <a:solidFill>
-                  <a:srgbClr val="222833"/>
-                </a:solidFill>
-                <a:latin typeface="Meiryo"/>
-              </a:rPr>
-              <a:t>R²やCIの解釈はドメイン知識が必要</a:t>
-            </a:r>
-          </a:p>
-          <a:p>
-            <a:pPr>
-              <a:spcAft>
-                <a:spcPts val="500"/>
-              </a:spcAft>
-            </a:pPr>
-            <a:r>
-              <a:rPr sz="1600">
-                <a:solidFill>
-                  <a:srgbClr val="DB4437"/>
-                </a:solidFill>
-                <a:latin typeface="Meiryo"/>
-              </a:rPr>
-              <a:t>• </a:t>
-            </a:r>
-            <a:r>
-              <a:rPr sz="1600">
-                <a:solidFill>
-                  <a:srgbClr val="222833"/>
-                </a:solidFill>
-                <a:latin typeface="Meiryo"/>
-              </a:rPr>
-              <a:t>長い会話で過去の決定を忘れる</a:t>
-            </a:r>
-          </a:p>
-        </p:txBody>
-      </p:sp>
-    </p:spTree>
-  </p:cSld>
-  <p:clrMapOvr>
-    <a:masterClrMapping/>
-  </p:clrMapOvr>
-</p:sld>
-</file>
-
-<file path=ppt/slides/slide15.xml><?xml version="1.0" encoding="utf-8"?>
-<p:sld xmlns:a="http://schemas.openxmlformats.org/drawingml/2006/main" xmlns:p="http://schemas.openxmlformats.org/presentationml/2006/main" xmlns:r="http://schemas.openxmlformats.org/officeDocument/2006/relationships">
-  <p:cSld>
-    <p:bg>
-      <p:bgPr>
-        <a:solidFill>
-          <a:srgbClr val="FAFAFC"/>
-        </a:solidFill>
-        <a:effectLst/>
-      </p:bgPr>
-    </p:bg>
-    <p:spTree>
-      <p:nvGrpSpPr>
-        <p:cNvPr id="1" name=""/>
-        <p:cNvGrpSpPr/>
-        <p:nvPr/>
-      </p:nvGrpSpPr>
-      <p:grpSpPr/>
-      <p:sp>
-        <p:nvSpPr>
-          <p:cNvPr id="2" name="Rectangle 1"/>
-          <p:cNvSpPr/>
-          <p:nvPr/>
-        </p:nvSpPr>
-        <p:spPr>
-          <a:xfrm>
-            <a:off x="502920" y="347472"/>
-            <a:ext cx="109728" cy="475488"/>
-          </a:xfrm>
-          <a:prstGeom prst="rect">
-            <a:avLst/>
-          </a:prstGeom>
-          <a:solidFill>
-            <a:srgbClr val="2D5BE3"/>
-          </a:solidFill>
-          <a:ln>
-            <a:noFill/>
-          </a:ln>
-        </p:spPr>
-        <p:style>
-          <a:lnRef idx="1">
-            <a:schemeClr val="accent1"/>
-          </a:lnRef>
-          <a:fillRef idx="3">
-            <a:schemeClr val="accent1"/>
-          </a:fillRef>
-          <a:effectRef idx="2">
-            <a:schemeClr val="accent1"/>
-          </a:effectRef>
-          <a:fontRef idx="minor">
-            <a:schemeClr val="lt1"/>
-          </a:fontRef>
-        </p:style>
-        <p:txBody>
-          <a:bodyPr rtlCol="0" anchor="ctr"/>
-          <a:lstStyle/>
-          <a:p>
-            <a:pPr algn="ctr"/>
-          </a:p>
-        </p:txBody>
-      </p:sp>
-      <p:sp>
-        <p:nvSpPr>
-          <p:cNvPr id="3" name="TextBox 2"/>
-          <p:cNvSpPr txBox="1"/>
-          <p:nvPr/>
-        </p:nvSpPr>
-        <p:spPr>
-          <a:xfrm>
-            <a:off x="713232" y="219456"/>
-            <a:ext cx="10424160" cy="457200"/>
-          </a:xfrm>
-          <a:prstGeom prst="rect">
-            <a:avLst/>
-          </a:prstGeom>
-          <a:noFill/>
-        </p:spPr>
-        <p:txBody>
-          <a:bodyPr wrap="square" anchor="t">
-            <a:spAutoFit/>
-          </a:bodyPr>
-          <a:lstStyle/>
-          <a:p>
-            <a:pPr algn="l">
-              <a:spcBef>
-                <a:spcPts val="0"/>
-              </a:spcBef>
-              <a:spcAft>
-                <a:spcPts val="0"/>
-              </a:spcAft>
-            </a:pPr>
-            <a:r>
-              <a:rPr sz="2800" b="1">
-                <a:solidFill>
-                  <a:srgbClr val="222833"/>
-                </a:solidFill>
-                <a:latin typeface="Meiryo"/>
-              </a:rPr>
-              <a:t>9: まとめ</a:t>
+              <a:t>11: まとめ</a:t>
             </a:r>
           </a:p>
         </p:txBody>
@@ -6229,7 +5582,7 @@
                           </a:solidFill>
                           <a:latin typeface="Meiryo"/>
                         </a:rPr>
-                        <a:t>6種の公開データ × 東京 × 9ジャンル</a:t>
+                        <a:t>6種の公開データ × 東京 × 8ジャンル</a:t>
                       </a:r>
                     </a:p>
                   </a:txBody>
@@ -6325,7 +5678,7 @@
                           </a:solidFill>
                           <a:latin typeface="Meiryo"/>
                         </a:rPr>
-                        <a:t>スコア計算 + MLの組み合わせ</a:t>
+                        <a:t>LightGBM による市場ギャップ予測</a:t>
                       </a:r>
                     </a:p>
                   </a:txBody>
@@ -6373,7 +5726,7 @@
                           </a:solidFill>
                           <a:latin typeface="Meiryo"/>
                         </a:rPr>
-                        <a:t>5-Fold CV R²=0.787（東京エリア、層化分割、Optunaチューニング済み）</a:t>
+                        <a:t>5-Fold CV RMSE=5.0店（東京エリア、層化分割、Optunaチューニング済み）</a:t>
                       </a:r>
                     </a:p>
                   </a:txBody>
@@ -8493,7 +7846,7 @@
                 </a:solidFill>
                 <a:latin typeface="Meiryo"/>
               </a:rPr>
-              <a:t>カフェ / ラーメン / 居酒屋 / 焼肉 / 和食 / 中華 / イタリアン / カレー / その他</a:t>
+              <a:t>カフェ / ラーメン / 居酒屋 / 焼肉 / 和食 / 中華 / イタリアン / その他</a:t>
             </a:r>
           </a:p>
         </p:txBody>
@@ -10077,7 +9430,7 @@
                 </a:solidFill>
                 <a:latin typeface="Meiryo"/>
               </a:rPr>
-              <a:t>人口データの76.7%が欠損 → 検証の結果MLモデルからは除外（精度向上）</a:t>
+              <a:t>人口データの10.1%が欠損 → ゼロ埋めしてMLモデルに含む（除外しても精度差なし）</a:t>
             </a:r>
           </a:p>
         </p:txBody>
@@ -10188,7 +9541,7 @@
                 </a:solidFill>
                 <a:latin typeface="Meiryo"/>
               </a:rPr>
-              <a:t>4a: スコアの考え方</a:t>
+              <a:t>4: アプローチ ― MLで市場ギャップを予測</a:t>
             </a:r>
           </a:p>
         </p:txBody>
@@ -10201,8 +9554,8 @@
         </p:nvSpPr>
         <p:spPr>
           <a:xfrm>
-            <a:off x="594360" y="914400"/>
-            <a:ext cx="10972800" cy="914400"/>
+            <a:off x="502920" y="914400"/>
+            <a:ext cx="11155680" cy="1463040"/>
           </a:xfrm>
           <a:prstGeom prst="roundRect">
             <a:avLst>
@@ -10248,8 +9601,8 @@
         </p:nvSpPr>
         <p:spPr>
           <a:xfrm>
-            <a:off x="868680" y="1161288"/>
-            <a:ext cx="10332720" cy="320040"/>
+            <a:off x="777240" y="1078992"/>
+            <a:ext cx="2743200" cy="256032"/>
           </a:xfrm>
           <a:prstGeom prst="rect">
             <a:avLst/>
@@ -10262,7 +9615,7 @@
           </a:bodyPr>
           <a:lstStyle/>
           <a:p>
-            <a:pPr algn="ctr">
+            <a:pPr algn="l">
               <a:spcBef>
                 <a:spcPts val="0"/>
               </a:spcBef>
@@ -10271,27 +9624,262 @@
               </a:spcAft>
             </a:pPr>
             <a:r>
-              <a:rPr sz="2100" b="1">
+              <a:rPr sz="1600" b="1">
+                <a:solidFill>
+                  <a:srgbClr val="2D5BE3"/>
+                </a:solidFill>
+                <a:latin typeface="Meiryo"/>
+              </a:rPr>
+              <a:t>目的変数（何を予測するか）</a:t>
+            </a:r>
+          </a:p>
+        </p:txBody>
+      </p:sp>
+      <p:sp>
+        <p:nvSpPr>
+          <p:cNvPr id="6" name="TextBox 5"/>
+          <p:cNvSpPr txBox="1"/>
+          <p:nvPr/>
+        </p:nvSpPr>
+        <p:spPr>
+          <a:xfrm>
+            <a:off x="777240" y="1417320"/>
+            <a:ext cx="10515600" cy="731520"/>
+          </a:xfrm>
+          <a:prstGeom prst="rect">
+            <a:avLst/>
+          </a:prstGeom>
+          <a:noFill/>
+        </p:spPr>
+        <p:txBody>
+          <a:bodyPr wrap="square" anchor="t">
+            <a:spAutoFit/>
+          </a:bodyPr>
+          <a:lstStyle/>
+          <a:p>
+            <a:pPr>
+              <a:spcAft>
+                <a:spcPts val="500"/>
+              </a:spcAft>
+            </a:pPr>
+            <a:r>
+              <a:rPr sz="1500">
+                <a:solidFill>
+                  <a:srgbClr val="2D5BE3"/>
+                </a:solidFill>
+                <a:latin typeface="Meiryo"/>
+              </a:rPr>
+              <a:t>• </a:t>
+            </a:r>
+            <a:r>
+              <a:rPr sz="1500">
                 <a:solidFill>
                   <a:srgbClr val="222833"/>
                 </a:solidFill>
                 <a:latin typeface="Meiryo"/>
               </a:rPr>
-              <a:t>出店チャンス = ①その街に店が足りない + ②人が集まる場所 − ③ライバルが多すぎる</a:t>
-            </a:r>
-          </a:p>
-        </p:txBody>
-      </p:sp>
-      <p:sp>
-        <p:nvSpPr>
-          <p:cNvPr id="6" name="Rounded Rectangle 5"/>
+              <a:t>log1p(restaurant_count) ＝ 各メッシュ×ジャンルの飲食店数を対数変換した値</a:t>
+            </a:r>
+          </a:p>
+          <a:p>
+            <a:pPr>
+              <a:spcAft>
+                <a:spcPts val="500"/>
+              </a:spcAft>
+            </a:pPr>
+            <a:r>
+              <a:rPr sz="1500">
+                <a:solidFill>
+                  <a:srgbClr val="2D5BE3"/>
+                </a:solidFill>
+                <a:latin typeface="Meiryo"/>
+              </a:rPr>
+              <a:t>• </a:t>
+            </a:r>
+            <a:r>
+              <a:rPr sz="1500">
+                <a:solidFill>
+                  <a:srgbClr val="222833"/>
+                </a:solidFill>
+                <a:latin typeface="Meiryo"/>
+              </a:rPr>
+              <a:t>対数変換する理由: 店舗数は0〜100超まで偏りが大きく、そのままでは少数の密集エリアに引きずられるため</a:t>
+            </a:r>
+          </a:p>
+        </p:txBody>
+      </p:sp>
+      <p:sp>
+        <p:nvSpPr>
+          <p:cNvPr id="7" name="Rounded Rectangle 6"/>
           <p:cNvSpPr/>
           <p:nvPr/>
         </p:nvSpPr>
         <p:spPr>
           <a:xfrm>
-            <a:off x="731520" y="2057400"/>
-            <a:ext cx="2926080" cy="3246120"/>
+            <a:off x="502920" y="2606040"/>
+            <a:ext cx="5440680" cy="2103120"/>
+          </a:xfrm>
+          <a:prstGeom prst="roundRect">
+            <a:avLst>
+              <a:gd name="adj" fmla="val 8000"/>
+            </a:avLst>
+          </a:prstGeom>
+          <a:solidFill>
+            <a:srgbClr val="F0F2F5"/>
+          </a:solidFill>
+          <a:ln w="12700">
+            <a:solidFill>
+              <a:srgbClr val="D7DEEA"/>
+            </a:solidFill>
+          </a:ln>
+        </p:spPr>
+        <p:style>
+          <a:lnRef idx="1">
+            <a:schemeClr val="accent1"/>
+          </a:lnRef>
+          <a:fillRef idx="3">
+            <a:schemeClr val="accent1"/>
+          </a:fillRef>
+          <a:effectRef idx="2">
+            <a:schemeClr val="accent1"/>
+          </a:effectRef>
+          <a:fontRef idx="minor">
+            <a:schemeClr val="lt1"/>
+          </a:fontRef>
+        </p:style>
+        <p:txBody>
+          <a:bodyPr rtlCol="0" anchor="ctr"/>
+          <a:lstStyle/>
+          <a:p>
+            <a:pPr algn="ctr"/>
+          </a:p>
+        </p:txBody>
+      </p:sp>
+      <p:sp>
+        <p:nvSpPr>
+          <p:cNvPr id="8" name="TextBox 7"/>
+          <p:cNvSpPr txBox="1"/>
+          <p:nvPr/>
+        </p:nvSpPr>
+        <p:spPr>
+          <a:xfrm>
+            <a:off x="777240" y="2788920"/>
+            <a:ext cx="3108960" cy="256032"/>
+          </a:xfrm>
+          <a:prstGeom prst="rect">
+            <a:avLst/>
+          </a:prstGeom>
+          <a:noFill/>
+        </p:spPr>
+        <p:txBody>
+          <a:bodyPr wrap="square" anchor="t">
+            <a:spAutoFit/>
+          </a:bodyPr>
+          <a:lstStyle/>
+          <a:p>
+            <a:pPr algn="l">
+              <a:spcBef>
+                <a:spcPts val="0"/>
+              </a:spcBef>
+              <a:spcAft>
+                <a:spcPts val="0"/>
+              </a:spcAft>
+            </a:pPr>
+            <a:r>
+              <a:rPr sz="1600" b="1">
+                <a:solidFill>
+                  <a:srgbClr val="0F9D58"/>
+                </a:solidFill>
+                <a:latin typeface="Meiryo"/>
+              </a:rPr>
+              <a:t>説明変数（28特徴量）</a:t>
+            </a:r>
+          </a:p>
+        </p:txBody>
+      </p:sp>
+      <p:sp>
+        <p:nvSpPr>
+          <p:cNvPr id="9" name="TextBox 8"/>
+          <p:cNvSpPr txBox="1"/>
+          <p:nvPr/>
+        </p:nvSpPr>
+        <p:spPr>
+          <a:xfrm>
+            <a:off x="777240" y="3154680"/>
+            <a:ext cx="4800600" cy="1280160"/>
+          </a:xfrm>
+          <a:prstGeom prst="rect">
+            <a:avLst/>
+          </a:prstGeom>
+          <a:noFill/>
+        </p:spPr>
+        <p:txBody>
+          <a:bodyPr wrap="square" anchor="t">
+            <a:spAutoFit/>
+          </a:bodyPr>
+          <a:lstStyle/>
+          <a:p>
+            <a:pPr>
+              <a:spcAft>
+                <a:spcPts val="500"/>
+              </a:spcAft>
+            </a:pPr>
+            <a:r>
+              <a:rPr sz="1500">
+                <a:solidFill>
+                  <a:srgbClr val="0F9D58"/>
+                </a:solidFill>
+                <a:latin typeface="Meiryo"/>
+              </a:rPr>
+              <a:t>• </a:t>
+            </a:r>
+            <a:r>
+              <a:rPr sz="1500">
+                <a:solidFill>
+                  <a:srgbClr val="222833"/>
+                </a:solidFill>
+                <a:latin typeface="Meiryo"/>
+              </a:rPr>
+              <a:t>人口・世帯構成（11）、競合環境（4）、駅アクセス（3）</a:t>
+            </a:r>
+          </a:p>
+          <a:p>
+            <a:pPr>
+              <a:spcAft>
+                <a:spcPts val="500"/>
+              </a:spcAft>
+            </a:pPr>
+            <a:r>
+              <a:rPr sz="1500">
+                <a:solidFill>
+                  <a:srgbClr val="0F9D58"/>
+                </a:solidFill>
+                <a:latin typeface="Meiryo"/>
+              </a:rPr>
+              <a:t>• </a:t>
+            </a:r>
+            <a:r>
+              <a:rPr sz="1500">
+                <a:solidFill>
+                  <a:srgbClr val="222833"/>
+                </a:solidFill>
+                <a:latin typeface="Meiryo"/>
+              </a:rPr>
+              <a:t>地価・Google評価（4）、ジャンル関連（4）、交互作用（2）</a:t>
+            </a:r>
+          </a:p>
+        </p:txBody>
+      </p:sp>
+      <p:sp>
+        <p:nvSpPr>
+          <p:cNvPr id="10" name="Rounded Rectangle 9"/>
+          <p:cNvSpPr/>
+          <p:nvPr/>
+        </p:nvSpPr>
+        <p:spPr>
+          <a:xfrm>
+            <a:off x="6217920" y="2606040"/>
+            <a:ext cx="5440680" cy="2103120"/>
           </a:xfrm>
           <a:prstGeom prst="roundRect">
             <a:avLst>
@@ -10331,14 +9919,14 @@
       </p:sp>
       <p:sp>
         <p:nvSpPr>
-          <p:cNvPr id="7" name="TextBox 6"/>
+          <p:cNvPr id="11" name="TextBox 10"/>
           <p:cNvSpPr txBox="1"/>
           <p:nvPr/>
         </p:nvSpPr>
         <p:spPr>
           <a:xfrm>
-            <a:off x="914400" y="2331720"/>
-            <a:ext cx="2560320" cy="320040"/>
+            <a:off x="6492240" y="2788920"/>
+            <a:ext cx="2926080" cy="256032"/>
           </a:xfrm>
           <a:prstGeom prst="rect">
             <a:avLst/>
@@ -10351,7 +9939,7 @@
           </a:bodyPr>
           <a:lstStyle/>
           <a:p>
-            <a:pPr algn="ctr">
+            <a:pPr algn="l">
               <a:spcBef>
                 <a:spcPts val="0"/>
               </a:spcBef>
@@ -10360,27 +9948,27 @@
               </a:spcAft>
             </a:pPr>
             <a:r>
-              <a:rPr sz="1800" b="1">
+              <a:rPr sz="1600" b="1">
                 <a:solidFill>
                   <a:srgbClr val="2D5BE3"/>
                 </a:solidFill>
                 <a:latin typeface="Meiryo"/>
               </a:rPr>
-              <a:t>① 店が足りない</a:t>
-            </a:r>
-          </a:p>
-        </p:txBody>
-      </p:sp>
-      <p:sp>
-        <p:nvSpPr>
-          <p:cNvPr id="8" name="TextBox 7"/>
+              <a:t>市場ギャップの算出</a:t>
+            </a:r>
+          </a:p>
+        </p:txBody>
+      </p:sp>
+      <p:sp>
+        <p:nvSpPr>
+          <p:cNvPr id="12" name="TextBox 11"/>
           <p:cNvSpPr txBox="1"/>
           <p:nvPr/>
         </p:nvSpPr>
         <p:spPr>
           <a:xfrm>
-            <a:off x="914400" y="2788920"/>
-            <a:ext cx="2560320" cy="2286000"/>
+            <a:off x="6492240" y="3154680"/>
+            <a:ext cx="4800600" cy="1280160"/>
           </a:xfrm>
           <a:prstGeom prst="rect">
             <a:avLst/>
@@ -10393,510 +9981,358 @@
           </a:bodyPr>
           <a:lstStyle/>
           <a:p>
-            <a:pPr algn="ctr">
-              <a:spcBef>
-                <a:spcPts val="0"/>
-              </a:spcBef>
+            <a:pPr>
               <a:spcAft>
-                <a:spcPts val="0"/>
+                <a:spcPts val="500"/>
               </a:spcAft>
             </a:pPr>
             <a:r>
-              <a:rPr sz="1300" b="0">
+              <a:rPr sz="1500">
+                <a:solidFill>
+                  <a:srgbClr val="2D5BE3"/>
+                </a:solidFill>
+                <a:latin typeface="Meiryo"/>
+              </a:rPr>
+              <a:t>• </a:t>
+            </a:r>
+            <a:r>
+              <a:rPr sz="1500">
                 <a:solidFill>
                   <a:srgbClr val="222833"/>
                 </a:solidFill>
                 <a:latin typeface="Meiryo"/>
               </a:rPr>
-              <a:t>ジャンル別ギャップ(×1.49)</a:t>
-            </a:r>
-            <a:br/>
-            <a:r>
-              <a:rPr sz="1300" b="0">
-                <a:solidFill>
-                  <a:srgbClr val="222833"/>
-                </a:solidFill>
-                <a:latin typeface="Meiryo"/>
-              </a:rPr>
-              <a:t>そのジャンルの全メッシュ平均</a:t>
-            </a:r>
-            <a:br/>
-            <a:r>
-              <a:rPr sz="1300" b="0">
-                <a:solidFill>
-                  <a:srgbClr val="222833"/>
-                </a:solidFill>
-                <a:latin typeface="Meiryo"/>
-              </a:rPr>
-              <a:t>log店舗数と比較し少なければ加点</a:t>
-            </a:r>
-            <a:br/>
-            <a:br/>
-            <a:r>
-              <a:rPr sz="1300" b="0">
-                <a:solidFill>
-                  <a:srgbClr val="222833"/>
-                </a:solidFill>
-                <a:latin typeface="Meiryo"/>
-              </a:rPr>
-              <a:t>ジャンル集中度(×0.07)</a:t>
-            </a:r>
-            <a:br/>
-            <a:r>
-              <a:rPr sz="1300" b="0">
-                <a:solidFill>
-                  <a:srgbClr val="222833"/>
-                </a:solidFill>
-                <a:latin typeface="Meiryo"/>
-              </a:rPr>
-              <a:t>特定ジャンルに偏っていれば加点</a:t>
-            </a:r>
-          </a:p>
-        </p:txBody>
-      </p:sp>
-      <p:sp>
-        <p:nvSpPr>
-          <p:cNvPr id="9" name="Rounded Rectangle 8"/>
-          <p:cNvSpPr/>
-          <p:nvPr/>
-        </p:nvSpPr>
-        <p:spPr>
-          <a:xfrm>
-            <a:off x="4160520" y="2057400"/>
-            <a:ext cx="2926080" cy="3246120"/>
-          </a:xfrm>
-          <a:prstGeom prst="roundRect">
-            <a:avLst>
-              <a:gd name="adj" fmla="val 8000"/>
-            </a:avLst>
-          </a:prstGeom>
-          <a:solidFill>
-            <a:srgbClr val="F0F2F5"/>
-          </a:solidFill>
-          <a:ln w="12700">
-            <a:solidFill>
-              <a:srgbClr val="D7DEEA"/>
-            </a:solidFill>
-          </a:ln>
-        </p:spPr>
-        <p:style>
-          <a:lnRef idx="1">
-            <a:schemeClr val="accent1"/>
-          </a:lnRef>
-          <a:fillRef idx="3">
-            <a:schemeClr val="accent1"/>
-          </a:fillRef>
-          <a:effectRef idx="2">
-            <a:schemeClr val="accent1"/>
-          </a:effectRef>
-          <a:fontRef idx="minor">
-            <a:schemeClr val="lt1"/>
-          </a:fontRef>
-        </p:style>
-        <p:txBody>
-          <a:bodyPr rtlCol="0" anchor="ctr"/>
-          <a:lstStyle/>
-          <a:p>
-            <a:pPr algn="ctr"/>
-          </a:p>
-        </p:txBody>
-      </p:sp>
-      <p:sp>
-        <p:nvSpPr>
-          <p:cNvPr id="10" name="TextBox 9"/>
-          <p:cNvSpPr txBox="1"/>
-          <p:nvPr/>
-        </p:nvSpPr>
-        <p:spPr>
-          <a:xfrm>
-            <a:off x="4343400" y="2331720"/>
-            <a:ext cx="2560320" cy="320040"/>
-          </a:xfrm>
-          <a:prstGeom prst="rect">
-            <a:avLst/>
-          </a:prstGeom>
-          <a:noFill/>
-        </p:spPr>
-        <p:txBody>
-          <a:bodyPr wrap="square" anchor="t">
-            <a:spAutoFit/>
-          </a:bodyPr>
-          <a:lstStyle/>
-          <a:p>
-            <a:pPr algn="ctr">
-              <a:spcBef>
-                <a:spcPts val="0"/>
-              </a:spcBef>
+              <a:t>LightGBMで「本来何軒あるべきか」を予測</a:t>
+            </a:r>
+          </a:p>
+          <a:p>
+            <a:pPr>
               <a:spcAft>
-                <a:spcPts val="0"/>
+                <a:spcPts val="500"/>
               </a:spcAft>
             </a:pPr>
             <a:r>
-              <a:rPr sz="1800" b="1">
-                <a:solidFill>
-                  <a:srgbClr val="0F9D58"/>
-                </a:solidFill>
-                <a:latin typeface="Meiryo"/>
-              </a:rPr>
-              <a:t>② 人が集まる</a:t>
-            </a:r>
-          </a:p>
-        </p:txBody>
-      </p:sp>
-      <p:sp>
-        <p:nvSpPr>
-          <p:cNvPr id="11" name="TextBox 10"/>
-          <p:cNvSpPr txBox="1"/>
+              <a:rPr sz="1500">
+                <a:solidFill>
+                  <a:srgbClr val="2D5BE3"/>
+                </a:solidFill>
+                <a:latin typeface="Meiryo"/>
+              </a:rPr>
+              <a:t>• </a:t>
+            </a:r>
+            <a:r>
+              <a:rPr sz="1500">
+                <a:solidFill>
+                  <a:srgbClr val="222833"/>
+                </a:solidFill>
+                <a:latin typeface="Meiryo"/>
+              </a:rPr>
+              <a:t>予測値 − 実測値 = 市場ギャップ（大きい＝出店チャンス）</a:t>
+            </a:r>
+          </a:p>
+        </p:txBody>
+      </p:sp>
+      <p:graphicFrame>
+        <p:nvGraphicFramePr>
+          <p:cNvPr id="13" name="Table 12"/>
+          <p:cNvGraphicFramePr>
+            <a:graphicFrameLocks noGrp="1"/>
+          </p:cNvGraphicFramePr>
           <p:nvPr/>
-        </p:nvSpPr>
-        <p:spPr>
-          <a:xfrm>
-            <a:off x="4343400" y="2788920"/>
-            <a:ext cx="2560320" cy="2286000"/>
-          </a:xfrm>
-          <a:prstGeom prst="rect">
-            <a:avLst/>
-          </a:prstGeom>
-          <a:noFill/>
-        </p:spPr>
-        <p:txBody>
-          <a:bodyPr wrap="square" anchor="t">
-            <a:spAutoFit/>
-          </a:bodyPr>
-          <a:lstStyle/>
-          <a:p>
-            <a:pPr algn="ctr">
-              <a:spcBef>
-                <a:spcPts val="0"/>
-              </a:spcBef>
-              <a:spcAft>
-                <a:spcPts val="0"/>
-              </a:spcAft>
-            </a:pPr>
-            <a:r>
-              <a:rPr sz="1300" b="0">
-                <a:solidFill>
-                  <a:srgbClr val="222833"/>
-                </a:solidFill>
-                <a:latin typeface="Meiryo"/>
-              </a:rPr>
-              <a:t>他ジャンル店舗数(×2.71)</a:t>
-            </a:r>
-            <a:br/>
-            <a:r>
-              <a:rPr sz="1300" b="0">
-                <a:solidFill>
-                  <a:srgbClr val="222833"/>
-                </a:solidFill>
-                <a:latin typeface="Meiryo"/>
-              </a:rPr>
-              <a:t>カフェ以外の飲食店が多い</a:t>
-            </a:r>
-            <a:br/>
-            <a:r>
-              <a:rPr sz="1300" b="0">
-                <a:solidFill>
-                  <a:srgbClr val="222833"/>
-                </a:solidFill>
-                <a:latin typeface="Meiryo"/>
-              </a:rPr>
-              <a:t>＝商業集積があり集客力が高い</a:t>
-            </a:r>
-            <a:br/>
-            <a:br/>
-            <a:r>
-              <a:rPr sz="1300" b="0">
-                <a:solidFill>
-                  <a:srgbClr val="222833"/>
-                </a:solidFill>
-                <a:latin typeface="Meiryo"/>
-              </a:rPr>
-              <a:t>Google評価(×0.31)</a:t>
-            </a:r>
-            <a:br/>
-            <a:r>
-              <a:rPr sz="1300" b="0">
-                <a:solidFill>
-                  <a:srgbClr val="222833"/>
-                </a:solidFill>
-                <a:latin typeface="Meiryo"/>
-              </a:rPr>
-              <a:t>エリアの評判が高ければ加点</a:t>
-            </a:r>
-          </a:p>
-        </p:txBody>
-      </p:sp>
-      <p:sp>
-        <p:nvSpPr>
-          <p:cNvPr id="12" name="Rounded Rectangle 11"/>
-          <p:cNvSpPr/>
-          <p:nvPr/>
-        </p:nvSpPr>
-        <p:spPr>
-          <a:xfrm>
-            <a:off x="7589520" y="2057400"/>
-            <a:ext cx="2926080" cy="3246120"/>
-          </a:xfrm>
-          <a:prstGeom prst="roundRect">
-            <a:avLst>
-              <a:gd name="adj" fmla="val 8000"/>
-            </a:avLst>
-          </a:prstGeom>
-          <a:solidFill>
-            <a:srgbClr val="E8EEFD"/>
-          </a:solidFill>
-          <a:ln w="12700">
-            <a:solidFill>
-              <a:srgbClr val="D7DEEA"/>
-            </a:solidFill>
-          </a:ln>
-        </p:spPr>
-        <p:style>
-          <a:lnRef idx="1">
-            <a:schemeClr val="accent1"/>
-          </a:lnRef>
-          <a:fillRef idx="3">
-            <a:schemeClr val="accent1"/>
-          </a:fillRef>
-          <a:effectRef idx="2">
-            <a:schemeClr val="accent1"/>
-          </a:effectRef>
-          <a:fontRef idx="minor">
-            <a:schemeClr val="lt1"/>
-          </a:fontRef>
-        </p:style>
-        <p:txBody>
-          <a:bodyPr rtlCol="0" anchor="ctr"/>
-          <a:lstStyle/>
-          <a:p>
-            <a:pPr algn="ctr"/>
-          </a:p>
-        </p:txBody>
-      </p:sp>
-      <p:sp>
-        <p:nvSpPr>
-          <p:cNvPr id="13" name="TextBox 12"/>
-          <p:cNvSpPr txBox="1"/>
-          <p:nvPr/>
-        </p:nvSpPr>
-        <p:spPr>
-          <a:xfrm>
-            <a:off x="7772400" y="2331720"/>
-            <a:ext cx="2560320" cy="320040"/>
-          </a:xfrm>
-          <a:prstGeom prst="rect">
-            <a:avLst/>
-          </a:prstGeom>
-          <a:noFill/>
-        </p:spPr>
-        <p:txBody>
-          <a:bodyPr wrap="square" anchor="t">
-            <a:spAutoFit/>
-          </a:bodyPr>
-          <a:lstStyle/>
-          <a:p>
-            <a:pPr algn="ctr">
-              <a:spcBef>
-                <a:spcPts val="0"/>
-              </a:spcBef>
-              <a:spcAft>
-                <a:spcPts val="0"/>
-              </a:spcAft>
-            </a:pPr>
-            <a:r>
-              <a:rPr sz="1800" b="1">
-                <a:solidFill>
-                  <a:srgbClr val="DB4437"/>
-                </a:solidFill>
-                <a:latin typeface="Meiryo"/>
-              </a:rPr>
-              <a:t>③ ライバル過多</a:t>
-            </a:r>
-          </a:p>
-        </p:txBody>
-      </p:sp>
-      <p:sp>
-        <p:nvSpPr>
-          <p:cNvPr id="14" name="TextBox 13"/>
-          <p:cNvSpPr txBox="1"/>
-          <p:nvPr/>
-        </p:nvSpPr>
-        <p:spPr>
-          <a:xfrm>
-            <a:off x="7772400" y="2788920"/>
-            <a:ext cx="2560320" cy="2286000"/>
-          </a:xfrm>
-          <a:prstGeom prst="rect">
-            <a:avLst/>
-          </a:prstGeom>
-          <a:noFill/>
-        </p:spPr>
-        <p:txBody>
-          <a:bodyPr wrap="square" anchor="t">
-            <a:spAutoFit/>
-          </a:bodyPr>
-          <a:lstStyle/>
-          <a:p>
-            <a:pPr algn="ctr">
-              <a:spcBef>
-                <a:spcPts val="0"/>
-              </a:spcBef>
-              <a:spcAft>
-                <a:spcPts val="0"/>
-              </a:spcAft>
-            </a:pPr>
-            <a:r>
-              <a:rPr sz="1300" b="0">
-                <a:solidFill>
-                  <a:srgbClr val="222833"/>
-                </a:solidFill>
-                <a:latin typeface="Meiryo"/>
-              </a:rPr>
-              <a:t>飽和度(×0.15)</a:t>
-            </a:r>
-            <a:br/>
-            <a:r>
-              <a:rPr sz="1300" b="0">
-                <a:solidFill>
-                  <a:srgbClr val="222833"/>
-                </a:solidFill>
-                <a:latin typeface="Meiryo"/>
-              </a:rPr>
-              <a:t>人口あたり店舗数が</a:t>
-            </a:r>
-            <a:br/>
-            <a:r>
-              <a:rPr sz="1300" b="0">
-                <a:solidFill>
-                  <a:srgbClr val="222833"/>
-                </a:solidFill>
-                <a:latin typeface="Meiryo"/>
-              </a:rPr>
-              <a:t>多すぎれば減点</a:t>
-            </a:r>
-            <a:br/>
-            <a:br/>
-            <a:r>
-              <a:rPr sz="1300" b="0">
-                <a:solidFill>
-                  <a:srgbClr val="222833"/>
-                </a:solidFill>
-                <a:latin typeface="Meiryo"/>
-              </a:rPr>
-              <a:t>近隣競合(×0.05)</a:t>
-            </a:r>
-            <a:br/>
-            <a:r>
-              <a:rPr sz="1300" b="0">
-                <a:solidFill>
-                  <a:srgbClr val="222833"/>
-                </a:solidFill>
-                <a:latin typeface="Meiryo"/>
-              </a:rPr>
-              <a:t>周囲メッシュの平均店舗数が</a:t>
-            </a:r>
-            <a:br/>
-            <a:r>
-              <a:rPr sz="1300" b="0">
-                <a:solidFill>
-                  <a:srgbClr val="222833"/>
-                </a:solidFill>
-                <a:latin typeface="Meiryo"/>
-              </a:rPr>
-              <a:t>多ければ減点</a:t>
-            </a:r>
-          </a:p>
-        </p:txBody>
-      </p:sp>
-      <p:sp>
-        <p:nvSpPr>
-          <p:cNvPr id="15" name="Rounded Rectangle 14"/>
-          <p:cNvSpPr/>
-          <p:nvPr/>
-        </p:nvSpPr>
-        <p:spPr>
-          <a:xfrm>
-            <a:off x="731520" y="5577840"/>
-            <a:ext cx="9784080" cy="822960"/>
-          </a:xfrm>
-          <a:prstGeom prst="roundRect">
-            <a:avLst>
-              <a:gd name="adj" fmla="val 8000"/>
-            </a:avLst>
-          </a:prstGeom>
-          <a:solidFill>
-            <a:srgbClr val="F0F2F5"/>
-          </a:solidFill>
-          <a:ln w="12700">
-            <a:solidFill>
-              <a:srgbClr val="D7DEEA"/>
-            </a:solidFill>
-          </a:ln>
-        </p:spPr>
-        <p:style>
-          <a:lnRef idx="1">
-            <a:schemeClr val="accent1"/>
-          </a:lnRef>
-          <a:fillRef idx="3">
-            <a:schemeClr val="accent1"/>
-          </a:fillRef>
-          <a:effectRef idx="2">
-            <a:schemeClr val="accent1"/>
-          </a:effectRef>
-          <a:fontRef idx="minor">
-            <a:schemeClr val="lt1"/>
-          </a:fontRef>
-        </p:style>
-        <p:txBody>
-          <a:bodyPr rtlCol="0" anchor="ctr"/>
-          <a:lstStyle/>
-          <a:p>
-            <a:pPr algn="ctr"/>
-          </a:p>
-        </p:txBody>
-      </p:sp>
-      <p:sp>
-        <p:nvSpPr>
-          <p:cNvPr id="16" name="TextBox 15"/>
-          <p:cNvSpPr txBox="1"/>
-          <p:nvPr/>
-        </p:nvSpPr>
-        <p:spPr>
-          <a:xfrm>
-            <a:off x="960120" y="5650992"/>
-            <a:ext cx="9326880" cy="548640"/>
-          </a:xfrm>
-          <a:prstGeom prst="rect">
-            <a:avLst/>
-          </a:prstGeom>
-          <a:noFill/>
-        </p:spPr>
-        <p:txBody>
-          <a:bodyPr wrap="square" anchor="t">
-            <a:spAutoFit/>
-          </a:bodyPr>
-          <a:lstStyle/>
-          <a:p>
-            <a:pPr algn="ctr">
-              <a:spcBef>
-                <a:spcPts val="0"/>
-              </a:spcBef>
-              <a:spcAft>
-                <a:spcPts val="0"/>
-              </a:spcAft>
-            </a:pPr>
-            <a:r>
-              <a:rPr sz="1400" b="0">
-                <a:solidFill>
-                  <a:srgbClr val="222833"/>
-                </a:solidFill>
-                <a:latin typeface="Meiryo"/>
-              </a:rPr>
-              <a:t>各指標は0〜1に正規化（ジャンルギャップのみlog店舗数の差分）。(×数値)はOptunaで自動最適化した重み。他ジャンル店舗数(2.71)が最も重い＝商業集積がスコアを最も左右する。</a:t>
-            </a:r>
-          </a:p>
-        </p:txBody>
-      </p:sp>
+        </p:nvGraphicFramePr>
+        <p:xfrm>
+          <a:off x="777240" y="4983480"/>
+          <a:ext cx="10515600" cy="1325880"/>
+        </p:xfrm>
+        <a:graphic>
+          <a:graphicData uri="http://schemas.openxmlformats.org/drawingml/2006/table">
+            <a:tbl>
+              <a:tblPr firstRow="1" bandRow="1">
+                <a:tableStyleId>{5C22544A-7EE6-4342-B048-85BDC9FD1C3A}</a:tableStyleId>
+              </a:tblPr>
+              <a:tblGrid>
+                <a:gridCol w="1097280"/>
+                <a:gridCol w="3474720"/>
+                <a:gridCol w="2926080"/>
+                <a:gridCol w="3017520"/>
+              </a:tblGrid>
+              <a:tr h="441960">
+                <a:tc>
+                  <a:txBody>
+                    <a:bodyPr/>
+                    <a:lstStyle/>
+                    <a:p>
+                      <a:pPr algn="ctr"/>
+                    </a:p>
+                  </a:txBody>
+                  <a:tcPr anchor="ctr">
+                    <a:solidFill>
+                      <a:srgbClr val="2D5BE3"/>
+                    </a:solidFill>
+                  </a:tcPr>
+                </a:tc>
+                <a:tc>
+                  <a:txBody>
+                    <a:bodyPr/>
+                    <a:lstStyle/>
+                    <a:p>
+                      <a:pPr algn="ctr"/>
+                      <a:r>
+                        <a:rPr sz="1100" b="1">
+                          <a:solidFill>
+                            <a:srgbClr val="FFFFFF"/>
+                          </a:solidFill>
+                          <a:latin typeface="Meiryo"/>
+                        </a:rPr>
+                        <a:t>ML予測のみ（デフォルト）</a:t>
+                      </a:r>
+                    </a:p>
+                  </a:txBody>
+                  <a:tcPr anchor="ctr">
+                    <a:solidFill>
+                      <a:srgbClr val="2D5BE3"/>
+                    </a:solidFill>
+                  </a:tcPr>
+                </a:tc>
+                <a:tc>
+                  <a:txBody>
+                    <a:bodyPr/>
+                    <a:lstStyle/>
+                    <a:p>
+                      <a:pPr algn="ctr"/>
+                      <a:r>
+                        <a:rPr sz="1100" b="1">
+                          <a:solidFill>
+                            <a:srgbClr val="FFFFFF"/>
+                          </a:solidFill>
+                          <a:latin typeface="Meiryo"/>
+                        </a:rPr>
+                        <a:t>ルールベース</a:t>
+                      </a:r>
+                    </a:p>
+                  </a:txBody>
+                  <a:tcPr anchor="ctr">
+                    <a:solidFill>
+                      <a:srgbClr val="2D5BE3"/>
+                    </a:solidFill>
+                  </a:tcPr>
+                </a:tc>
+                <a:tc>
+                  <a:txBody>
+                    <a:bodyPr/>
+                    <a:lstStyle/>
+                    <a:p>
+                      <a:pPr algn="ctr"/>
+                      <a:r>
+                        <a:rPr sz="1100" b="1">
+                          <a:solidFill>
+                            <a:srgbClr val="FFFFFF"/>
+                          </a:solidFill>
+                          <a:latin typeface="Meiryo"/>
+                        </a:rPr>
+                        <a:t>両方の組み合わせ</a:t>
+                      </a:r>
+                    </a:p>
+                  </a:txBody>
+                  <a:tcPr anchor="ctr">
+                    <a:solidFill>
+                      <a:srgbClr val="2D5BE3"/>
+                    </a:solidFill>
+                  </a:tcPr>
+                </a:tc>
+              </a:tr>
+              <a:tr h="441960">
+                <a:tc>
+                  <a:txBody>
+                    <a:bodyPr/>
+                    <a:lstStyle/>
+                    <a:p>
+                      <a:pPr algn="ctr"/>
+                      <a:r>
+                        <a:rPr sz="1100" b="0">
+                          <a:solidFill>
+                            <a:srgbClr val="222833"/>
+                          </a:solidFill>
+                          <a:latin typeface="Meiryo"/>
+                        </a:rPr>
+                        <a:t>方式</a:t>
+                      </a:r>
+                    </a:p>
+                  </a:txBody>
+                  <a:tcPr anchor="ctr">
+                    <a:solidFill>
+                      <a:srgbClr val="E8EEFD"/>
+                    </a:solidFill>
+                  </a:tcPr>
+                </a:tc>
+                <a:tc>
+                  <a:txBody>
+                    <a:bodyPr/>
+                    <a:lstStyle/>
+                    <a:p>
+                      <a:pPr algn="ctr"/>
+                      <a:r>
+                        <a:rPr sz="1100" b="0">
+                          <a:solidFill>
+                            <a:srgbClr val="222833"/>
+                          </a:solidFill>
+                          <a:latin typeface="Meiryo"/>
+                        </a:rPr>
+                        <a:t>ML予測ギャップをrank正規化</a:t>
+                      </a:r>
+                    </a:p>
+                  </a:txBody>
+                  <a:tcPr anchor="ctr">
+                    <a:solidFill>
+                      <a:srgbClr val="E8EEFD"/>
+                    </a:solidFill>
+                  </a:tcPr>
+                </a:tc>
+                <a:tc>
+                  <a:txBody>
+                    <a:bodyPr/>
+                    <a:lstStyle/>
+                    <a:p>
+                      <a:pPr algn="ctr"/>
+                      <a:r>
+                        <a:rPr sz="1100" b="0">
+                          <a:solidFill>
+                            <a:srgbClr val="222833"/>
+                          </a:solidFill>
+                          <a:latin typeface="Meiryo"/>
+                        </a:rPr>
+                        <a:t>6要素の重み付け合算</a:t>
+                      </a:r>
+                    </a:p>
+                  </a:txBody>
+                  <a:tcPr anchor="ctr">
+                    <a:solidFill>
+                      <a:srgbClr val="E8EEFD"/>
+                    </a:solidFill>
+                  </a:tcPr>
+                </a:tc>
+                <a:tc>
+                  <a:txBody>
+                    <a:bodyPr/>
+                    <a:lstStyle/>
+                    <a:p>
+                      <a:pPr algn="ctr"/>
+                      <a:r>
+                        <a:rPr sz="1100" b="0">
+                          <a:solidFill>
+                            <a:srgbClr val="222833"/>
+                          </a:solidFill>
+                          <a:latin typeface="Meiryo"/>
+                        </a:rPr>
+                        <a:t>ルール×0.6 + ML×0.4</a:t>
+                      </a:r>
+                    </a:p>
+                  </a:txBody>
+                  <a:tcPr anchor="ctr">
+                    <a:solidFill>
+                      <a:srgbClr val="E8EEFD"/>
+                    </a:solidFill>
+                  </a:tcPr>
+                </a:tc>
+              </a:tr>
+              <a:tr h="441960">
+                <a:tc>
+                  <a:txBody>
+                    <a:bodyPr/>
+                    <a:lstStyle/>
+                    <a:p>
+                      <a:pPr algn="ctr"/>
+                      <a:r>
+                        <a:rPr sz="1100" b="0">
+                          <a:solidFill>
+                            <a:srgbClr val="222833"/>
+                          </a:solidFill>
+                          <a:latin typeface="Meiryo"/>
+                        </a:rPr>
+                        <a:t>特徴</a:t>
+                      </a:r>
+                    </a:p>
+                  </a:txBody>
+                  <a:tcPr anchor="ctr">
+                    <a:solidFill>
+                      <a:srgbClr val="FFFFFF"/>
+                    </a:solidFill>
+                  </a:tcPr>
+                </a:tc>
+                <a:tc>
+                  <a:txBody>
+                    <a:bodyPr/>
+                    <a:lstStyle/>
+                    <a:p>
+                      <a:pPr algn="ctr"/>
+                      <a:r>
+                        <a:rPr sz="1100" b="0">
+                          <a:solidFill>
+                            <a:srgbClr val="222833"/>
+                          </a:solidFill>
+                          <a:latin typeface="Meiryo"/>
+                        </a:rPr>
+                        <a:t>精度が高い・シンプル</a:t>
+                      </a:r>
+                    </a:p>
+                  </a:txBody>
+                  <a:tcPr anchor="ctr">
+                    <a:solidFill>
+                      <a:srgbClr val="FFFFFF"/>
+                    </a:solidFill>
+                  </a:tcPr>
+                </a:tc>
+                <a:tc>
+                  <a:txBody>
+                    <a:bodyPr/>
+                    <a:lstStyle/>
+                    <a:p>
+                      <a:pPr algn="ctr"/>
+                      <a:r>
+                        <a:rPr sz="1100" b="0">
+                          <a:solidFill>
+                            <a:srgbClr val="222833"/>
+                          </a:solidFill>
+                          <a:latin typeface="Meiryo"/>
+                        </a:rPr>
+                        <a:t>解釈しやすい</a:t>
+                      </a:r>
+                    </a:p>
+                  </a:txBody>
+                  <a:tcPr anchor="ctr">
+                    <a:solidFill>
+                      <a:srgbClr val="FFFFFF"/>
+                    </a:solidFill>
+                  </a:tcPr>
+                </a:tc>
+                <a:tc>
+                  <a:txBody>
+                    <a:bodyPr/>
+                    <a:lstStyle/>
+                    <a:p>
+                      <a:pPr algn="ctr"/>
+                      <a:r>
+                        <a:rPr sz="1100" b="0">
+                          <a:solidFill>
+                            <a:srgbClr val="222833"/>
+                          </a:solidFill>
+                          <a:latin typeface="Meiryo"/>
+                        </a:rPr>
+                        <a:t>両方の長所</a:t>
+                      </a:r>
+                    </a:p>
+                  </a:txBody>
+                  <a:tcPr anchor="ctr">
+                    <a:solidFill>
+                      <a:srgbClr val="FFFFFF"/>
+                    </a:solidFill>
+                  </a:tcPr>
+                </a:tc>
+              </a:tr>
+            </a:tbl>
+          </a:graphicData>
+        </a:graphic>
+      </p:graphicFrame>
     </p:spTree>
   </p:cSld>
   <p:clrMapOvr>
@@ -11003,879 +10439,7 @@
                 </a:solidFill>
                 <a:latin typeface="Meiryo"/>
               </a:rPr>
-              <a:t>4b: 2つのアプローチを組み合わせる</a:t>
-            </a:r>
-          </a:p>
-        </p:txBody>
-      </p:sp>
-      <p:sp>
-        <p:nvSpPr>
-          <p:cNvPr id="4" name="Rounded Rectangle 3"/>
-          <p:cNvSpPr/>
-          <p:nvPr/>
-        </p:nvSpPr>
-        <p:spPr>
-          <a:xfrm>
-            <a:off x="502920" y="914400"/>
-            <a:ext cx="5440680" cy="2286000"/>
-          </a:xfrm>
-          <a:prstGeom prst="roundRect">
-            <a:avLst>
-              <a:gd name="adj" fmla="val 8000"/>
-            </a:avLst>
-          </a:prstGeom>
-          <a:solidFill>
-            <a:srgbClr val="E8EEFD"/>
-          </a:solidFill>
-          <a:ln w="12700">
-            <a:solidFill>
-              <a:srgbClr val="D7DEEA"/>
-            </a:solidFill>
-          </a:ln>
-        </p:spPr>
-        <p:style>
-          <a:lnRef idx="1">
-            <a:schemeClr val="accent1"/>
-          </a:lnRef>
-          <a:fillRef idx="3">
-            <a:schemeClr val="accent1"/>
-          </a:fillRef>
-          <a:effectRef idx="2">
-            <a:schemeClr val="accent1"/>
-          </a:effectRef>
-          <a:fontRef idx="minor">
-            <a:schemeClr val="lt1"/>
-          </a:fontRef>
-        </p:style>
-        <p:txBody>
-          <a:bodyPr rtlCol="0" anchor="ctr"/>
-          <a:lstStyle/>
-          <a:p>
-            <a:pPr algn="ctr"/>
-          </a:p>
-        </p:txBody>
-      </p:sp>
-      <p:sp>
-        <p:nvSpPr>
-          <p:cNvPr id="5" name="TextBox 4"/>
-          <p:cNvSpPr txBox="1"/>
-          <p:nvPr/>
-        </p:nvSpPr>
-        <p:spPr>
-          <a:xfrm>
-            <a:off x="777240" y="1115568"/>
-            <a:ext cx="3108960" cy="256032"/>
-          </a:xfrm>
-          <a:prstGeom prst="rect">
-            <a:avLst/>
-          </a:prstGeom>
-          <a:noFill/>
-        </p:spPr>
-        <p:txBody>
-          <a:bodyPr wrap="square" anchor="t">
-            <a:spAutoFit/>
-          </a:bodyPr>
-          <a:lstStyle/>
-          <a:p>
-            <a:pPr algn="l">
-              <a:spcBef>
-                <a:spcPts val="0"/>
-              </a:spcBef>
-              <a:spcAft>
-                <a:spcPts val="0"/>
-              </a:spcAft>
-            </a:pPr>
-            <a:r>
-              <a:rPr sz="1600" b="1">
-                <a:solidFill>
-                  <a:srgbClr val="2D5BE3"/>
-                </a:solidFill>
-                <a:latin typeface="Meiryo"/>
-              </a:rPr>
-              <a:t>スコア計算（前スライドの考え方）</a:t>
-            </a:r>
-          </a:p>
-        </p:txBody>
-      </p:sp>
-      <p:sp>
-        <p:nvSpPr>
-          <p:cNvPr id="6" name="TextBox 5"/>
-          <p:cNvSpPr txBox="1"/>
-          <p:nvPr/>
-        </p:nvSpPr>
-        <p:spPr>
-          <a:xfrm>
-            <a:off x="777240" y="1481328"/>
-            <a:ext cx="4800600" cy="1280160"/>
-          </a:xfrm>
-          <a:prstGeom prst="rect">
-            <a:avLst/>
-          </a:prstGeom>
-          <a:noFill/>
-        </p:spPr>
-        <p:txBody>
-          <a:bodyPr wrap="square" anchor="t">
-            <a:spAutoFit/>
-          </a:bodyPr>
-          <a:lstStyle/>
-          <a:p>
-            <a:pPr>
-              <a:spcAft>
-                <a:spcPts val="500"/>
-              </a:spcAft>
-            </a:pPr>
-            <a:r>
-              <a:rPr sz="1500">
-                <a:solidFill>
-                  <a:srgbClr val="2D5BE3"/>
-                </a:solidFill>
-                <a:latin typeface="Meiryo"/>
-              </a:rPr>
-              <a:t>• </a:t>
-            </a:r>
-            <a:r>
-              <a:rPr sz="1500">
-                <a:solidFill>
-                  <a:srgbClr val="222833"/>
-                </a:solidFill>
-                <a:latin typeface="Meiryo"/>
-              </a:rPr>
-              <a:t>①店が足りない + ②人が集まる − ③ライバル過多 の3観点を重み付け合算</a:t>
-            </a:r>
-          </a:p>
-          <a:p>
-            <a:pPr>
-              <a:spcAft>
-                <a:spcPts val="500"/>
-              </a:spcAft>
-            </a:pPr>
-            <a:r>
-              <a:rPr sz="1500">
-                <a:solidFill>
-                  <a:srgbClr val="2D5BE3"/>
-                </a:solidFill>
-                <a:latin typeface="Meiryo"/>
-              </a:rPr>
-              <a:t>• </a:t>
-            </a:r>
-            <a:r>
-              <a:rPr sz="1500">
-                <a:solidFill>
-                  <a:srgbClr val="222833"/>
-                </a:solidFill>
-                <a:latin typeface="Meiryo"/>
-              </a:rPr>
-              <a:t>6要素の重みをOptuna（自動最適化）で調整</a:t>
-            </a:r>
-          </a:p>
-        </p:txBody>
-      </p:sp>
-      <p:sp>
-        <p:nvSpPr>
-          <p:cNvPr id="7" name="Rounded Rectangle 6"/>
-          <p:cNvSpPr/>
-          <p:nvPr/>
-        </p:nvSpPr>
-        <p:spPr>
-          <a:xfrm>
-            <a:off x="6217920" y="914400"/>
-            <a:ext cx="5440680" cy="2286000"/>
-          </a:xfrm>
-          <a:prstGeom prst="roundRect">
-            <a:avLst>
-              <a:gd name="adj" fmla="val 8000"/>
-            </a:avLst>
-          </a:prstGeom>
-          <a:solidFill>
-            <a:srgbClr val="F0F2F5"/>
-          </a:solidFill>
-          <a:ln w="12700">
-            <a:solidFill>
-              <a:srgbClr val="D7DEEA"/>
-            </a:solidFill>
-          </a:ln>
-        </p:spPr>
-        <p:style>
-          <a:lnRef idx="1">
-            <a:schemeClr val="accent1"/>
-          </a:lnRef>
-          <a:fillRef idx="3">
-            <a:schemeClr val="accent1"/>
-          </a:fillRef>
-          <a:effectRef idx="2">
-            <a:schemeClr val="accent1"/>
-          </a:effectRef>
-          <a:fontRef idx="minor">
-            <a:schemeClr val="lt1"/>
-          </a:fontRef>
-        </p:style>
-        <p:txBody>
-          <a:bodyPr rtlCol="0" anchor="ctr"/>
-          <a:lstStyle/>
-          <a:p>
-            <a:pPr algn="ctr"/>
-          </a:p>
-        </p:txBody>
-      </p:sp>
-      <p:sp>
-        <p:nvSpPr>
-          <p:cNvPr id="8" name="TextBox 7"/>
-          <p:cNvSpPr txBox="1"/>
-          <p:nvPr/>
-        </p:nvSpPr>
-        <p:spPr>
-          <a:xfrm>
-            <a:off x="6492240" y="1115568"/>
-            <a:ext cx="2926080" cy="256032"/>
-          </a:xfrm>
-          <a:prstGeom prst="rect">
-            <a:avLst/>
-          </a:prstGeom>
-          <a:noFill/>
-        </p:spPr>
-        <p:txBody>
-          <a:bodyPr wrap="square" anchor="t">
-            <a:spAutoFit/>
-          </a:bodyPr>
-          <a:lstStyle/>
-          <a:p>
-            <a:pPr algn="l">
-              <a:spcBef>
-                <a:spcPts val="0"/>
-              </a:spcBef>
-              <a:spcAft>
-                <a:spcPts val="0"/>
-              </a:spcAft>
-            </a:pPr>
-            <a:r>
-              <a:rPr sz="1600" b="1">
-                <a:solidFill>
-                  <a:srgbClr val="0F9D58"/>
-                </a:solidFill>
-                <a:latin typeface="Meiryo"/>
-              </a:rPr>
-              <a:t>ML予測（LightGBM = 高速な機械学習手法）</a:t>
-            </a:r>
-          </a:p>
-        </p:txBody>
-      </p:sp>
-      <p:sp>
-        <p:nvSpPr>
-          <p:cNvPr id="9" name="TextBox 8"/>
-          <p:cNvSpPr txBox="1"/>
-          <p:nvPr/>
-        </p:nvSpPr>
-        <p:spPr>
-          <a:xfrm>
-            <a:off x="6492240" y="1481328"/>
-            <a:ext cx="4709160" cy="1280160"/>
-          </a:xfrm>
-          <a:prstGeom prst="rect">
-            <a:avLst/>
-          </a:prstGeom>
-          <a:noFill/>
-        </p:spPr>
-        <p:txBody>
-          <a:bodyPr wrap="square" anchor="t">
-            <a:spAutoFit/>
-          </a:bodyPr>
-          <a:lstStyle/>
-          <a:p>
-            <a:pPr>
-              <a:spcAft>
-                <a:spcPts val="500"/>
-              </a:spcAft>
-            </a:pPr>
-            <a:r>
-              <a:rPr sz="1500">
-                <a:solidFill>
-                  <a:srgbClr val="0F9D58"/>
-                </a:solidFill>
-                <a:latin typeface="Meiryo"/>
-              </a:rPr>
-              <a:t>• </a:t>
-            </a:r>
-            <a:r>
-              <a:rPr sz="1500">
-                <a:solidFill>
-                  <a:srgbClr val="222833"/>
-                </a:solidFill>
-                <a:latin typeface="Meiryo"/>
-              </a:rPr>
-              <a:t>28特徴量から「本来何軒あるべきか」を予測</a:t>
-            </a:r>
-          </a:p>
-          <a:p>
-            <a:pPr>
-              <a:spcAft>
-                <a:spcPts val="500"/>
-              </a:spcAft>
-            </a:pPr>
-            <a:r>
-              <a:rPr sz="1500">
-                <a:solidFill>
-                  <a:srgbClr val="0F9D58"/>
-                </a:solidFill>
-                <a:latin typeface="Meiryo"/>
-              </a:rPr>
-              <a:t>• </a:t>
-            </a:r>
-            <a:r>
-              <a:rPr sz="1500">
-                <a:solidFill>
-                  <a:srgbClr val="222833"/>
-                </a:solidFill>
-                <a:latin typeface="Meiryo"/>
-              </a:rPr>
-              <a:t>予測値 − 実測値 = 市場ギャップ</a:t>
-            </a:r>
-          </a:p>
-        </p:txBody>
-      </p:sp>
-      <p:graphicFrame>
-        <p:nvGraphicFramePr>
-          <p:cNvPr id="10" name="Table 9"/>
-          <p:cNvGraphicFramePr>
-            <a:graphicFrameLocks noGrp="1"/>
-          </p:cNvGraphicFramePr>
-          <p:nvPr/>
-        </p:nvGraphicFramePr>
-        <p:xfrm>
-          <a:off x="1005840" y="3749039"/>
-          <a:ext cx="10195560" cy="1691640"/>
-        </p:xfrm>
-        <a:graphic>
-          <a:graphicData uri="http://schemas.openxmlformats.org/drawingml/2006/table">
-            <a:tbl>
-              <a:tblPr firstRow="1" bandRow="1">
-                <a:tableStyleId>{5C22544A-7EE6-4342-B048-85BDC9FD1C3A}</a:tableStyleId>
-              </a:tblPr>
-              <a:tblGrid>
-                <a:gridCol w="1371600"/>
-                <a:gridCol w="2560320"/>
-                <a:gridCol w="2377440"/>
-                <a:gridCol w="3886200"/>
-              </a:tblGrid>
-              <a:tr h="422910">
-                <a:tc>
-                  <a:txBody>
-                    <a:bodyPr/>
-                    <a:lstStyle/>
-                    <a:p>
-                      <a:pPr algn="ctr"/>
-                    </a:p>
-                  </a:txBody>
-                  <a:tcPr anchor="ctr">
-                    <a:solidFill>
-                      <a:srgbClr val="2D5BE3"/>
-                    </a:solidFill>
-                  </a:tcPr>
-                </a:tc>
-                <a:tc>
-                  <a:txBody>
-                    <a:bodyPr/>
-                    <a:lstStyle/>
-                    <a:p>
-                      <a:pPr algn="ctr"/>
-                      <a:r>
-                        <a:rPr sz="1200" b="1">
-                          <a:solidFill>
-                            <a:srgbClr val="FFFFFF"/>
-                          </a:solidFill>
-                          <a:latin typeface="Meiryo"/>
-                        </a:rPr>
-                        <a:t>スコア計算(v3b)</a:t>
-                      </a:r>
-                    </a:p>
-                  </a:txBody>
-                  <a:tcPr anchor="ctr">
-                    <a:solidFill>
-                      <a:srgbClr val="2D5BE3"/>
-                    </a:solidFill>
-                  </a:tcPr>
-                </a:tc>
-                <a:tc>
-                  <a:txBody>
-                    <a:bodyPr/>
-                    <a:lstStyle/>
-                    <a:p>
-                      <a:pPr algn="ctr"/>
-                      <a:r>
-                        <a:rPr sz="1200" b="1">
-                          <a:solidFill>
-                            <a:srgbClr val="FFFFFF"/>
-                          </a:solidFill>
-                          <a:latin typeface="Meiryo"/>
-                        </a:rPr>
-                        <a:t>ML Gap(v5)</a:t>
-                      </a:r>
-                    </a:p>
-                  </a:txBody>
-                  <a:tcPr anchor="ctr">
-                    <a:solidFill>
-                      <a:srgbClr val="2D5BE3"/>
-                    </a:solidFill>
-                  </a:tcPr>
-                </a:tc>
-                <a:tc>
-                  <a:txBody>
-                    <a:bodyPr/>
-                    <a:lstStyle/>
-                    <a:p>
-                      <a:pPr algn="ctr"/>
-                      <a:r>
-                        <a:rPr sz="1200" b="1">
-                          <a:solidFill>
-                            <a:srgbClr val="FFFFFF"/>
-                          </a:solidFill>
-                          <a:latin typeface="Meiryo"/>
-                        </a:rPr>
-                        <a:t>アンサンブル(v4)</a:t>
-                      </a:r>
-                    </a:p>
-                  </a:txBody>
-                  <a:tcPr anchor="ctr">
-                    <a:solidFill>
-                      <a:srgbClr val="2D5BE3"/>
-                    </a:solidFill>
-                  </a:tcPr>
-                </a:tc>
-              </a:tr>
-              <a:tr h="422910">
-                <a:tc>
-                  <a:txBody>
-                    <a:bodyPr/>
-                    <a:lstStyle/>
-                    <a:p>
-                      <a:pPr algn="ctr"/>
-                      <a:r>
-                        <a:rPr sz="1200" b="0">
-                          <a:solidFill>
-                            <a:srgbClr val="222833"/>
-                          </a:solidFill>
-                          <a:latin typeface="Meiryo"/>
-                        </a:rPr>
-                        <a:t>特徴</a:t>
-                      </a:r>
-                    </a:p>
-                  </a:txBody>
-                  <a:tcPr anchor="ctr">
-                    <a:solidFill>
-                      <a:srgbClr val="E8EEFD"/>
-                    </a:solidFill>
-                  </a:tcPr>
-                </a:tc>
-                <a:tc>
-                  <a:txBody>
-                    <a:bodyPr/>
-                    <a:lstStyle/>
-                    <a:p>
-                      <a:pPr algn="ctr"/>
-                      <a:r>
-                        <a:rPr sz="1200" b="0">
-                          <a:solidFill>
-                            <a:srgbClr val="222833"/>
-                          </a:solidFill>
-                          <a:latin typeface="Meiryo"/>
-                        </a:rPr>
-                        <a:t>解釈しやすい</a:t>
-                      </a:r>
-                    </a:p>
-                  </a:txBody>
-                  <a:tcPr anchor="ctr">
-                    <a:solidFill>
-                      <a:srgbClr val="E8EEFD"/>
-                    </a:solidFill>
-                  </a:tcPr>
-                </a:tc>
-                <a:tc>
-                  <a:txBody>
-                    <a:bodyPr/>
-                    <a:lstStyle/>
-                    <a:p>
-                      <a:pPr algn="ctr"/>
-                      <a:r>
-                        <a:rPr sz="1200" b="0">
-                          <a:solidFill>
-                            <a:srgbClr val="222833"/>
-                          </a:solidFill>
-                          <a:latin typeface="Meiryo"/>
-                        </a:rPr>
-                        <a:t>精度が高い</a:t>
-                      </a:r>
-                    </a:p>
-                  </a:txBody>
-                  <a:tcPr anchor="ctr">
-                    <a:solidFill>
-                      <a:srgbClr val="E8EEFD"/>
-                    </a:solidFill>
-                  </a:tcPr>
-                </a:tc>
-                <a:tc>
-                  <a:txBody>
-                    <a:bodyPr/>
-                    <a:lstStyle/>
-                    <a:p>
-                      <a:pPr algn="ctr"/>
-                      <a:r>
-                        <a:rPr sz="1200" b="0">
-                          <a:solidFill>
-                            <a:srgbClr val="222833"/>
-                          </a:solidFill>
-                          <a:latin typeface="Meiryo"/>
-                        </a:rPr>
-                        <a:t>両方の長所</a:t>
-                      </a:r>
-                    </a:p>
-                  </a:txBody>
-                  <a:tcPr anchor="ctr">
-                    <a:solidFill>
-                      <a:srgbClr val="E8EEFD"/>
-                    </a:solidFill>
-                  </a:tcPr>
-                </a:tc>
-              </a:tr>
-              <a:tr h="422910">
-                <a:tc>
-                  <a:txBody>
-                    <a:bodyPr/>
-                    <a:lstStyle/>
-                    <a:p>
-                      <a:pPr algn="ctr"/>
-                      <a:r>
-                        <a:rPr sz="1200" b="0">
-                          <a:solidFill>
-                            <a:srgbClr val="222833"/>
-                          </a:solidFill>
-                          <a:latin typeface="Meiryo"/>
-                        </a:rPr>
-                        <a:t>弱点</a:t>
-                      </a:r>
-                    </a:p>
-                  </a:txBody>
-                  <a:tcPr anchor="ctr">
-                    <a:solidFill>
-                      <a:srgbClr val="FFFFFF"/>
-                    </a:solidFill>
-                  </a:tcPr>
-                </a:tc>
-                <a:tc>
-                  <a:txBody>
-                    <a:bodyPr/>
-                    <a:lstStyle/>
-                    <a:p>
-                      <a:pPr algn="ctr"/>
-                      <a:r>
-                        <a:rPr sz="1200" b="0">
-                          <a:solidFill>
-                            <a:srgbClr val="222833"/>
-                          </a:solidFill>
-                          <a:latin typeface="Meiryo"/>
-                        </a:rPr>
-                        <a:t>非線形パターンを見逃す</a:t>
-                      </a:r>
-                    </a:p>
-                  </a:txBody>
-                  <a:tcPr anchor="ctr">
-                    <a:solidFill>
-                      <a:srgbClr val="FFFFFF"/>
-                    </a:solidFill>
-                  </a:tcPr>
-                </a:tc>
-                <a:tc>
-                  <a:txBody>
-                    <a:bodyPr/>
-                    <a:lstStyle/>
-                    <a:p>
-                      <a:pPr algn="ctr"/>
-                      <a:r>
-                        <a:rPr sz="1200" b="0">
-                          <a:solidFill>
-                            <a:srgbClr val="222833"/>
-                          </a:solidFill>
-                          <a:latin typeface="Meiryo"/>
-                        </a:rPr>
-                        <a:t>ブラックボックス</a:t>
-                      </a:r>
-                    </a:p>
-                  </a:txBody>
-                  <a:tcPr anchor="ctr">
-                    <a:solidFill>
-                      <a:srgbClr val="FFFFFF"/>
-                    </a:solidFill>
-                  </a:tcPr>
-                </a:tc>
-                <a:tc>
-                  <a:txBody>
-                    <a:bodyPr/>
-                    <a:lstStyle/>
-                    <a:p>
-                      <a:pPr algn="ctr"/>
-                      <a:r>
-                        <a:rPr sz="1200" b="0">
-                          <a:solidFill>
-                            <a:srgbClr val="222833"/>
-                          </a:solidFill>
-                          <a:latin typeface="Meiryo"/>
-                        </a:rPr>
-                        <a:t>—</a:t>
-                      </a:r>
-                    </a:p>
-                  </a:txBody>
-                  <a:tcPr anchor="ctr">
-                    <a:solidFill>
-                      <a:srgbClr val="FFFFFF"/>
-                    </a:solidFill>
-                  </a:tcPr>
-                </a:tc>
-              </a:tr>
-              <a:tr h="422910">
-                <a:tc>
-                  <a:txBody>
-                    <a:bodyPr/>
-                    <a:lstStyle/>
-                    <a:p>
-                      <a:pPr algn="ctr"/>
-                      <a:r>
-                        <a:rPr sz="1200" b="0">
-                          <a:solidFill>
-                            <a:srgbClr val="222833"/>
-                          </a:solidFill>
-                          <a:latin typeface="Meiryo"/>
-                        </a:rPr>
-                        <a:t>一致度</a:t>
-                      </a:r>
-                    </a:p>
-                  </a:txBody>
-                  <a:tcPr anchor="ctr">
-                    <a:solidFill>
-                      <a:srgbClr val="E8EEFD"/>
-                    </a:solidFill>
-                  </a:tcPr>
-                </a:tc>
-                <a:tc>
-                  <a:txBody>
-                    <a:bodyPr/>
-                    <a:lstStyle/>
-                    <a:p>
-                      <a:pPr algn="ctr"/>
-                      <a:r>
-                        <a:rPr sz="1200" b="0">
-                          <a:solidFill>
-                            <a:srgbClr val="222833"/>
-                          </a:solidFill>
-                          <a:latin typeface="Meiryo"/>
-                        </a:rPr>
-                        <a:t>—</a:t>
-                      </a:r>
-                    </a:p>
-                  </a:txBody>
-                  <a:tcPr anchor="ctr">
-                    <a:solidFill>
-                      <a:srgbClr val="E8EEFD"/>
-                    </a:solidFill>
-                  </a:tcPr>
-                </a:tc>
-                <a:tc>
-                  <a:txBody>
-                    <a:bodyPr/>
-                    <a:lstStyle/>
-                    <a:p>
-                      <a:pPr algn="ctr"/>
-                      <a:r>
-                        <a:rPr sz="1200" b="0">
-                          <a:solidFill>
-                            <a:srgbClr val="222833"/>
-                          </a:solidFill>
-                          <a:latin typeface="Meiryo"/>
-                        </a:rPr>
-                        <a:t>—</a:t>
-                      </a:r>
-                    </a:p>
-                  </a:txBody>
-                  <a:tcPr anchor="ctr">
-                    <a:solidFill>
-                      <a:srgbClr val="E8EEFD"/>
-                    </a:solidFill>
-                  </a:tcPr>
-                </a:tc>
-                <a:tc>
-                  <a:txBody>
-                    <a:bodyPr/>
-                    <a:lstStyle/>
-                    <a:p>
-                      <a:pPr algn="ctr"/>
-                      <a:r>
-                        <a:rPr sz="1200" b="0">
-                          <a:solidFill>
-                            <a:srgbClr val="222833"/>
-                          </a:solidFill>
-                          <a:latin typeface="Meiryo"/>
-                        </a:rPr>
-                        <a:t>Spearman相関 = 0.572</a:t>
-                      </a:r>
-                    </a:p>
-                  </a:txBody>
-                  <a:tcPr anchor="ctr">
-                    <a:solidFill>
-                      <a:srgbClr val="E8EEFD"/>
-                    </a:solidFill>
-                  </a:tcPr>
-                </a:tc>
-              </a:tr>
-            </a:tbl>
-          </a:graphicData>
-        </a:graphic>
-      </p:graphicFrame>
-      <p:sp>
-        <p:nvSpPr>
-          <p:cNvPr id="11" name="TextBox 10"/>
-          <p:cNvSpPr txBox="1"/>
-          <p:nvPr/>
-        </p:nvSpPr>
-        <p:spPr>
-          <a:xfrm>
-            <a:off x="1051560" y="5623560"/>
-            <a:ext cx="10058400" cy="320040"/>
-          </a:xfrm>
-          <a:prstGeom prst="rect">
-            <a:avLst/>
-          </a:prstGeom>
-          <a:noFill/>
-        </p:spPr>
-        <p:txBody>
-          <a:bodyPr wrap="square" anchor="t">
-            <a:spAutoFit/>
-          </a:bodyPr>
-          <a:lstStyle/>
-          <a:p>
-            <a:pPr algn="l">
-              <a:spcBef>
-                <a:spcPts val="0"/>
-              </a:spcBef>
-              <a:spcAft>
-                <a:spcPts val="0"/>
-              </a:spcAft>
-            </a:pPr>
-            <a:r>
-              <a:rPr sz="1600" b="1">
-                <a:solidFill>
-                  <a:srgbClr val="DB4437"/>
-                </a:solidFill>
-                <a:latin typeface="Meiryo"/>
-              </a:rPr>
-              <a:t>現在はv5（ML Gapのみ）をデフォルト採用。v4（アンサンブル）も選択可能</a:t>
-            </a:r>
-          </a:p>
-        </p:txBody>
-      </p:sp>
-    </p:spTree>
-  </p:cSld>
-  <p:clrMapOvr>
-    <a:masterClrMapping/>
-  </p:clrMapOvr>
-</p:sld>
-</file>
-
-<file path=ppt/slides/slide9.xml><?xml version="1.0" encoding="utf-8"?>
-<p:sld xmlns:a="http://schemas.openxmlformats.org/drawingml/2006/main" xmlns:p="http://schemas.openxmlformats.org/presentationml/2006/main" xmlns:r="http://schemas.openxmlformats.org/officeDocument/2006/relationships">
-  <p:cSld>
-    <p:bg>
-      <p:bgPr>
-        <a:solidFill>
-          <a:srgbClr val="FAFAFC"/>
-        </a:solidFill>
-        <a:effectLst/>
-      </p:bgPr>
-    </p:bg>
-    <p:spTree>
-      <p:nvGrpSpPr>
-        <p:cNvPr id="1" name=""/>
-        <p:cNvGrpSpPr/>
-        <p:nvPr/>
-      </p:nvGrpSpPr>
-      <p:grpSpPr/>
-      <p:sp>
-        <p:nvSpPr>
-          <p:cNvPr id="2" name="Rectangle 1"/>
-          <p:cNvSpPr/>
-          <p:nvPr/>
-        </p:nvSpPr>
-        <p:spPr>
-          <a:xfrm>
-            <a:off x="502920" y="347472"/>
-            <a:ext cx="109728" cy="475488"/>
-          </a:xfrm>
-          <a:prstGeom prst="rect">
-            <a:avLst/>
-          </a:prstGeom>
-          <a:solidFill>
-            <a:srgbClr val="2D5BE3"/>
-          </a:solidFill>
-          <a:ln>
-            <a:noFill/>
-          </a:ln>
-        </p:spPr>
-        <p:style>
-          <a:lnRef idx="1">
-            <a:schemeClr val="accent1"/>
-          </a:lnRef>
-          <a:fillRef idx="3">
-            <a:schemeClr val="accent1"/>
-          </a:fillRef>
-          <a:effectRef idx="2">
-            <a:schemeClr val="accent1"/>
-          </a:effectRef>
-          <a:fontRef idx="minor">
-            <a:schemeClr val="lt1"/>
-          </a:fontRef>
-        </p:style>
-        <p:txBody>
-          <a:bodyPr rtlCol="0" anchor="ctr"/>
-          <a:lstStyle/>
-          <a:p>
-            <a:pPr algn="ctr"/>
-          </a:p>
-        </p:txBody>
-      </p:sp>
-      <p:sp>
-        <p:nvSpPr>
-          <p:cNvPr id="3" name="TextBox 2"/>
-          <p:cNvSpPr txBox="1"/>
-          <p:nvPr/>
-        </p:nvSpPr>
-        <p:spPr>
-          <a:xfrm>
-            <a:off x="713232" y="219456"/>
-            <a:ext cx="10424160" cy="457200"/>
-          </a:xfrm>
-          <a:prstGeom prst="rect">
-            <a:avLst/>
-          </a:prstGeom>
-          <a:noFill/>
-        </p:spPr>
-        <p:txBody>
-          <a:bodyPr wrap="square" anchor="t">
-            <a:spAutoFit/>
-          </a:bodyPr>
-          <a:lstStyle/>
-          <a:p>
-            <a:pPr algn="l">
-              <a:spcBef>
-                <a:spcPts val="0"/>
-              </a:spcBef>
-              <a:spcAft>
-                <a:spcPts val="0"/>
-              </a:spcAft>
-            </a:pPr>
-            <a:r>
-              <a:rPr sz="2800" b="1">
-                <a:solidFill>
-                  <a:srgbClr val="222833"/>
-                </a:solidFill>
-                <a:latin typeface="Meiryo"/>
-              </a:rPr>
-              <a:t>5a: モデルに入れたデータ（特徴量）</a:t>
+              <a:t>5: モデルに入れたデータ（説明変数）</a:t>
             </a:r>
           </a:p>
         </p:txBody>
@@ -12802,6 +11366,652 @@
 </p:sld>
 </file>
 
+<file path=ppt/slides/slide9.xml><?xml version="1.0" encoding="utf-8"?>
+<p:sld xmlns:a="http://schemas.openxmlformats.org/drawingml/2006/main" xmlns:p="http://schemas.openxmlformats.org/presentationml/2006/main" xmlns:r="http://schemas.openxmlformats.org/officeDocument/2006/relationships">
+  <p:cSld>
+    <p:bg>
+      <p:bgPr>
+        <a:solidFill>
+          <a:srgbClr val="FAFAFC"/>
+        </a:solidFill>
+        <a:effectLst/>
+      </p:bgPr>
+    </p:bg>
+    <p:spTree>
+      <p:nvGrpSpPr>
+        <p:cNvPr id="1" name=""/>
+        <p:cNvGrpSpPr/>
+        <p:nvPr/>
+      </p:nvGrpSpPr>
+      <p:grpSpPr/>
+      <p:sp>
+        <p:nvSpPr>
+          <p:cNvPr id="2" name="Rectangle 1"/>
+          <p:cNvSpPr/>
+          <p:nvPr/>
+        </p:nvSpPr>
+        <p:spPr>
+          <a:xfrm>
+            <a:off x="502920" y="347472"/>
+            <a:ext cx="109728" cy="475488"/>
+          </a:xfrm>
+          <a:prstGeom prst="rect">
+            <a:avLst/>
+          </a:prstGeom>
+          <a:solidFill>
+            <a:srgbClr val="2D5BE3"/>
+          </a:solidFill>
+          <a:ln>
+            <a:noFill/>
+          </a:ln>
+        </p:spPr>
+        <p:style>
+          <a:lnRef idx="1">
+            <a:schemeClr val="accent1"/>
+          </a:lnRef>
+          <a:fillRef idx="3">
+            <a:schemeClr val="accent1"/>
+          </a:fillRef>
+          <a:effectRef idx="2">
+            <a:schemeClr val="accent1"/>
+          </a:effectRef>
+          <a:fontRef idx="minor">
+            <a:schemeClr val="lt1"/>
+          </a:fontRef>
+        </p:style>
+        <p:txBody>
+          <a:bodyPr rtlCol="0" anchor="ctr"/>
+          <a:lstStyle/>
+          <a:p>
+            <a:pPr algn="ctr"/>
+          </a:p>
+        </p:txBody>
+      </p:sp>
+      <p:sp>
+        <p:nvSpPr>
+          <p:cNvPr id="3" name="TextBox 2"/>
+          <p:cNvSpPr txBox="1"/>
+          <p:nvPr/>
+        </p:nvSpPr>
+        <p:spPr>
+          <a:xfrm>
+            <a:off x="713232" y="219456"/>
+            <a:ext cx="10424160" cy="457200"/>
+          </a:xfrm>
+          <a:prstGeom prst="rect">
+            <a:avLst/>
+          </a:prstGeom>
+          <a:noFill/>
+        </p:spPr>
+        <p:txBody>
+          <a:bodyPr wrap="square" anchor="t">
+            <a:spAutoFit/>
+          </a:bodyPr>
+          <a:lstStyle/>
+          <a:p>
+            <a:pPr algn="l">
+              <a:spcBef>
+                <a:spcPts val="0"/>
+              </a:spcBef>
+              <a:spcAft>
+                <a:spcPts val="0"/>
+              </a:spcAft>
+            </a:pPr>
+            <a:r>
+              <a:rPr sz="2800" b="1">
+                <a:solidFill>
+                  <a:srgbClr val="222833"/>
+                </a:solidFill>
+                <a:latin typeface="Meiryo"/>
+              </a:rPr>
+              <a:t>6: モデルの精度 ― 5-Fold クロスバリデーション</a:t>
+            </a:r>
+          </a:p>
+        </p:txBody>
+      </p:sp>
+      <p:pic>
+        <p:nvPicPr>
+          <p:cNvPr id="4" name="Picture 3" descr="tokyo_scatter_actual_vs_pred.png"/>
+          <p:cNvPicPr>
+            <a:picLocks noChangeAspect="1"/>
+          </p:cNvPicPr>
+          <p:nvPr/>
+        </p:nvPicPr>
+        <p:blipFill>
+          <a:blip r:embed="rId2"/>
+          <a:stretch>
+            <a:fillRect/>
+          </a:stretch>
+        </p:blipFill>
+        <p:spPr>
+          <a:xfrm>
+            <a:off x="502920" y="868680"/>
+            <a:ext cx="5029200" cy="4114800"/>
+          </a:xfrm>
+          <a:prstGeom prst="rect">
+            <a:avLst/>
+          </a:prstGeom>
+        </p:spPr>
+      </p:pic>
+      <p:sp>
+        <p:nvSpPr>
+          <p:cNvPr id="5" name="Rounded Rectangle 4"/>
+          <p:cNvSpPr/>
+          <p:nvPr/>
+        </p:nvSpPr>
+        <p:spPr>
+          <a:xfrm>
+            <a:off x="5760720" y="868680"/>
+            <a:ext cx="5852160" cy="2011680"/>
+          </a:xfrm>
+          <a:prstGeom prst="roundRect">
+            <a:avLst>
+              <a:gd name="adj" fmla="val 8000"/>
+            </a:avLst>
+          </a:prstGeom>
+          <a:solidFill>
+            <a:srgbClr val="E8EEFD"/>
+          </a:solidFill>
+          <a:ln w="12700">
+            <a:solidFill>
+              <a:srgbClr val="D7DEEA"/>
+            </a:solidFill>
+          </a:ln>
+        </p:spPr>
+        <p:style>
+          <a:lnRef idx="1">
+            <a:schemeClr val="accent1"/>
+          </a:lnRef>
+          <a:fillRef idx="3">
+            <a:schemeClr val="accent1"/>
+          </a:fillRef>
+          <a:effectRef idx="2">
+            <a:schemeClr val="accent1"/>
+          </a:effectRef>
+          <a:fontRef idx="minor">
+            <a:schemeClr val="lt1"/>
+          </a:fontRef>
+        </p:style>
+        <p:txBody>
+          <a:bodyPr rtlCol="0" anchor="ctr"/>
+          <a:lstStyle/>
+          <a:p>
+            <a:pPr algn="ctr"/>
+          </a:p>
+        </p:txBody>
+      </p:sp>
+      <p:sp>
+        <p:nvSpPr>
+          <p:cNvPr id="6" name="TextBox 5"/>
+          <p:cNvSpPr txBox="1"/>
+          <p:nvPr/>
+        </p:nvSpPr>
+        <p:spPr>
+          <a:xfrm>
+            <a:off x="5989320" y="1005840"/>
+            <a:ext cx="5303520" cy="256032"/>
+          </a:xfrm>
+          <a:prstGeom prst="rect">
+            <a:avLst/>
+          </a:prstGeom>
+          <a:noFill/>
+        </p:spPr>
+        <p:txBody>
+          <a:bodyPr wrap="square" anchor="t">
+            <a:spAutoFit/>
+          </a:bodyPr>
+          <a:lstStyle/>
+          <a:p>
+            <a:pPr algn="l">
+              <a:spcBef>
+                <a:spcPts val="0"/>
+              </a:spcBef>
+              <a:spcAft>
+                <a:spcPts val="0"/>
+              </a:spcAft>
+            </a:pPr>
+            <a:r>
+              <a:rPr sz="1600" b="1">
+                <a:solidFill>
+                  <a:srgbClr val="2D5BE3"/>
+                </a:solidFill>
+                <a:latin typeface="Meiryo"/>
+              </a:rPr>
+              <a:t>なぜこの検証方法？</a:t>
+            </a:r>
+          </a:p>
+        </p:txBody>
+      </p:sp>
+      <p:sp>
+        <p:nvSpPr>
+          <p:cNvPr id="7" name="TextBox 6"/>
+          <p:cNvSpPr txBox="1"/>
+          <p:nvPr/>
+        </p:nvSpPr>
+        <p:spPr>
+          <a:xfrm>
+            <a:off x="5989320" y="1325880"/>
+            <a:ext cx="5394960" cy="1371600"/>
+          </a:xfrm>
+          <a:prstGeom prst="rect">
+            <a:avLst/>
+          </a:prstGeom>
+          <a:noFill/>
+        </p:spPr>
+        <p:txBody>
+          <a:bodyPr wrap="square" anchor="t">
+            <a:spAutoFit/>
+          </a:bodyPr>
+          <a:lstStyle/>
+          <a:p>
+            <a:pPr>
+              <a:spcAft>
+                <a:spcPts val="500"/>
+              </a:spcAft>
+            </a:pPr>
+            <a:r>
+              <a:rPr sz="1300">
+                <a:solidFill>
+                  <a:srgbClr val="2D5BE3"/>
+                </a:solidFill>
+                <a:latin typeface="Meiryo"/>
+              </a:rPr>
+              <a:t>• </a:t>
+            </a:r>
+            <a:r>
+              <a:rPr sz="1300">
+                <a:solidFill>
+                  <a:srgbClr val="222833"/>
+                </a:solidFill>
+                <a:latin typeface="Meiryo"/>
+              </a:rPr>
+              <a:t>本来は新しい時点のデータで精度を測るのが理想だが、時系列データが取れない</a:t>
+            </a:r>
+          </a:p>
+          <a:p>
+            <a:pPr>
+              <a:spcAft>
+                <a:spcPts val="500"/>
+              </a:spcAft>
+            </a:pPr>
+            <a:r>
+              <a:rPr sz="1300">
+                <a:solidFill>
+                  <a:srgbClr val="2D5BE3"/>
+                </a:solidFill>
+                <a:latin typeface="Meiryo"/>
+              </a:rPr>
+              <a:t>• </a:t>
+            </a:r>
+            <a:r>
+              <a:rPr sz="1300">
+                <a:solidFill>
+                  <a:srgbClr val="222833"/>
+                </a:solidFill>
+                <a:latin typeface="Meiryo"/>
+              </a:rPr>
+              <a:t>学習データで評価するとリーケージ（情報漏れ）になるため、店舗数の分布が均等になるよう層化分割して汎化性能を測る</a:t>
+            </a:r>
+          </a:p>
+        </p:txBody>
+      </p:sp>
+      <p:sp>
+        <p:nvSpPr>
+          <p:cNvPr id="8" name="Rounded Rectangle 7"/>
+          <p:cNvSpPr/>
+          <p:nvPr/>
+        </p:nvSpPr>
+        <p:spPr>
+          <a:xfrm>
+            <a:off x="5760720" y="3063240"/>
+            <a:ext cx="5852160" cy="1645920"/>
+          </a:xfrm>
+          <a:prstGeom prst="roundRect">
+            <a:avLst>
+              <a:gd name="adj" fmla="val 8000"/>
+            </a:avLst>
+          </a:prstGeom>
+          <a:solidFill>
+            <a:srgbClr val="F0F2F5"/>
+          </a:solidFill>
+          <a:ln w="12700">
+            <a:solidFill>
+              <a:srgbClr val="D7DEEA"/>
+            </a:solidFill>
+          </a:ln>
+        </p:spPr>
+        <p:style>
+          <a:lnRef idx="1">
+            <a:schemeClr val="accent1"/>
+          </a:lnRef>
+          <a:fillRef idx="3">
+            <a:schemeClr val="accent1"/>
+          </a:fillRef>
+          <a:effectRef idx="2">
+            <a:schemeClr val="accent1"/>
+          </a:effectRef>
+          <a:fontRef idx="minor">
+            <a:schemeClr val="lt1"/>
+          </a:fontRef>
+        </p:style>
+        <p:txBody>
+          <a:bodyPr rtlCol="0" anchor="ctr"/>
+          <a:lstStyle/>
+          <a:p>
+            <a:pPr algn="ctr"/>
+          </a:p>
+        </p:txBody>
+      </p:sp>
+      <p:sp>
+        <p:nvSpPr>
+          <p:cNvPr id="9" name="TextBox 8"/>
+          <p:cNvSpPr txBox="1"/>
+          <p:nvPr/>
+        </p:nvSpPr>
+        <p:spPr>
+          <a:xfrm>
+            <a:off x="5989320" y="3200400"/>
+            <a:ext cx="5303520" cy="256032"/>
+          </a:xfrm>
+          <a:prstGeom prst="rect">
+            <a:avLst/>
+          </a:prstGeom>
+          <a:noFill/>
+        </p:spPr>
+        <p:txBody>
+          <a:bodyPr wrap="square" anchor="t">
+            <a:spAutoFit/>
+          </a:bodyPr>
+          <a:lstStyle/>
+          <a:p>
+            <a:pPr algn="l">
+              <a:spcBef>
+                <a:spcPts val="0"/>
+              </a:spcBef>
+              <a:spcAft>
+                <a:spcPts val="0"/>
+              </a:spcAft>
+            </a:pPr>
+            <a:r>
+              <a:rPr sz="1600" b="1">
+                <a:solidFill>
+                  <a:srgbClr val="0F9D58"/>
+                </a:solidFill>
+                <a:latin typeface="Meiryo"/>
+              </a:rPr>
+              <a:t>具体的な方法</a:t>
+            </a:r>
+          </a:p>
+        </p:txBody>
+      </p:sp>
+      <p:sp>
+        <p:nvSpPr>
+          <p:cNvPr id="10" name="TextBox 9"/>
+          <p:cNvSpPr txBox="1"/>
+          <p:nvPr/>
+        </p:nvSpPr>
+        <p:spPr>
+          <a:xfrm>
+            <a:off x="5989320" y="3520440"/>
+            <a:ext cx="5394960" cy="1005840"/>
+          </a:xfrm>
+          <a:prstGeom prst="rect">
+            <a:avLst/>
+          </a:prstGeom>
+          <a:noFill/>
+        </p:spPr>
+        <p:txBody>
+          <a:bodyPr wrap="square" anchor="t">
+            <a:spAutoFit/>
+          </a:bodyPr>
+          <a:lstStyle/>
+          <a:p>
+            <a:pPr>
+              <a:spcAft>
+                <a:spcPts val="500"/>
+              </a:spcAft>
+            </a:pPr>
+            <a:r>
+              <a:rPr sz="1300">
+                <a:solidFill>
+                  <a:srgbClr val="0F9D58"/>
+                </a:solidFill>
+                <a:latin typeface="Meiryo"/>
+              </a:rPr>
+              <a:t>• </a:t>
+            </a:r>
+            <a:r>
+              <a:rPr sz="1300">
+                <a:solidFill>
+                  <a:srgbClr val="222833"/>
+                </a:solidFill>
+                <a:latin typeface="Meiryo"/>
+              </a:rPr>
+              <a:t>東京の4,520行を店舗数の偏りが出ないよう5グループに層化分割</a:t>
+            </a:r>
+          </a:p>
+          <a:p>
+            <a:pPr>
+              <a:spcAft>
+                <a:spcPts val="500"/>
+              </a:spcAft>
+            </a:pPr>
+            <a:r>
+              <a:rPr sz="1300">
+                <a:solidFill>
+                  <a:srgbClr val="0F9D58"/>
+                </a:solidFill>
+                <a:latin typeface="Meiryo"/>
+              </a:rPr>
+              <a:t>• </a:t>
+            </a:r>
+            <a:r>
+              <a:rPr sz="1300">
+                <a:solidFill>
+                  <a:srgbClr val="222833"/>
+                </a:solidFill>
+                <a:latin typeface="Meiryo"/>
+              </a:rPr>
+              <a:t>StratifiedKFoldで店舗数ビンが均等になるよう分割</a:t>
+            </a:r>
+          </a:p>
+          <a:p>
+            <a:pPr>
+              <a:spcAft>
+                <a:spcPts val="500"/>
+              </a:spcAft>
+            </a:pPr>
+            <a:r>
+              <a:rPr sz="1300">
+                <a:solidFill>
+                  <a:srgbClr val="0F9D58"/>
+                </a:solidFill>
+                <a:latin typeface="Meiryo"/>
+              </a:rPr>
+              <a:t>• </a:t>
+            </a:r>
+            <a:r>
+              <a:rPr sz="1300">
+                <a:solidFill>
+                  <a:srgbClr val="222833"/>
+                </a:solidFill>
+                <a:latin typeface="Meiryo"/>
+              </a:rPr>
+              <a:t>4グループで学習→残り1グループで予測、を5回繰り返す</a:t>
+            </a:r>
+          </a:p>
+        </p:txBody>
+      </p:sp>
+      <p:sp>
+        <p:nvSpPr>
+          <p:cNvPr id="11" name="Rounded Rectangle 10"/>
+          <p:cNvSpPr/>
+          <p:nvPr/>
+        </p:nvSpPr>
+        <p:spPr>
+          <a:xfrm>
+            <a:off x="5760720" y="4892040"/>
+            <a:ext cx="5852160" cy="1371600"/>
+          </a:xfrm>
+          <a:prstGeom prst="roundRect">
+            <a:avLst>
+              <a:gd name="adj" fmla="val 8000"/>
+            </a:avLst>
+          </a:prstGeom>
+          <a:solidFill>
+            <a:srgbClr val="E8EEFD"/>
+          </a:solidFill>
+          <a:ln w="12700">
+            <a:solidFill>
+              <a:srgbClr val="D7DEEA"/>
+            </a:solidFill>
+          </a:ln>
+        </p:spPr>
+        <p:style>
+          <a:lnRef idx="1">
+            <a:schemeClr val="accent1"/>
+          </a:lnRef>
+          <a:fillRef idx="3">
+            <a:schemeClr val="accent1"/>
+          </a:fillRef>
+          <a:effectRef idx="2">
+            <a:schemeClr val="accent1"/>
+          </a:effectRef>
+          <a:fontRef idx="minor">
+            <a:schemeClr val="lt1"/>
+          </a:fontRef>
+        </p:style>
+        <p:txBody>
+          <a:bodyPr rtlCol="0" anchor="ctr"/>
+          <a:lstStyle/>
+          <a:p>
+            <a:pPr algn="ctr"/>
+          </a:p>
+        </p:txBody>
+      </p:sp>
+      <p:sp>
+        <p:nvSpPr>
+          <p:cNvPr id="12" name="TextBox 11"/>
+          <p:cNvSpPr txBox="1"/>
+          <p:nvPr/>
+        </p:nvSpPr>
+        <p:spPr>
+          <a:xfrm>
+            <a:off x="5989320" y="5029200"/>
+            <a:ext cx="5303520" cy="256032"/>
+          </a:xfrm>
+          <a:prstGeom prst="rect">
+            <a:avLst/>
+          </a:prstGeom>
+          <a:noFill/>
+        </p:spPr>
+        <p:txBody>
+          <a:bodyPr wrap="square" anchor="t">
+            <a:spAutoFit/>
+          </a:bodyPr>
+          <a:lstStyle/>
+          <a:p>
+            <a:pPr algn="l">
+              <a:spcBef>
+                <a:spcPts val="0"/>
+              </a:spcBef>
+              <a:spcAft>
+                <a:spcPts val="0"/>
+              </a:spcAft>
+            </a:pPr>
+            <a:r>
+              <a:rPr sz="1600" b="1">
+                <a:solidFill>
+                  <a:srgbClr val="2D5BE3"/>
+                </a:solidFill>
+                <a:latin typeface="Meiryo"/>
+              </a:rPr>
+              <a:t>結果</a:t>
+            </a:r>
+          </a:p>
+        </p:txBody>
+      </p:sp>
+      <p:sp>
+        <p:nvSpPr>
+          <p:cNvPr id="13" name="TextBox 12"/>
+          <p:cNvSpPr txBox="1"/>
+          <p:nvPr/>
+        </p:nvSpPr>
+        <p:spPr>
+          <a:xfrm>
+            <a:off x="5989320" y="5349240"/>
+            <a:ext cx="5394960" cy="731520"/>
+          </a:xfrm>
+          <a:prstGeom prst="rect">
+            <a:avLst/>
+          </a:prstGeom>
+          <a:noFill/>
+        </p:spPr>
+        <p:txBody>
+          <a:bodyPr wrap="square" anchor="t">
+            <a:spAutoFit/>
+          </a:bodyPr>
+          <a:lstStyle/>
+          <a:p>
+            <a:pPr>
+              <a:spcAft>
+                <a:spcPts val="500"/>
+              </a:spcAft>
+            </a:pPr>
+            <a:r>
+              <a:rPr sz="1300">
+                <a:solidFill>
+                  <a:srgbClr val="2D5BE3"/>
+                </a:solidFill>
+                <a:latin typeface="Meiryo"/>
+              </a:rPr>
+              <a:t>• </a:t>
+            </a:r>
+            <a:r>
+              <a:rPr sz="1300">
+                <a:solidFill>
+                  <a:srgbClr val="222833"/>
+                </a:solidFill>
+                <a:latin typeface="Meiryo"/>
+              </a:rPr>
+              <a:t>RMSE = 5.0店（実店舗数スケール）＝ 平均で約5店の誤差</a:t>
+            </a:r>
+          </a:p>
+          <a:p>
+            <a:pPr>
+              <a:spcAft>
+                <a:spcPts val="500"/>
+              </a:spcAft>
+            </a:pPr>
+            <a:r>
+              <a:rPr sz="1300">
+                <a:solidFill>
+                  <a:srgbClr val="2D5BE3"/>
+                </a:solidFill>
+                <a:latin typeface="Meiryo"/>
+              </a:rPr>
+              <a:t>• </a:t>
+            </a:r>
+            <a:r>
+              <a:rPr sz="1300">
+                <a:solidFill>
+                  <a:srgbClr val="222833"/>
+                </a:solidFill>
+                <a:latin typeface="Meiryo"/>
+              </a:rPr>
+              <a:t>中央値2店・平均4店のデータに対し、MAE = 1.6店（平均絶対誤差）</a:t>
+            </a:r>
+          </a:p>
+        </p:txBody>
+      </p:sp>
+    </p:spTree>
+  </p:cSld>
+  <p:clrMapOvr>
+    <a:masterClrMapping/>
+  </p:clrMapOvr>
+</p:sld>
+</file>
+
 <file path=ppt/theme/theme1.xml><?xml version="1.0" encoding="utf-8"?>
 <a:theme xmlns:a="http://schemas.openxmlformats.org/drawingml/2006/main" name="Office Theme">
   <a:themeElements>

--- a/docs/market_gap_finder_presentation.pptx
+++ b/docs/market_gap_finder_presentation.pptx
@@ -5074,7 +5074,7 @@
                 </a:solidFill>
                 <a:latin typeface="Meiryo"/>
               </a:rPr>
-              <a:t>6種API + 28特徴量ML + 5エリア対応ダッシュボードを一人で構築</a:t>
+              <a:t>6種API + 26特徴量ML + 5エリア対応ダッシュボードを一人で構築</a:t>
             </a:r>
           </a:p>
           <a:p>
@@ -9792,7 +9792,7 @@
                 </a:solidFill>
                 <a:latin typeface="Meiryo"/>
               </a:rPr>
-              <a:t>説明変数（28特徴量）</a:t>
+              <a:t>説明変数（26特徴量）</a:t>
             </a:r>
           </a:p>
         </p:txBody>
@@ -9865,7 +9865,7 @@
                 </a:solidFill>
                 <a:latin typeface="Meiryo"/>
               </a:rPr>
-              <a:t>地価・Google評価（4）、ジャンル関連（4）、交互作用（2）</a:t>
+              <a:t>地価・Google評価（3）、ジャンル関連（5）</a:t>
             </a:r>
           </a:p>
         </p:txBody>
@@ -10496,7 +10496,7 @@
         </p:nvGraphicFramePr>
         <p:xfrm>
           <a:off x="502920" y="1371600"/>
-          <a:ext cx="10058400" cy="4297678"/>
+          <a:ext cx="11155680" cy="4297678"/>
         </p:xfrm>
         <a:graphic>
           <a:graphicData uri="http://schemas.openxmlformats.org/drawingml/2006/table">
@@ -10505,11 +10505,10 @@
                 <a:tableStyleId>{5C22544A-7EE6-4342-B048-85BDC9FD1C3A}</a:tableStyleId>
               </a:tblPr>
               <a:tblGrid>
-                <a:gridCol w="1828800"/>
-                <a:gridCol w="822960"/>
-                <a:gridCol w="3657600"/>
-                <a:gridCol w="1920240"/>
-                <a:gridCol w="1828800"/>
+                <a:gridCol w="1645920"/>
+                <a:gridCol w="731520"/>
+                <a:gridCol w="6400800"/>
+                <a:gridCol w="2377440"/>
               </a:tblGrid>
               <a:tr h="613954">
                 <a:tc>
@@ -10604,29 +10603,6 @@
                     </a:solidFill>
                   </a:tcPr>
                 </a:tc>
-                <a:tc>
-                  <a:txBody>
-                    <a:bodyPr/>
-                    <a:lstStyle/>
-                    <a:p>
-                      <a:pPr algn="ctr"/>
-                      <a:r>
-                        <a:rPr sz="1100" b="1">
-                          <a:solidFill>
-                            <a:srgbClr val="FFFFFF"/>
-                          </a:solidFill>
-                          <a:latin typeface="Meiryo"/>
-                        </a:rPr>
-                        <a:t>スコア計算</a:t>
-                      </a:r>
-                    </a:p>
-                  </a:txBody>
-                  <a:tcPr anchor="ctr">
-                    <a:solidFill>
-                      <a:srgbClr val="2D5BE3"/>
-                    </a:solidFill>
-                  </a:tcPr>
-                </a:tc>
               </a:tr>
               <a:tr h="613954">
                 <a:tc>
@@ -10688,7 +10664,7 @@
                           </a:solidFill>
                           <a:latin typeface="Meiryo"/>
                         </a:rPr>
-                        <a:t>総人口、働く世代、高齢者、単身世帯…</a:t>
+                        <a:t>総人口、労働人口、成人、高齢者、世帯数、単身世帯、若年単身</a:t>
                       </a:r>
                     </a:p>
                   </a:txBody>
@@ -10712,29 +10688,6 @@
                           <a:latin typeface="Meiryo"/>
                         </a:rPr>
                         <a:t>お客さんの数</a:t>
-                      </a:r>
-                    </a:p>
-                  </a:txBody>
-                  <a:tcPr anchor="ctr">
-                    <a:solidFill>
-                      <a:srgbClr val="E8EEFD"/>
-                    </a:solidFill>
-                  </a:tcPr>
-                </a:tc>
-                <a:tc>
-                  <a:txBody>
-                    <a:bodyPr/>
-                    <a:lstStyle/>
-                    <a:p>
-                      <a:pPr algn="ctr"/>
-                      <a:r>
-                        <a:rPr sz="1100" b="0">
-                          <a:solidFill>
-                            <a:srgbClr val="222833"/>
-                          </a:solidFill>
-                          <a:latin typeface="Meiryo"/>
-                        </a:rPr>
-                        <a:t>★人口</a:t>
                       </a:r>
                     </a:p>
                   </a:txBody>
@@ -10805,7 +10758,7 @@
                           </a:solidFill>
                           <a:latin typeface="Meiryo"/>
                         </a:rPr>
-                        <a:t>労働人口率、高齢者率、単身率…</a:t>
+                        <a:t>労働人口率、高齢者率、単身率、若年単身率</a:t>
                       </a:r>
                     </a:p>
                   </a:txBody>
@@ -10830,20 +10783,6 @@
                         </a:rPr>
                         <a:t>街の住民構成</a:t>
                       </a:r>
-                    </a:p>
-                  </a:txBody>
-                  <a:tcPr anchor="ctr">
-                    <a:solidFill>
-                      <a:srgbClr val="FFFFFF"/>
-                    </a:solidFill>
-                  </a:tcPr>
-                </a:tc>
-                <a:tc>
-                  <a:txBody>
-                    <a:bodyPr/>
-                    <a:lstStyle/>
-                    <a:p>
-                      <a:pPr algn="ctr"/>
                     </a:p>
                   </a:txBody>
                   <a:tcPr anchor="ctr">
@@ -10913,7 +10852,7 @@
                           </a:solidFill>
                           <a:latin typeface="Meiryo"/>
                         </a:rPr>
-                        <a:t>他ジャンル店舗数、飽和度、近隣平均…</a:t>
+                        <a:t>他ジャンル店舗数、商業密度ランク、近隣平均店舗数、飽和度</a:t>
                       </a:r>
                     </a:p>
                   </a:txBody>
@@ -10937,29 +10876,6 @@
                           <a:latin typeface="Meiryo"/>
                         </a:rPr>
                         <a:t>ライバルの多さ</a:t>
-                      </a:r>
-                    </a:p>
-                  </a:txBody>
-                  <a:tcPr anchor="ctr">
-                    <a:solidFill>
-                      <a:srgbClr val="E8EEFD"/>
-                    </a:solidFill>
-                  </a:tcPr>
-                </a:tc>
-                <a:tc>
-                  <a:txBody>
-                    <a:bodyPr/>
-                    <a:lstStyle/>
-                    <a:p>
-                      <a:pPr algn="ctr"/>
-                      <a:r>
-                        <a:rPr sz="1100" b="0">
-                          <a:solidFill>
-                            <a:srgbClr val="222833"/>
-                          </a:solidFill>
-                          <a:latin typeface="Meiryo"/>
-                        </a:rPr>
-                        <a:t>★4個全て</a:t>
                       </a:r>
                     </a:p>
                   </a:txBody>
@@ -11063,20 +10979,6 @@
                     </a:solidFill>
                   </a:tcPr>
                 </a:tc>
-                <a:tc>
-                  <a:txBody>
-                    <a:bodyPr/>
-                    <a:lstStyle/>
-                    <a:p>
-                      <a:pPr algn="ctr"/>
-                    </a:p>
-                  </a:txBody>
-                  <a:tcPr anchor="ctr">
-                    <a:solidFill>
-                      <a:srgbClr val="FFFFFF"/>
-                    </a:solidFill>
-                  </a:tcPr>
-                </a:tc>
               </a:tr>
               <a:tr h="613954">
                 <a:tc>
@@ -11115,7 +11017,7 @@
                           </a:solidFill>
                           <a:latin typeface="Meiryo"/>
                         </a:rPr>
-                        <a:t>4</a:t>
+                        <a:t>3</a:t>
                       </a:r>
                     </a:p>
                   </a:txBody>
@@ -11138,7 +11040,7 @@
                           </a:solidFill>
                           <a:latin typeface="Meiryo"/>
                         </a:rPr>
-                        <a:t>地価、Google評価、レビュー数…</a:t>
+                        <a:t>地価、Google平均評価、店あたりレビュー数</a:t>
                       </a:r>
                     </a:p>
                   </a:txBody>
@@ -11162,29 +11064,6 @@
                           <a:latin typeface="Meiryo"/>
                         </a:rPr>
                         <a:t>エリアの格</a:t>
-                      </a:r>
-                    </a:p>
-                  </a:txBody>
-                  <a:tcPr anchor="ctr">
-                    <a:solidFill>
-                      <a:srgbClr val="E8EEFD"/>
-                    </a:solidFill>
-                  </a:tcPr>
-                </a:tc>
-                <a:tc>
-                  <a:txBody>
-                    <a:bodyPr/>
-                    <a:lstStyle/>
-                    <a:p>
-                      <a:pPr algn="ctr"/>
-                      <a:r>
-                        <a:rPr sz="1100" b="0">
-                          <a:solidFill>
-                            <a:srgbClr val="222833"/>
-                          </a:solidFill>
-                          <a:latin typeface="Meiryo"/>
-                        </a:rPr>
-                        <a:t>★Google評価</a:t>
                       </a:r>
                     </a:p>
                   </a:txBody>
@@ -11232,7 +11111,7 @@
                           </a:solidFill>
                           <a:latin typeface="Meiryo"/>
                         </a:rPr>
-                        <a:t>6</a:t>
+                        <a:t>5</a:t>
                       </a:r>
                     </a:p>
                   </a:txBody>
@@ -11255,7 +11134,7 @@
                           </a:solidFill>
                           <a:latin typeface="Meiryo"/>
                         </a:rPr>
-                        <a:t>ジャンル種別、多様性、集中度…</a:t>
+                        <a:t>ジャンル種別、多様性、集中度(HHI)、近隣平均人口、Google密度</a:t>
                       </a:r>
                     </a:p>
                   </a:txBody>
@@ -11288,29 +11167,6 @@
                     </a:solidFill>
                   </a:tcPr>
                 </a:tc>
-                <a:tc>
-                  <a:txBody>
-                    <a:bodyPr/>
-                    <a:lstStyle/>
-                    <a:p>
-                      <a:pPr algn="ctr"/>
-                      <a:r>
-                        <a:rPr sz="1100" b="0">
-                          <a:solidFill>
-                            <a:srgbClr val="222833"/>
-                          </a:solidFill>
-                          <a:latin typeface="Meiryo"/>
-                        </a:rPr>
-                        <a:t>★集中度</a:t>
-                      </a:r>
-                    </a:p>
-                  </a:txBody>
-                  <a:tcPr anchor="ctr">
-                    <a:solidFill>
-                      <a:srgbClr val="FFFFFF"/>
-                    </a:solidFill>
-                  </a:tcPr>
-                </a:tc>
               </a:tr>
             </a:tbl>
           </a:graphicData>
@@ -11353,7 +11209,7 @@
                 </a:solidFill>
                 <a:latin typeface="Meiryo"/>
               </a:rPr>
-              <a:t>補足: MLは28特徴量を使用（人口系含む）。人口欠損10.1%はゼロ埋め。Optuna 100 trialでチューニング済み。</a:t>
+              <a:t>補足: MLは26特徴量を使用（人口系含む）。人口欠損10.1%はゼロ埋め。Optuna 100 trialでチューニング済み。</a:t>
             </a:r>
           </a:p>
         </p:txBody>

--- a/docs/market_gap_finder_presentation.pptx
+++ b/docs/market_gap_finder_presentation.pptx
@@ -9030,8 +9030,97 @@
         </p:nvSpPr>
         <p:spPr>
           <a:xfrm>
-            <a:off x="5440680" y="914400"/>
-            <a:ext cx="6172200" cy="868680"/>
+            <a:off x="5440680" y="868680"/>
+            <a:ext cx="6172200" cy="2651760"/>
+          </a:xfrm>
+          <a:prstGeom prst="roundRect">
+            <a:avLst>
+              <a:gd name="adj" fmla="val 8000"/>
+            </a:avLst>
+          </a:prstGeom>
+          <a:solidFill>
+            <a:srgbClr val="F0F2F5"/>
+          </a:solidFill>
+          <a:ln w="12700">
+            <a:solidFill>
+              <a:srgbClr val="D7DEEA"/>
+            </a:solidFill>
+          </a:ln>
+        </p:spPr>
+        <p:style>
+          <a:lnRef idx="1">
+            <a:schemeClr val="accent1"/>
+          </a:lnRef>
+          <a:fillRef idx="3">
+            <a:schemeClr val="accent1"/>
+          </a:fillRef>
+          <a:effectRef idx="2">
+            <a:schemeClr val="accent1"/>
+          </a:effectRef>
+          <a:fontRef idx="minor">
+            <a:schemeClr val="lt1"/>
+          </a:fontRef>
+        </p:style>
+        <p:txBody>
+          <a:bodyPr rtlCol="0" anchor="ctr"/>
+          <a:lstStyle/>
+          <a:p>
+            <a:pPr algn="ctr"/>
+          </a:p>
+        </p:txBody>
+      </p:sp>
+      <p:sp>
+        <p:nvSpPr>
+          <p:cNvPr id="6" name="TextBox 5"/>
+          <p:cNvSpPr txBox="1"/>
+          <p:nvPr/>
+        </p:nvSpPr>
+        <p:spPr>
+          <a:xfrm>
+            <a:off x="5623560" y="1993392"/>
+            <a:ext cx="5806440" cy="457200"/>
+          </a:xfrm>
+          <a:prstGeom prst="rect">
+            <a:avLst/>
+          </a:prstGeom>
+          <a:noFill/>
+        </p:spPr>
+        <p:txBody>
+          <a:bodyPr wrap="square" anchor="ctr">
+            <a:spAutoFit/>
+          </a:bodyPr>
+          <a:lstStyle/>
+          <a:p>
+            <a:pPr algn="ctr">
+              <a:spcBef>
+                <a:spcPts val="0"/>
+              </a:spcBef>
+              <a:spcAft>
+                <a:spcPts val="0"/>
+              </a:spcAft>
+            </a:pPr>
+            <a:r>
+              <a:rPr sz="1400" b="0">
+                <a:solidFill>
+                  <a:srgbClr val="666F7A"/>
+                </a:solidFill>
+                <a:latin typeface="Meiryo"/>
+              </a:rPr>
+              <a:t>人口欠損率チャートが見つかりません</a:t>
+            </a:r>
+          </a:p>
+        </p:txBody>
+      </p:sp>
+      <p:sp>
+        <p:nvSpPr>
+          <p:cNvPr id="7" name="Rounded Rectangle 6"/>
+          <p:cNvSpPr/>
+          <p:nvPr/>
+        </p:nvSpPr>
+        <p:spPr>
+          <a:xfrm>
+            <a:off x="502920" y="3749039"/>
+            <a:ext cx="5394960" cy="2377440"/>
           </a:xfrm>
           <a:prstGeom prst="roundRect">
             <a:avLst>
@@ -9071,14 +9160,14 @@
       </p:sp>
       <p:sp>
         <p:nvSpPr>
-          <p:cNvPr id="6" name="TextBox 5"/>
+          <p:cNvPr id="8" name="TextBox 7"/>
           <p:cNvSpPr txBox="1"/>
           <p:nvPr/>
         </p:nvSpPr>
         <p:spPr>
           <a:xfrm>
-            <a:off x="5669280" y="1133856"/>
-            <a:ext cx="5669280" cy="320040"/>
+            <a:off x="749808" y="3950208"/>
+            <a:ext cx="1645920" cy="256032"/>
           </a:xfrm>
           <a:prstGeom prst="rect">
             <a:avLst/>
@@ -9102,95 +9191,6 @@
             <a:r>
               <a:rPr sz="1600" b="1">
                 <a:solidFill>
-                  <a:srgbClr val="222833"/>
-                </a:solidFill>
-                <a:latin typeface="Meiryo"/>
-              </a:rPr>
-              <a:t>ほとんどのエリアは店舗数1〜2軒。一部だけ100軒超。対数変換で公平に比較。</a:t>
-            </a:r>
-          </a:p>
-        </p:txBody>
-      </p:sp>
-      <p:sp>
-        <p:nvSpPr>
-          <p:cNvPr id="7" name="Rounded Rectangle 6"/>
-          <p:cNvSpPr/>
-          <p:nvPr/>
-        </p:nvSpPr>
-        <p:spPr>
-          <a:xfrm>
-            <a:off x="502920" y="3749039"/>
-            <a:ext cx="5394960" cy="2377440"/>
-          </a:xfrm>
-          <a:prstGeom prst="roundRect">
-            <a:avLst>
-              <a:gd name="adj" fmla="val 8000"/>
-            </a:avLst>
-          </a:prstGeom>
-          <a:solidFill>
-            <a:srgbClr val="E8EEFD"/>
-          </a:solidFill>
-          <a:ln w="12700">
-            <a:solidFill>
-              <a:srgbClr val="D7DEEA"/>
-            </a:solidFill>
-          </a:ln>
-        </p:spPr>
-        <p:style>
-          <a:lnRef idx="1">
-            <a:schemeClr val="accent1"/>
-          </a:lnRef>
-          <a:fillRef idx="3">
-            <a:schemeClr val="accent1"/>
-          </a:fillRef>
-          <a:effectRef idx="2">
-            <a:schemeClr val="accent1"/>
-          </a:effectRef>
-          <a:fontRef idx="minor">
-            <a:schemeClr val="lt1"/>
-          </a:fontRef>
-        </p:style>
-        <p:txBody>
-          <a:bodyPr rtlCol="0" anchor="ctr"/>
-          <a:lstStyle/>
-          <a:p>
-            <a:pPr algn="ctr"/>
-          </a:p>
-        </p:txBody>
-      </p:sp>
-      <p:sp>
-        <p:nvSpPr>
-          <p:cNvPr id="8" name="TextBox 7"/>
-          <p:cNvSpPr txBox="1"/>
-          <p:nvPr/>
-        </p:nvSpPr>
-        <p:spPr>
-          <a:xfrm>
-            <a:off x="749808" y="3950208"/>
-            <a:ext cx="1645920" cy="256032"/>
-          </a:xfrm>
-          <a:prstGeom prst="rect">
-            <a:avLst/>
-          </a:prstGeom>
-          <a:noFill/>
-        </p:spPr>
-        <p:txBody>
-          <a:bodyPr wrap="square" anchor="t">
-            <a:spAutoFit/>
-          </a:bodyPr>
-          <a:lstStyle/>
-          <a:p>
-            <a:pPr algn="l">
-              <a:spcBef>
-                <a:spcPts val="0"/>
-              </a:spcBef>
-              <a:spcAft>
-                <a:spcPts val="0"/>
-              </a:spcAft>
-            </a:pPr>
-            <a:r>
-              <a:rPr sz="1600" b="1">
-                <a:solidFill>
                   <a:srgbClr val="2D5BE3"/>
                 </a:solidFill>
                 <a:latin typeface="Meiryo"/>
@@ -9269,6 +9269,31 @@
                 <a:latin typeface="Meiryo"/>
               </a:rPr>
               <a:t>「他ジャンルの店が多いエリア」ほど飲食店が多い → 商業集積が鍵</a:t>
+            </a:r>
+          </a:p>
+          <a:p>
+            <a:pPr>
+              <a:spcAft>
+                <a:spcPts val="500"/>
+              </a:spcAft>
+            </a:pPr>
+            <a:r>
+              <a:rPr sz="1400">
+                <a:solidFill>
+                  <a:srgbClr val="2D5BE3"/>
+                </a:solidFill>
+                <a:latin typeface="Meiryo"/>
+              </a:rPr>
+              <a:t>• </a:t>
+            </a:r>
+            <a:r>
+              <a:rPr sz="1400">
+                <a:solidFill>
+                  <a:srgbClr val="222833"/>
+                </a:solidFill>
+                <a:latin typeface="Meiryo"/>
+              </a:rPr>
+              <a:t>人口データの欠損は0.2%（5/1,233メッシュ）→ ほぼ完全に揃っている</a:t>
             </a:r>
           </a:p>
         </p:txBody>
@@ -9430,7 +9455,7 @@
                 </a:solidFill>
                 <a:latin typeface="Meiryo"/>
               </a:rPr>
-              <a:t>人口データの10.1%が欠損 → ゼロ埋めしてMLモデルに含む（除外しても精度差なし）</a:t>
+              <a:t>人口データの欠損0.2% → ゼロ埋めしてMLモデルに含む（除外しても精度差なし）</a:t>
             </a:r>
           </a:p>
         </p:txBody>
@@ -11209,7 +11234,7 @@
                 </a:solidFill>
                 <a:latin typeface="Meiryo"/>
               </a:rPr>
-              <a:t>補足: MLは26特徴量を使用（人口系含む）。人口欠損10.1%はゼロ埋め。Optuna 100 trialでチューニング済み。</a:t>
+              <a:t>補足: MLは26特徴量を使用（人口系含む）。人口欠損0.2%はゼロ埋め。Optuna 100 trialでチューニング済み。</a:t>
             </a:r>
           </a:p>
         </p:txBody>

--- a/docs/market_gap_finder_presentation.pptx
+++ b/docs/market_gap_finder_presentation.pptx
@@ -9022,16 +9022,227 @@
           </a:prstGeom>
         </p:spPr>
       </p:pic>
-      <p:sp>
-        <p:nvSpPr>
-          <p:cNvPr id="5" name="Rounded Rectangle 4"/>
-          <p:cNvSpPr/>
-          <p:nvPr/>
-        </p:nvSpPr>
+      <p:pic>
+        <p:nvPicPr>
+          <p:cNvPr id="5" name="Picture 4" descr="tokyo_pop_missing.png"/>
+          <p:cNvPicPr>
+            <a:picLocks noChangeAspect="1"/>
+          </p:cNvPicPr>
+          <p:nvPr/>
+        </p:nvPicPr>
+        <p:blipFill>
+          <a:blip r:embed="rId3"/>
+          <a:stretch>
+            <a:fillRect/>
+          </a:stretch>
+        </p:blipFill>
         <p:spPr>
           <a:xfrm>
             <a:off x="5440680" y="868680"/>
             <a:ext cx="6172200" cy="2651760"/>
+          </a:xfrm>
+          <a:prstGeom prst="rect">
+            <a:avLst/>
+          </a:prstGeom>
+        </p:spPr>
+      </p:pic>
+      <p:sp>
+        <p:nvSpPr>
+          <p:cNvPr id="6" name="Rounded Rectangle 5"/>
+          <p:cNvSpPr/>
+          <p:nvPr/>
+        </p:nvSpPr>
+        <p:spPr>
+          <a:xfrm>
+            <a:off x="502920" y="3749039"/>
+            <a:ext cx="5394960" cy="2377440"/>
+          </a:xfrm>
+          <a:prstGeom prst="roundRect">
+            <a:avLst>
+              <a:gd name="adj" fmla="val 8000"/>
+            </a:avLst>
+          </a:prstGeom>
+          <a:solidFill>
+            <a:srgbClr val="E8EEFD"/>
+          </a:solidFill>
+          <a:ln w="12700">
+            <a:solidFill>
+              <a:srgbClr val="D7DEEA"/>
+            </a:solidFill>
+          </a:ln>
+        </p:spPr>
+        <p:style>
+          <a:lnRef idx="1">
+            <a:schemeClr val="accent1"/>
+          </a:lnRef>
+          <a:fillRef idx="3">
+            <a:schemeClr val="accent1"/>
+          </a:fillRef>
+          <a:effectRef idx="2">
+            <a:schemeClr val="accent1"/>
+          </a:effectRef>
+          <a:fontRef idx="minor">
+            <a:schemeClr val="lt1"/>
+          </a:fontRef>
+        </p:style>
+        <p:txBody>
+          <a:bodyPr rtlCol="0" anchor="ctr"/>
+          <a:lstStyle/>
+          <a:p>
+            <a:pPr algn="ctr"/>
+          </a:p>
+        </p:txBody>
+      </p:sp>
+      <p:sp>
+        <p:nvSpPr>
+          <p:cNvPr id="7" name="TextBox 6"/>
+          <p:cNvSpPr txBox="1"/>
+          <p:nvPr/>
+        </p:nvSpPr>
+        <p:spPr>
+          <a:xfrm>
+            <a:off x="749808" y="3950208"/>
+            <a:ext cx="1645920" cy="256032"/>
+          </a:xfrm>
+          <a:prstGeom prst="rect">
+            <a:avLst/>
+          </a:prstGeom>
+          <a:noFill/>
+        </p:spPr>
+        <p:txBody>
+          <a:bodyPr wrap="square" anchor="t">
+            <a:spAutoFit/>
+          </a:bodyPr>
+          <a:lstStyle/>
+          <a:p>
+            <a:pPr algn="l">
+              <a:spcBef>
+                <a:spcPts val="0"/>
+              </a:spcBef>
+              <a:spcAft>
+                <a:spcPts val="0"/>
+              </a:spcAft>
+            </a:pPr>
+            <a:r>
+              <a:rPr sz="1600" b="1">
+                <a:solidFill>
+                  <a:srgbClr val="2D5BE3"/>
+                </a:solidFill>
+                <a:latin typeface="Meiryo"/>
+              </a:rPr>
+              <a:t>気づき</a:t>
+            </a:r>
+          </a:p>
+        </p:txBody>
+      </p:sp>
+      <p:sp>
+        <p:nvSpPr>
+          <p:cNvPr id="8" name="TextBox 7"/>
+          <p:cNvSpPr txBox="1"/>
+          <p:nvPr/>
+        </p:nvSpPr>
+        <p:spPr>
+          <a:xfrm>
+            <a:off x="749808" y="4297680"/>
+            <a:ext cx="4800600" cy="1554480"/>
+          </a:xfrm>
+          <a:prstGeom prst="rect">
+            <a:avLst/>
+          </a:prstGeom>
+          <a:noFill/>
+        </p:spPr>
+        <p:txBody>
+          <a:bodyPr wrap="square" anchor="t">
+            <a:spAutoFit/>
+          </a:bodyPr>
+          <a:lstStyle/>
+          <a:p>
+            <a:pPr>
+              <a:spcAft>
+                <a:spcPts val="500"/>
+              </a:spcAft>
+            </a:pPr>
+            <a:r>
+              <a:rPr sz="1400">
+                <a:solidFill>
+                  <a:srgbClr val="2D5BE3"/>
+                </a:solidFill>
+                <a:latin typeface="Meiryo"/>
+              </a:rPr>
+              <a:t>• </a:t>
+            </a:r>
+            <a:r>
+              <a:rPr sz="1400">
+                <a:solidFill>
+                  <a:srgbClr val="222833"/>
+                </a:solidFill>
+                <a:latin typeface="Meiryo"/>
+              </a:rPr>
+              <a:t>ほとんどのエリアは店舗1〜2軒、一部だけ100軒超 → データが偏っている</a:t>
+            </a:r>
+          </a:p>
+          <a:p>
+            <a:pPr>
+              <a:spcAft>
+                <a:spcPts val="500"/>
+              </a:spcAft>
+            </a:pPr>
+            <a:r>
+              <a:rPr sz="1400">
+                <a:solidFill>
+                  <a:srgbClr val="2D5BE3"/>
+                </a:solidFill>
+                <a:latin typeface="Meiryo"/>
+              </a:rPr>
+              <a:t>• </a:t>
+            </a:r>
+            <a:r>
+              <a:rPr sz="1400">
+                <a:solidFill>
+                  <a:srgbClr val="222833"/>
+                </a:solidFill>
+                <a:latin typeface="Meiryo"/>
+              </a:rPr>
+              <a:t>「他ジャンルの店が多いエリア」ほど飲食店が多い → 商業集積が鍵</a:t>
+            </a:r>
+          </a:p>
+          <a:p>
+            <a:pPr>
+              <a:spcAft>
+                <a:spcPts val="500"/>
+              </a:spcAft>
+            </a:pPr>
+            <a:r>
+              <a:rPr sz="1400">
+                <a:solidFill>
+                  <a:srgbClr val="2D5BE3"/>
+                </a:solidFill>
+                <a:latin typeface="Meiryo"/>
+              </a:rPr>
+              <a:t>• </a:t>
+            </a:r>
+            <a:r>
+              <a:rPr sz="1400">
+                <a:solidFill>
+                  <a:srgbClr val="222833"/>
+                </a:solidFill>
+                <a:latin typeface="Meiryo"/>
+              </a:rPr>
+              <a:t>人口データの欠損は0.2%（5/1,233メッシュ）→ ほぼ完全に揃っている</a:t>
+            </a:r>
+          </a:p>
+        </p:txBody>
+      </p:sp>
+      <p:sp>
+        <p:nvSpPr>
+          <p:cNvPr id="9" name="Rounded Rectangle 8"/>
+          <p:cNvSpPr/>
+          <p:nvPr/>
+        </p:nvSpPr>
+        <p:spPr>
+          <a:xfrm>
+            <a:off x="6035040" y="3749039"/>
+            <a:ext cx="5577840" cy="2377440"/>
           </a:xfrm>
           <a:prstGeom prst="roundRect">
             <a:avLst>
@@ -9071,103 +9282,14 @@
       </p:sp>
       <p:sp>
         <p:nvSpPr>
-          <p:cNvPr id="6" name="TextBox 5"/>
+          <p:cNvPr id="10" name="TextBox 9"/>
           <p:cNvSpPr txBox="1"/>
           <p:nvPr/>
         </p:nvSpPr>
         <p:spPr>
           <a:xfrm>
-            <a:off x="5623560" y="1993392"/>
-            <a:ext cx="5806440" cy="457200"/>
-          </a:xfrm>
-          <a:prstGeom prst="rect">
-            <a:avLst/>
-          </a:prstGeom>
-          <a:noFill/>
-        </p:spPr>
-        <p:txBody>
-          <a:bodyPr wrap="square" anchor="ctr">
-            <a:spAutoFit/>
-          </a:bodyPr>
-          <a:lstStyle/>
-          <a:p>
-            <a:pPr algn="ctr">
-              <a:spcBef>
-                <a:spcPts val="0"/>
-              </a:spcBef>
-              <a:spcAft>
-                <a:spcPts val="0"/>
-              </a:spcAft>
-            </a:pPr>
-            <a:r>
-              <a:rPr sz="1400" b="0">
-                <a:solidFill>
-                  <a:srgbClr val="666F7A"/>
-                </a:solidFill>
-                <a:latin typeface="Meiryo"/>
-              </a:rPr>
-              <a:t>人口欠損率チャートが見つかりません</a:t>
-            </a:r>
-          </a:p>
-        </p:txBody>
-      </p:sp>
-      <p:sp>
-        <p:nvSpPr>
-          <p:cNvPr id="7" name="Rounded Rectangle 6"/>
-          <p:cNvSpPr/>
-          <p:nvPr/>
-        </p:nvSpPr>
-        <p:spPr>
-          <a:xfrm>
-            <a:off x="502920" y="3749039"/>
-            <a:ext cx="5394960" cy="2377440"/>
-          </a:xfrm>
-          <a:prstGeom prst="roundRect">
-            <a:avLst>
-              <a:gd name="adj" fmla="val 8000"/>
-            </a:avLst>
-          </a:prstGeom>
-          <a:solidFill>
-            <a:srgbClr val="E8EEFD"/>
-          </a:solidFill>
-          <a:ln w="12700">
-            <a:solidFill>
-              <a:srgbClr val="D7DEEA"/>
-            </a:solidFill>
-          </a:ln>
-        </p:spPr>
-        <p:style>
-          <a:lnRef idx="1">
-            <a:schemeClr val="accent1"/>
-          </a:lnRef>
-          <a:fillRef idx="3">
-            <a:schemeClr val="accent1"/>
-          </a:fillRef>
-          <a:effectRef idx="2">
-            <a:schemeClr val="accent1"/>
-          </a:effectRef>
-          <a:fontRef idx="minor">
-            <a:schemeClr val="lt1"/>
-          </a:fontRef>
-        </p:style>
-        <p:txBody>
-          <a:bodyPr rtlCol="0" anchor="ctr"/>
-          <a:lstStyle/>
-          <a:p>
-            <a:pPr algn="ctr"/>
-          </a:p>
-        </p:txBody>
-      </p:sp>
-      <p:sp>
-        <p:nvSpPr>
-          <p:cNvPr id="8" name="TextBox 7"/>
-          <p:cNvSpPr txBox="1"/>
-          <p:nvPr/>
-        </p:nvSpPr>
-        <p:spPr>
-          <a:xfrm>
-            <a:off x="749808" y="3950208"/>
-            <a:ext cx="1645920" cy="256032"/>
+            <a:off x="6281928" y="3950208"/>
+            <a:ext cx="1828800" cy="256032"/>
           </a:xfrm>
           <a:prstGeom prst="rect">
             <a:avLst/>
@@ -9191,205 +9313,18 @@
             <a:r>
               <a:rPr sz="1600" b="1">
                 <a:solidFill>
-                  <a:srgbClr val="2D5BE3"/>
-                </a:solidFill>
-                <a:latin typeface="Meiryo"/>
-              </a:rPr>
-              <a:t>気づき</a:t>
-            </a:r>
-          </a:p>
-        </p:txBody>
-      </p:sp>
-      <p:sp>
-        <p:nvSpPr>
-          <p:cNvPr id="9" name="TextBox 8"/>
-          <p:cNvSpPr txBox="1"/>
-          <p:nvPr/>
-        </p:nvSpPr>
-        <p:spPr>
-          <a:xfrm>
-            <a:off x="749808" y="4297680"/>
-            <a:ext cx="4800600" cy="1554480"/>
-          </a:xfrm>
-          <a:prstGeom prst="rect">
-            <a:avLst/>
-          </a:prstGeom>
-          <a:noFill/>
-        </p:spPr>
-        <p:txBody>
-          <a:bodyPr wrap="square" anchor="t">
-            <a:spAutoFit/>
-          </a:bodyPr>
-          <a:lstStyle/>
-          <a:p>
-            <a:pPr>
-              <a:spcAft>
-                <a:spcPts val="500"/>
-              </a:spcAft>
-            </a:pPr>
-            <a:r>
-              <a:rPr sz="1400">
-                <a:solidFill>
-                  <a:srgbClr val="2D5BE3"/>
-                </a:solidFill>
-                <a:latin typeface="Meiryo"/>
-              </a:rPr>
-              <a:t>• </a:t>
-            </a:r>
-            <a:r>
-              <a:rPr sz="1400">
-                <a:solidFill>
-                  <a:srgbClr val="222833"/>
-                </a:solidFill>
-                <a:latin typeface="Meiryo"/>
-              </a:rPr>
-              <a:t>ほとんどのエリアは店舗1〜2軒、一部だけ100軒超 → データが偏っている</a:t>
-            </a:r>
-          </a:p>
-          <a:p>
-            <a:pPr>
-              <a:spcAft>
-                <a:spcPts val="500"/>
-              </a:spcAft>
-            </a:pPr>
-            <a:r>
-              <a:rPr sz="1400">
-                <a:solidFill>
-                  <a:srgbClr val="2D5BE3"/>
-                </a:solidFill>
-                <a:latin typeface="Meiryo"/>
-              </a:rPr>
-              <a:t>• </a:t>
-            </a:r>
-            <a:r>
-              <a:rPr sz="1400">
-                <a:solidFill>
-                  <a:srgbClr val="222833"/>
-                </a:solidFill>
-                <a:latin typeface="Meiryo"/>
-              </a:rPr>
-              <a:t>「他ジャンルの店が多いエリア」ほど飲食店が多い → 商業集積が鍵</a:t>
-            </a:r>
-          </a:p>
-          <a:p>
-            <a:pPr>
-              <a:spcAft>
-                <a:spcPts val="500"/>
-              </a:spcAft>
-            </a:pPr>
-            <a:r>
-              <a:rPr sz="1400">
-                <a:solidFill>
-                  <a:srgbClr val="2D5BE3"/>
-                </a:solidFill>
-                <a:latin typeface="Meiryo"/>
-              </a:rPr>
-              <a:t>• </a:t>
-            </a:r>
-            <a:r>
-              <a:rPr sz="1400">
-                <a:solidFill>
-                  <a:srgbClr val="222833"/>
-                </a:solidFill>
-                <a:latin typeface="Meiryo"/>
-              </a:rPr>
-              <a:t>人口データの欠損は0.2%（5/1,233メッシュ）→ ほぼ完全に揃っている</a:t>
-            </a:r>
-          </a:p>
-        </p:txBody>
-      </p:sp>
-      <p:sp>
-        <p:nvSpPr>
-          <p:cNvPr id="10" name="Rounded Rectangle 9"/>
-          <p:cNvSpPr/>
-          <p:nvPr/>
-        </p:nvSpPr>
-        <p:spPr>
-          <a:xfrm>
-            <a:off x="6035040" y="3749039"/>
-            <a:ext cx="5577840" cy="2377440"/>
-          </a:xfrm>
-          <a:prstGeom prst="roundRect">
-            <a:avLst>
-              <a:gd name="adj" fmla="val 8000"/>
-            </a:avLst>
-          </a:prstGeom>
-          <a:solidFill>
-            <a:srgbClr val="F0F2F5"/>
-          </a:solidFill>
-          <a:ln w="12700">
-            <a:solidFill>
-              <a:srgbClr val="D7DEEA"/>
-            </a:solidFill>
-          </a:ln>
-        </p:spPr>
-        <p:style>
-          <a:lnRef idx="1">
-            <a:schemeClr val="accent1"/>
-          </a:lnRef>
-          <a:fillRef idx="3">
-            <a:schemeClr val="accent1"/>
-          </a:fillRef>
-          <a:effectRef idx="2">
-            <a:schemeClr val="accent1"/>
-          </a:effectRef>
-          <a:fontRef idx="minor">
-            <a:schemeClr val="lt1"/>
-          </a:fontRef>
-        </p:style>
-        <p:txBody>
-          <a:bodyPr rtlCol="0" anchor="ctr"/>
-          <a:lstStyle/>
-          <a:p>
-            <a:pPr algn="ctr"/>
+                  <a:srgbClr val="0F9D58"/>
+                </a:solidFill>
+                <a:latin typeface="Meiryo"/>
+              </a:rPr>
+              <a:t>だからこうした</a:t>
+            </a:r>
           </a:p>
         </p:txBody>
       </p:sp>
       <p:sp>
         <p:nvSpPr>
           <p:cNvPr id="11" name="TextBox 10"/>
-          <p:cNvSpPr txBox="1"/>
-          <p:nvPr/>
-        </p:nvSpPr>
-        <p:spPr>
-          <a:xfrm>
-            <a:off x="6281928" y="3950208"/>
-            <a:ext cx="1828800" cy="256032"/>
-          </a:xfrm>
-          <a:prstGeom prst="rect">
-            <a:avLst/>
-          </a:prstGeom>
-          <a:noFill/>
-        </p:spPr>
-        <p:txBody>
-          <a:bodyPr wrap="square" anchor="t">
-            <a:spAutoFit/>
-          </a:bodyPr>
-          <a:lstStyle/>
-          <a:p>
-            <a:pPr algn="l">
-              <a:spcBef>
-                <a:spcPts val="0"/>
-              </a:spcBef>
-              <a:spcAft>
-                <a:spcPts val="0"/>
-              </a:spcAft>
-            </a:pPr>
-            <a:r>
-              <a:rPr sz="1600" b="1">
-                <a:solidFill>
-                  <a:srgbClr val="0F9D58"/>
-                </a:solidFill>
-                <a:latin typeface="Meiryo"/>
-              </a:rPr>
-              <a:t>だからこうした</a:t>
-            </a:r>
-          </a:p>
-        </p:txBody>
-      </p:sp>
-      <p:sp>
-        <p:nvSpPr>
-          <p:cNvPr id="12" name="TextBox 11"/>
           <p:cNvSpPr txBox="1"/>
           <p:nvPr/>
         </p:nvSpPr>

--- a/docs/market_gap_finder_presentation.pptx
+++ b/docs/market_gap_finder_presentation.pptx
@@ -9228,7 +9228,7 @@
                 </a:solidFill>
                 <a:latin typeface="Meiryo"/>
               </a:rPr>
-              <a:t>人口データの欠損は0.2%（5/1,233メッシュ）→ ほぼ完全に揃っている</a:t>
+              <a:t>人口データの欠損は0.4%（5/1,233メッシュ）→ ほぼ完全に揃っている</a:t>
             </a:r>
           </a:p>
         </p:txBody>
@@ -9390,7 +9390,7 @@
                 </a:solidFill>
                 <a:latin typeface="Meiryo"/>
               </a:rPr>
-              <a:t>人口データの欠損0.2% → ゼロ埋めしてMLモデルに含む（除外しても精度差なし）</a:t>
+              <a:t>人口データの欠損0.4% → ゼロ埋めしてMLモデルに含む（除外しても精度差なし）</a:t>
             </a:r>
           </a:p>
         </p:txBody>
@@ -11169,7 +11169,7 @@
                 </a:solidFill>
                 <a:latin typeface="Meiryo"/>
               </a:rPr>
-              <a:t>補足: MLは26特徴量を使用（人口系含む）。人口欠損0.2%はゼロ埋め。Optuna 100 trialでチューニング済み。</a:t>
+              <a:t>補足: MLは26特徴量を使用（人口系含む）。人口欠損0.4%はゼロ埋め。Optuna 100 trialでチューニング済み。</a:t>
             </a:r>
           </a:p>
         </p:txBody>

--- a/docs/market_gap_finder_presentation.pptx
+++ b/docs/market_gap_finder_presentation.pptx
@@ -11302,23 +11302,47 @@
         <p:spPr>
           <a:xfrm>
             <a:off x="502920" y="868680"/>
-            <a:ext cx="5029200" cy="4114800"/>
+            <a:ext cx="3840480" cy="3108960"/>
           </a:xfrm>
           <a:prstGeom prst="rect">
             <a:avLst/>
           </a:prstGeom>
         </p:spPr>
       </p:pic>
-      <p:sp>
-        <p:nvSpPr>
-          <p:cNvPr id="5" name="Rounded Rectangle 4"/>
+      <p:pic>
+        <p:nvPicPr>
+          <p:cNvPr id="5" name="Picture 4" descr="tokyo_scatter_zoom25.png"/>
+          <p:cNvPicPr>
+            <a:picLocks noChangeAspect="1"/>
+          </p:cNvPicPr>
+          <p:nvPr/>
+        </p:nvPicPr>
+        <p:blipFill>
+          <a:blip r:embed="rId3"/>
+          <a:stretch>
+            <a:fillRect/>
+          </a:stretch>
+        </p:blipFill>
+        <p:spPr>
+          <a:xfrm>
+            <a:off x="4434840" y="868680"/>
+            <a:ext cx="3840480" cy="3108960"/>
+          </a:xfrm>
+          <a:prstGeom prst="rect">
+            <a:avLst/>
+          </a:prstGeom>
+        </p:spPr>
+      </p:pic>
+      <p:sp>
+        <p:nvSpPr>
+          <p:cNvPr id="6" name="Rounded Rectangle 5"/>
           <p:cNvSpPr/>
           <p:nvPr/>
         </p:nvSpPr>
         <p:spPr>
           <a:xfrm>
-            <a:off x="5760720" y="868680"/>
-            <a:ext cx="5852160" cy="2011680"/>
+            <a:off x="8412480" y="868680"/>
+            <a:ext cx="3200400" cy="3108960"/>
           </a:xfrm>
           <a:prstGeom prst="roundRect">
             <a:avLst>
@@ -11358,14 +11382,14 @@
       </p:sp>
       <p:sp>
         <p:nvSpPr>
-          <p:cNvPr id="6" name="TextBox 5"/>
+          <p:cNvPr id="7" name="TextBox 6"/>
           <p:cNvSpPr txBox="1"/>
           <p:nvPr/>
         </p:nvSpPr>
         <p:spPr>
           <a:xfrm>
-            <a:off x="5989320" y="1005840"/>
-            <a:ext cx="5303520" cy="256032"/>
+            <a:off x="8595360" y="1005840"/>
+            <a:ext cx="2834640" cy="256032"/>
           </a:xfrm>
           <a:prstGeom prst="rect">
             <a:avLst/>
@@ -11400,14 +11424,14 @@
       </p:sp>
       <p:sp>
         <p:nvSpPr>
-          <p:cNvPr id="7" name="TextBox 6"/>
+          <p:cNvPr id="8" name="TextBox 7"/>
           <p:cNvSpPr txBox="1"/>
           <p:nvPr/>
         </p:nvSpPr>
         <p:spPr>
           <a:xfrm>
-            <a:off x="5989320" y="1325880"/>
-            <a:ext cx="5394960" cy="1371600"/>
+            <a:off x="8595360" y="1325880"/>
+            <a:ext cx="2834640" cy="2468880"/>
           </a:xfrm>
           <a:prstGeom prst="rect">
             <a:avLst/>
@@ -11426,7 +11450,7 @@
               </a:spcAft>
             </a:pPr>
             <a:r>
-              <a:rPr sz="1300">
+              <a:rPr sz="1200">
                 <a:solidFill>
                   <a:srgbClr val="2D5BE3"/>
                 </a:solidFill>
@@ -11435,13 +11459,13 @@
               <a:t>• </a:t>
             </a:r>
             <a:r>
-              <a:rPr sz="1300">
+              <a:rPr sz="1200">
                 <a:solidFill>
                   <a:srgbClr val="222833"/>
                 </a:solidFill>
                 <a:latin typeface="Meiryo"/>
               </a:rPr>
-              <a:t>本来は新しい時点のデータで精度を測るのが理想だが、時系列データが取れない</a:t>
+              <a:t>新しい時点のデータで精度を測るのが理想だが、時系列データが取れない</a:t>
             </a:r>
           </a:p>
           <a:p>
@@ -11451,7 +11475,7 @@
               </a:spcAft>
             </a:pPr>
             <a:r>
-              <a:rPr sz="1300">
+              <a:rPr sz="1200">
                 <a:solidFill>
                   <a:srgbClr val="2D5BE3"/>
                 </a:solidFill>
@@ -11460,27 +11484,27 @@
               <a:t>• </a:t>
             </a:r>
             <a:r>
-              <a:rPr sz="1300">
+              <a:rPr sz="1200">
                 <a:solidFill>
                   <a:srgbClr val="222833"/>
                 </a:solidFill>
                 <a:latin typeface="Meiryo"/>
               </a:rPr>
-              <a:t>学習データで評価するとリーケージ（情報漏れ）になるため、店舗数の分布が均等になるよう層化分割して汎化性能を測る</a:t>
-            </a:r>
-          </a:p>
-        </p:txBody>
-      </p:sp>
-      <p:sp>
-        <p:nvSpPr>
-          <p:cNvPr id="8" name="Rounded Rectangle 7"/>
+              <a:t>学習データで評価するとリーケージになるため、店舗数分布が均等になるよう層化分割して汎化性能を測る</a:t>
+            </a:r>
+          </a:p>
+        </p:txBody>
+      </p:sp>
+      <p:sp>
+        <p:nvSpPr>
+          <p:cNvPr id="9" name="Rounded Rectangle 8"/>
           <p:cNvSpPr/>
           <p:nvPr/>
         </p:nvSpPr>
         <p:spPr>
           <a:xfrm>
-            <a:off x="5760720" y="3063240"/>
-            <a:ext cx="5852160" cy="1645920"/>
+            <a:off x="502920" y="4160520"/>
+            <a:ext cx="5486400" cy="2011680"/>
           </a:xfrm>
           <a:prstGeom prst="roundRect">
             <a:avLst>
@@ -11520,14 +11544,14 @@
       </p:sp>
       <p:sp>
         <p:nvSpPr>
-          <p:cNvPr id="9" name="TextBox 8"/>
+          <p:cNvPr id="10" name="TextBox 9"/>
           <p:cNvSpPr txBox="1"/>
           <p:nvPr/>
         </p:nvSpPr>
         <p:spPr>
           <a:xfrm>
-            <a:off x="5989320" y="3200400"/>
-            <a:ext cx="5303520" cy="256032"/>
+            <a:off x="749808" y="4315968"/>
+            <a:ext cx="2743200" cy="256032"/>
           </a:xfrm>
           <a:prstGeom prst="rect">
             <a:avLst/>
@@ -11562,14 +11586,14 @@
       </p:sp>
       <p:sp>
         <p:nvSpPr>
-          <p:cNvPr id="10" name="TextBox 9"/>
+          <p:cNvPr id="11" name="TextBox 10"/>
           <p:cNvSpPr txBox="1"/>
           <p:nvPr/>
         </p:nvSpPr>
         <p:spPr>
           <a:xfrm>
-            <a:off x="5989320" y="3520440"/>
-            <a:ext cx="5394960" cy="1005840"/>
+            <a:off x="749808" y="4617720"/>
+            <a:ext cx="4937760" cy="1371600"/>
           </a:xfrm>
           <a:prstGeom prst="rect">
             <a:avLst/>
@@ -11660,14 +11684,14 @@
       </p:sp>
       <p:sp>
         <p:nvSpPr>
-          <p:cNvPr id="11" name="Rounded Rectangle 10"/>
+          <p:cNvPr id="12" name="Rounded Rectangle 11"/>
           <p:cNvSpPr/>
           <p:nvPr/>
         </p:nvSpPr>
         <p:spPr>
           <a:xfrm>
-            <a:off x="5760720" y="4892040"/>
-            <a:ext cx="5852160" cy="1371600"/>
+            <a:off x="6172200" y="4160520"/>
+            <a:ext cx="5440680" cy="2011680"/>
           </a:xfrm>
           <a:prstGeom prst="roundRect">
             <a:avLst>
@@ -11707,14 +11731,14 @@
       </p:sp>
       <p:sp>
         <p:nvSpPr>
-          <p:cNvPr id="12" name="TextBox 11"/>
+          <p:cNvPr id="13" name="TextBox 12"/>
           <p:cNvSpPr txBox="1"/>
           <p:nvPr/>
         </p:nvSpPr>
         <p:spPr>
           <a:xfrm>
-            <a:off x="5989320" y="5029200"/>
-            <a:ext cx="5303520" cy="256032"/>
+            <a:off x="6419088" y="4315968"/>
+            <a:ext cx="2743200" cy="256032"/>
           </a:xfrm>
           <a:prstGeom prst="rect">
             <a:avLst/>
@@ -11749,14 +11773,14 @@
       </p:sp>
       <p:sp>
         <p:nvSpPr>
-          <p:cNvPr id="13" name="TextBox 12"/>
+          <p:cNvPr id="14" name="TextBox 13"/>
           <p:cNvSpPr txBox="1"/>
           <p:nvPr/>
         </p:nvSpPr>
         <p:spPr>
           <a:xfrm>
-            <a:off x="5989320" y="5349240"/>
-            <a:ext cx="5394960" cy="731520"/>
+            <a:off x="6419088" y="4617720"/>
+            <a:ext cx="4937760" cy="1371600"/>
           </a:xfrm>
           <a:prstGeom prst="rect">
             <a:avLst/>

--- a/docs/market_gap_finder_presentation.pptx
+++ b/docs/market_gap_finder_presentation.pptx
@@ -3678,7 +3678,7 @@
                 </a:solidFill>
                 <a:latin typeface="Meiryo"/>
               </a:rPr>
-              <a:t>ジャンル種別（SHAP=0.196）と他ジャンル店舗数（0.109）が上位</a:t>
+              <a:t>ジャンル種別（0.206）が圧倒的に重要 → ジャンルによって店舗数の水準が大きく異なる</a:t>
             </a:r>
           </a:p>
           <a:p>
@@ -3703,7 +3703,7 @@
                 </a:solidFill>
                 <a:latin typeface="Meiryo"/>
               </a:rPr>
-              <a:t>人口系特徴量は含めているが重要度は低い（下位に位置）</a:t>
+              <a:t>Google評価（0.101）と他ジャンル店舗数（0.089）が続く → 評判と商業集積が鍵</a:t>
             </a:r>
           </a:p>
           <a:p>
@@ -3728,7 +3728,7 @@
                 </a:solidFill>
                 <a:latin typeface="Meiryo"/>
               </a:rPr>
-              <a:t>→ 「人口が多い」より「商業集積がある」方が飲食店数を決める</a:t>
+              <a:t>人口系特徴量はTop10圏外 → 「人口が多い」より「商業集積がある」方が効く</a:t>
             </a:r>
           </a:p>
         </p:txBody>
